--- a/_DOC/Apresentação Igor Ayello Borges.pptx
+++ b/_DOC/Apresentação Igor Ayello Borges.pptx
@@ -12,14 +12,17 @@
     <p:sldId id="259" r:id="rId9"/>
     <p:sldId id="260" r:id="rId10"/>
     <p:sldId id="261" r:id="rId11"/>
-    <p:sldId id="265" r:id="rId12"/>
-    <p:sldId id="266" r:id="rId13"/>
-    <p:sldId id="267" r:id="rId14"/>
-    <p:sldId id="268" r:id="rId15"/>
-    <p:sldId id="269" r:id="rId16"/>
-    <p:sldId id="262" r:id="rId17"/>
-    <p:sldId id="263" r:id="rId18"/>
-    <p:sldId id="264" r:id="rId19"/>
+    <p:sldId id="270" r:id="rId12"/>
+    <p:sldId id="271" r:id="rId13"/>
+    <p:sldId id="272" r:id="rId14"/>
+    <p:sldId id="265" r:id="rId15"/>
+    <p:sldId id="266" r:id="rId16"/>
+    <p:sldId id="267" r:id="rId17"/>
+    <p:sldId id="268" r:id="rId18"/>
+    <p:sldId id="269" r:id="rId19"/>
+    <p:sldId id="262" r:id="rId20"/>
+    <p:sldId id="263" r:id="rId21"/>
+    <p:sldId id="264" r:id="rId22"/>
   </p:sldIdLst>
   <p:sldSz cx="12192000" cy="6858000"/>
   <p:notesSz cx="6858000" cy="9144000"/>
@@ -525,7 +528,7 @@
               <a:pPr>
                 <a:defRPr/>
               </a:pPr>
-              <a:t>06/10/2025</a:t>
+              <a:t>07/10/2025</a:t>
             </a:fld>
             <a:endParaRPr lang="pt-BR"/>
           </a:p>
@@ -738,7 +741,7 @@
               <a:pPr>
                 <a:defRPr/>
               </a:pPr>
-              <a:t>06/10/2025</a:t>
+              <a:t>07/10/2025</a:t>
             </a:fld>
             <a:endParaRPr lang="pt-BR"/>
           </a:p>
@@ -961,7 +964,7 @@
               <a:pPr>
                 <a:defRPr/>
               </a:pPr>
-              <a:t>06/10/2025</a:t>
+              <a:t>07/10/2025</a:t>
             </a:fld>
             <a:endParaRPr lang="pt-BR"/>
           </a:p>
@@ -1198,7 +1201,7 @@
           <a:p>
             <a:fld id="{B0724664-DFBB-4E94-A029-90BF542E375A}" type="datetimeFigureOut">
               <a:rPr lang="pt-BR" smtClean="0"/>
-              <a:t>06/10/2025</a:t>
+              <a:t>07/10/2025</a:t>
             </a:fld>
             <a:endParaRPr lang="pt-BR"/>
           </a:p>
@@ -1396,7 +1399,7 @@
           <a:p>
             <a:fld id="{B0724664-DFBB-4E94-A029-90BF542E375A}" type="datetimeFigureOut">
               <a:rPr lang="pt-BR" smtClean="0"/>
-              <a:t>06/10/2025</a:t>
+              <a:t>07/10/2025</a:t>
             </a:fld>
             <a:endParaRPr lang="pt-BR"/>
           </a:p>
@@ -1671,7 +1674,7 @@
           <a:p>
             <a:fld id="{B0724664-DFBB-4E94-A029-90BF542E375A}" type="datetimeFigureOut">
               <a:rPr lang="pt-BR" smtClean="0"/>
-              <a:t>06/10/2025</a:t>
+              <a:t>07/10/2025</a:t>
             </a:fld>
             <a:endParaRPr lang="pt-BR"/>
           </a:p>
@@ -1936,7 +1939,7 @@
           <a:p>
             <a:fld id="{B0724664-DFBB-4E94-A029-90BF542E375A}" type="datetimeFigureOut">
               <a:rPr lang="pt-BR" smtClean="0"/>
-              <a:t>06/10/2025</a:t>
+              <a:t>07/10/2025</a:t>
             </a:fld>
             <a:endParaRPr lang="pt-BR"/>
           </a:p>
@@ -2348,7 +2351,7 @@
           <a:p>
             <a:fld id="{B0724664-DFBB-4E94-A029-90BF542E375A}" type="datetimeFigureOut">
               <a:rPr lang="pt-BR" smtClean="0"/>
-              <a:t>06/10/2025</a:t>
+              <a:t>07/10/2025</a:t>
             </a:fld>
             <a:endParaRPr lang="pt-BR"/>
           </a:p>
@@ -2489,7 +2492,7 @@
           <a:p>
             <a:fld id="{B0724664-DFBB-4E94-A029-90BF542E375A}" type="datetimeFigureOut">
               <a:rPr lang="pt-BR" smtClean="0"/>
-              <a:t>06/10/2025</a:t>
+              <a:t>07/10/2025</a:t>
             </a:fld>
             <a:endParaRPr lang="pt-BR"/>
           </a:p>
@@ -2602,7 +2605,7 @@
           <a:p>
             <a:fld id="{B0724664-DFBB-4E94-A029-90BF542E375A}" type="datetimeFigureOut">
               <a:rPr lang="pt-BR" smtClean="0"/>
-              <a:t>06/10/2025</a:t>
+              <a:t>07/10/2025</a:t>
             </a:fld>
             <a:endParaRPr lang="pt-BR"/>
           </a:p>
@@ -2913,7 +2916,7 @@
           <a:p>
             <a:fld id="{B0724664-DFBB-4E94-A029-90BF542E375A}" type="datetimeFigureOut">
               <a:rPr lang="pt-BR" smtClean="0"/>
-              <a:t>06/10/2025</a:t>
+              <a:t>07/10/2025</a:t>
             </a:fld>
             <a:endParaRPr lang="pt-BR"/>
           </a:p>
@@ -3109,7 +3112,7 @@
               <a:pPr>
                 <a:defRPr/>
               </a:pPr>
-              <a:t>06/10/2025</a:t>
+              <a:t>07/10/2025</a:t>
             </a:fld>
             <a:endParaRPr lang="pt-BR"/>
           </a:p>
@@ -3474,7 +3477,7 @@
           <a:p>
             <a:fld id="{B0724664-DFBB-4E94-A029-90BF542E375A}" type="datetimeFigureOut">
               <a:rPr lang="pt-BR" smtClean="0"/>
-              <a:t>06/10/2025</a:t>
+              <a:t>07/10/2025</a:t>
             </a:fld>
             <a:endParaRPr lang="pt-BR"/>
           </a:p>
@@ -3672,7 +3675,7 @@
           <a:p>
             <a:fld id="{B0724664-DFBB-4E94-A029-90BF542E375A}" type="datetimeFigureOut">
               <a:rPr lang="pt-BR" smtClean="0"/>
-              <a:t>06/10/2025</a:t>
+              <a:t>07/10/2025</a:t>
             </a:fld>
             <a:endParaRPr lang="pt-BR"/>
           </a:p>
@@ -3880,7 +3883,7 @@
           <a:p>
             <a:fld id="{B0724664-DFBB-4E94-A029-90BF542E375A}" type="datetimeFigureOut">
               <a:rPr lang="pt-BR" smtClean="0"/>
-              <a:t>06/10/2025</a:t>
+              <a:t>07/10/2025</a:t>
             </a:fld>
             <a:endParaRPr lang="pt-BR"/>
           </a:p>
@@ -4153,7 +4156,7 @@
               <a:pPr>
                 <a:defRPr/>
               </a:pPr>
-              <a:t>06/10/2025</a:t>
+              <a:t>07/10/2025</a:t>
             </a:fld>
             <a:endParaRPr lang="pt-BR"/>
           </a:p>
@@ -4427,7 +4430,7 @@
               <a:pPr>
                 <a:defRPr/>
               </a:pPr>
-              <a:t>06/10/2025</a:t>
+              <a:t>07/10/2025</a:t>
             </a:fld>
             <a:endParaRPr lang="pt-BR"/>
           </a:p>
@@ -4836,7 +4839,7 @@
               <a:pPr>
                 <a:defRPr/>
               </a:pPr>
-              <a:t>06/10/2025</a:t>
+              <a:t>07/10/2025</a:t>
             </a:fld>
             <a:endParaRPr lang="pt-BR"/>
           </a:p>
@@ -4998,7 +5001,7 @@
               <a:pPr>
                 <a:defRPr/>
               </a:pPr>
-              <a:t>06/10/2025</a:t>
+              <a:t>07/10/2025</a:t>
             </a:fld>
             <a:endParaRPr lang="pt-BR"/>
           </a:p>
@@ -5138,7 +5141,7 @@
               <a:pPr>
                 <a:defRPr/>
               </a:pPr>
-              <a:t>06/10/2025</a:t>
+              <a:t>07/10/2025</a:t>
             </a:fld>
             <a:endParaRPr lang="pt-BR"/>
           </a:p>
@@ -5458,7 +5461,7 @@
               <a:pPr>
                 <a:defRPr/>
               </a:pPr>
-              <a:t>06/10/2025</a:t>
+              <a:t>07/10/2025</a:t>
             </a:fld>
             <a:endParaRPr lang="pt-BR"/>
           </a:p>
@@ -5758,7 +5761,7 @@
               <a:pPr>
                 <a:defRPr/>
               </a:pPr>
-              <a:t>06/10/2025</a:t>
+              <a:t>07/10/2025</a:t>
             </a:fld>
             <a:endParaRPr lang="pt-BR"/>
           </a:p>
@@ -6083,7 +6086,7 @@
               <a:pPr>
                 <a:defRPr/>
               </a:pPr>
-              <a:t>06/10/2025</a:t>
+              <a:t>07/10/2025</a:t>
             </a:fld>
             <a:endParaRPr lang="pt-BR"/>
           </a:p>
@@ -6822,7 +6825,7 @@
           <a:p>
             <a:fld id="{B0724664-DFBB-4E94-A029-90BF542E375A}" type="datetimeFigureOut">
               <a:rPr lang="pt-BR" smtClean="0"/>
-              <a:t>06/10/2025</a:t>
+              <a:t>07/10/2025</a:t>
             </a:fld>
             <a:endParaRPr lang="pt-BR"/>
           </a:p>
@@ -7455,6 +7458,3828 @@
         <p:cNvPr id="1" name="">
           <a:extLst>
             <a:ext uri="{FF2B5EF4-FFF2-40B4-BE49-F238E27FC236}">
+              <a16:creationId xmlns:a16="http://schemas.microsoft.com/office/drawing/2014/main" id="{07DE3702-BB21-12E5-0847-452876648B2E}"/>
+            </a:ext>
+          </a:extLst>
+        </p:cNvPr>
+        <p:cNvGrpSpPr/>
+        <p:nvPr/>
+      </p:nvGrpSpPr>
+      <p:grpSpPr>
+        <a:xfrm>
+          <a:off x="0" y="0"/>
+          <a:ext cx="0" cy="0"/>
+          <a:chOff x="0" y="0"/>
+          <a:chExt cx="0" cy="0"/>
+        </a:xfrm>
+      </p:grpSpPr>
+      <p:sp>
+        <p:nvSpPr>
+          <p:cNvPr id="2" name="Title 1">
+            <a:extLst>
+              <a:ext uri="{FF2B5EF4-FFF2-40B4-BE49-F238E27FC236}">
+                <a16:creationId xmlns:a16="http://schemas.microsoft.com/office/drawing/2014/main" id="{A7DBAE16-D19D-4ED6-FB6C-D053736E9674}"/>
+              </a:ext>
+            </a:extLst>
+          </p:cNvPr>
+          <p:cNvSpPr>
+            <a:spLocks noGrp="1"/>
+          </p:cNvSpPr>
+          <p:nvPr/>
+        </p:nvSpPr>
+        <p:spPr>
+          <a:xfrm>
+            <a:off x="1981200" y="503237"/>
+            <a:ext cx="8229600" cy="1143000"/>
+          </a:xfrm>
+          <a:prstGeom prst="rect">
+            <a:avLst/>
+          </a:prstGeom>
+        </p:spPr>
+        <p:txBody>
+          <a:bodyPr vert="horz" lIns="91440" tIns="45720" rIns="91440" bIns="45720" rtlCol="0" anchor="ctr">
+            <a:normAutofit/>
+          </a:bodyPr>
+          <a:lstStyle>
+            <a:lvl1pPr algn="ctr" defTabSz="457200" rtl="0" eaLnBrk="1" latinLnBrk="0" hangingPunct="1">
+              <a:spcBef>
+                <a:spcPct val="0"/>
+              </a:spcBef>
+              <a:buNone/>
+              <a:defRPr sz="4400" kern="1200">
+                <a:solidFill>
+                  <a:schemeClr val="tx1"/>
+                </a:solidFill>
+                <a:latin typeface="+mj-lt"/>
+                <a:ea typeface="+mj-ea"/>
+                <a:cs typeface="+mj-cs"/>
+              </a:defRPr>
+            </a:lvl1pPr>
+          </a:lstStyle>
+          <a:p>
+            <a:r>
+              <a:rPr lang="pt-BR" b="1" dirty="0"/>
+              <a:t>Resultados – Segurança e Qualidade</a:t>
+            </a:r>
+            <a:endParaRPr b="1" dirty="0"/>
+          </a:p>
+        </p:txBody>
+      </p:sp>
+      <p:sp>
+        <p:nvSpPr>
+          <p:cNvPr id="3" name="Content Placeholder 2">
+            <a:extLst>
+              <a:ext uri="{FF2B5EF4-FFF2-40B4-BE49-F238E27FC236}">
+                <a16:creationId xmlns:a16="http://schemas.microsoft.com/office/drawing/2014/main" id="{9E7FAB4B-7B26-D723-0B33-BB65BFFAAEBD}"/>
+              </a:ext>
+            </a:extLst>
+          </p:cNvPr>
+          <p:cNvSpPr>
+            <a:spLocks noGrp="1"/>
+          </p:cNvSpPr>
+          <p:nvPr/>
+        </p:nvSpPr>
+        <p:spPr>
+          <a:xfrm>
+            <a:off x="1981200" y="1828799"/>
+            <a:ext cx="8229600" cy="4525963"/>
+          </a:xfrm>
+          <a:prstGeom prst="rect">
+            <a:avLst/>
+          </a:prstGeom>
+        </p:spPr>
+        <p:txBody>
+          <a:bodyPr vert="horz" lIns="91440" tIns="45720" rIns="91440" bIns="45720" rtlCol="0">
+            <a:normAutofit/>
+          </a:bodyPr>
+          <a:lstStyle>
+            <a:lvl1pPr marL="342900" indent="-342900" algn="l" defTabSz="457200" rtl="0" eaLnBrk="1" latinLnBrk="0" hangingPunct="1">
+              <a:spcBef>
+                <a:spcPct val="20000"/>
+              </a:spcBef>
+              <a:buFont typeface="Arial"/>
+              <a:buChar char="•"/>
+              <a:defRPr sz="3200" kern="1200">
+                <a:solidFill>
+                  <a:schemeClr val="tx1"/>
+                </a:solidFill>
+                <a:latin typeface="+mn-lt"/>
+                <a:ea typeface="+mn-ea"/>
+                <a:cs typeface="+mn-cs"/>
+              </a:defRPr>
+            </a:lvl1pPr>
+            <a:lvl2pPr marL="742950" indent="-285750" algn="l" defTabSz="457200" rtl="0" eaLnBrk="1" latinLnBrk="0" hangingPunct="1">
+              <a:spcBef>
+                <a:spcPct val="20000"/>
+              </a:spcBef>
+              <a:buFont typeface="Arial"/>
+              <a:buChar char="–"/>
+              <a:defRPr sz="2800" kern="1200">
+                <a:solidFill>
+                  <a:schemeClr val="tx1"/>
+                </a:solidFill>
+                <a:latin typeface="+mn-lt"/>
+                <a:ea typeface="+mn-ea"/>
+                <a:cs typeface="+mn-cs"/>
+              </a:defRPr>
+            </a:lvl2pPr>
+            <a:lvl3pPr marL="1143000" indent="-228600" algn="l" defTabSz="457200" rtl="0" eaLnBrk="1" latinLnBrk="0" hangingPunct="1">
+              <a:spcBef>
+                <a:spcPct val="20000"/>
+              </a:spcBef>
+              <a:buFont typeface="Arial"/>
+              <a:buChar char="•"/>
+              <a:defRPr sz="2400" kern="1200">
+                <a:solidFill>
+                  <a:schemeClr val="tx1"/>
+                </a:solidFill>
+                <a:latin typeface="+mn-lt"/>
+                <a:ea typeface="+mn-ea"/>
+                <a:cs typeface="+mn-cs"/>
+              </a:defRPr>
+            </a:lvl3pPr>
+            <a:lvl4pPr marL="1600200" indent="-228600" algn="l" defTabSz="457200" rtl="0" eaLnBrk="1" latinLnBrk="0" hangingPunct="1">
+              <a:spcBef>
+                <a:spcPct val="20000"/>
+              </a:spcBef>
+              <a:buFont typeface="Arial"/>
+              <a:buChar char="–"/>
+              <a:defRPr sz="2000" kern="1200">
+                <a:solidFill>
+                  <a:schemeClr val="tx1"/>
+                </a:solidFill>
+                <a:latin typeface="+mn-lt"/>
+                <a:ea typeface="+mn-ea"/>
+                <a:cs typeface="+mn-cs"/>
+              </a:defRPr>
+            </a:lvl4pPr>
+            <a:lvl5pPr marL="2057400" indent="-228600" algn="l" defTabSz="457200" rtl="0" eaLnBrk="1" latinLnBrk="0" hangingPunct="1">
+              <a:spcBef>
+                <a:spcPct val="20000"/>
+              </a:spcBef>
+              <a:buFont typeface="Arial"/>
+              <a:buChar char="»"/>
+              <a:defRPr sz="2000" kern="1200">
+                <a:solidFill>
+                  <a:schemeClr val="tx1"/>
+                </a:solidFill>
+                <a:latin typeface="+mn-lt"/>
+                <a:ea typeface="+mn-ea"/>
+                <a:cs typeface="+mn-cs"/>
+              </a:defRPr>
+            </a:lvl5pPr>
+            <a:lvl6pPr marL="2514600" indent="-228600" algn="l" defTabSz="457200" rtl="0" eaLnBrk="1" latinLnBrk="0" hangingPunct="1">
+              <a:spcBef>
+                <a:spcPct val="20000"/>
+              </a:spcBef>
+              <a:buFont typeface="Arial"/>
+              <a:buChar char="•"/>
+              <a:defRPr sz="2000" kern="1200">
+                <a:solidFill>
+                  <a:schemeClr val="tx1"/>
+                </a:solidFill>
+                <a:latin typeface="+mn-lt"/>
+                <a:ea typeface="+mn-ea"/>
+                <a:cs typeface="+mn-cs"/>
+              </a:defRPr>
+            </a:lvl6pPr>
+            <a:lvl7pPr marL="2971800" indent="-228600" algn="l" defTabSz="457200" rtl="0" eaLnBrk="1" latinLnBrk="0" hangingPunct="1">
+              <a:spcBef>
+                <a:spcPct val="20000"/>
+              </a:spcBef>
+              <a:buFont typeface="Arial"/>
+              <a:buChar char="•"/>
+              <a:defRPr sz="2000" kern="1200">
+                <a:solidFill>
+                  <a:schemeClr val="tx1"/>
+                </a:solidFill>
+                <a:latin typeface="+mn-lt"/>
+                <a:ea typeface="+mn-ea"/>
+                <a:cs typeface="+mn-cs"/>
+              </a:defRPr>
+            </a:lvl7pPr>
+            <a:lvl8pPr marL="3429000" indent="-228600" algn="l" defTabSz="457200" rtl="0" eaLnBrk="1" latinLnBrk="0" hangingPunct="1">
+              <a:spcBef>
+                <a:spcPct val="20000"/>
+              </a:spcBef>
+              <a:buFont typeface="Arial"/>
+              <a:buChar char="•"/>
+              <a:defRPr sz="2000" kern="1200">
+                <a:solidFill>
+                  <a:schemeClr val="tx1"/>
+                </a:solidFill>
+                <a:latin typeface="+mn-lt"/>
+                <a:ea typeface="+mn-ea"/>
+                <a:cs typeface="+mn-cs"/>
+              </a:defRPr>
+            </a:lvl8pPr>
+            <a:lvl9pPr marL="3886200" indent="-228600" algn="l" defTabSz="457200" rtl="0" eaLnBrk="1" latinLnBrk="0" hangingPunct="1">
+              <a:spcBef>
+                <a:spcPct val="20000"/>
+              </a:spcBef>
+              <a:buFont typeface="Arial"/>
+              <a:buChar char="•"/>
+              <a:defRPr sz="2000" kern="1200">
+                <a:solidFill>
+                  <a:schemeClr val="tx1"/>
+                </a:solidFill>
+                <a:latin typeface="+mn-lt"/>
+                <a:ea typeface="+mn-ea"/>
+                <a:cs typeface="+mn-cs"/>
+              </a:defRPr>
+            </a:lvl9pPr>
+          </a:lstStyle>
+          <a:p>
+            <a:pPr marL="0" indent="0">
+              <a:buNone/>
+            </a:pPr>
+            <a:endParaRPr dirty="0"/>
+          </a:p>
+        </p:txBody>
+      </p:sp>
+      <p:graphicFrame>
+        <p:nvGraphicFramePr>
+          <p:cNvPr id="4" name="Tabela 3">
+            <a:extLst>
+              <a:ext uri="{FF2B5EF4-FFF2-40B4-BE49-F238E27FC236}">
+                <a16:creationId xmlns:a16="http://schemas.microsoft.com/office/drawing/2014/main" id="{AC4F29D3-E81E-1C48-B289-802DE2801C65}"/>
+              </a:ext>
+            </a:extLst>
+          </p:cNvPr>
+          <p:cNvGraphicFramePr>
+            <a:graphicFrameLocks noGrp="1"/>
+          </p:cNvGraphicFramePr>
+          <p:nvPr>
+            <p:extLst>
+              <p:ext uri="{D42A27DB-BD31-4B8C-83A1-F6EECF244321}">
+                <p14:modId xmlns:p14="http://schemas.microsoft.com/office/powerpoint/2010/main" val="1338407591"/>
+              </p:ext>
+            </p:extLst>
+          </p:nvPr>
+        </p:nvGraphicFramePr>
+        <p:xfrm>
+          <a:off x="838200" y="2331720"/>
+          <a:ext cx="10515600" cy="2194560"/>
+        </p:xfrm>
+        <a:graphic>
+          <a:graphicData uri="http://schemas.openxmlformats.org/drawingml/2006/table">
+            <a:tbl>
+              <a:tblPr/>
+              <a:tblGrid>
+                <a:gridCol w="2628900">
+                  <a:extLst>
+                    <a:ext uri="{9D8B030D-6E8A-4147-A177-3AD203B41FA5}">
+                      <a16:colId xmlns:a16="http://schemas.microsoft.com/office/drawing/2014/main" val="3757933997"/>
+                    </a:ext>
+                  </a:extLst>
+                </a:gridCol>
+                <a:gridCol w="2628900">
+                  <a:extLst>
+                    <a:ext uri="{9D8B030D-6E8A-4147-A177-3AD203B41FA5}">
+                      <a16:colId xmlns:a16="http://schemas.microsoft.com/office/drawing/2014/main" val="3017764929"/>
+                    </a:ext>
+                  </a:extLst>
+                </a:gridCol>
+                <a:gridCol w="2628900">
+                  <a:extLst>
+                    <a:ext uri="{9D8B030D-6E8A-4147-A177-3AD203B41FA5}">
+                      <a16:colId xmlns:a16="http://schemas.microsoft.com/office/drawing/2014/main" val="2793146401"/>
+                    </a:ext>
+                  </a:extLst>
+                </a:gridCol>
+                <a:gridCol w="2628900">
+                  <a:extLst>
+                    <a:ext uri="{9D8B030D-6E8A-4147-A177-3AD203B41FA5}">
+                      <a16:colId xmlns:a16="http://schemas.microsoft.com/office/drawing/2014/main" val="3737517290"/>
+                    </a:ext>
+                  </a:extLst>
+                </a:gridCol>
+              </a:tblGrid>
+              <a:tr h="0">
+                <a:tc>
+                  <a:txBody>
+                    <a:bodyPr/>
+                    <a:lstStyle/>
+                    <a:p>
+                      <a:pPr>
+                        <a:buNone/>
+                      </a:pPr>
+                      <a:r>
+                        <a:rPr lang="pt-BR" b="1"/>
+                        <a:t>IA</a:t>
+                      </a:r>
+                    </a:p>
+                  </a:txBody>
+                  <a:tcPr anchor="ctr">
+                    <a:lnL>
+                      <a:noFill/>
+                    </a:lnL>
+                    <a:lnR>
+                      <a:noFill/>
+                    </a:lnR>
+                    <a:lnT>
+                      <a:noFill/>
+                    </a:lnT>
+                    <a:lnB>
+                      <a:noFill/>
+                    </a:lnB>
+                    <a:noFill/>
+                  </a:tcPr>
+                </a:tc>
+                <a:tc>
+                  <a:txBody>
+                    <a:bodyPr/>
+                    <a:lstStyle/>
+                    <a:p>
+                      <a:pPr>
+                        <a:buNone/>
+                      </a:pPr>
+                      <a:r>
+                        <a:rPr lang="pt-BR" b="1"/>
+                        <a:t>Vulnerabilidades</a:t>
+                      </a:r>
+                    </a:p>
+                  </a:txBody>
+                  <a:tcPr anchor="ctr">
+                    <a:lnL>
+                      <a:noFill/>
+                    </a:lnL>
+                    <a:lnR>
+                      <a:noFill/>
+                    </a:lnR>
+                    <a:lnT>
+                      <a:noFill/>
+                    </a:lnT>
+                    <a:lnB>
+                      <a:noFill/>
+                    </a:lnB>
+                    <a:noFill/>
+                  </a:tcPr>
+                </a:tc>
+                <a:tc>
+                  <a:txBody>
+                    <a:bodyPr/>
+                    <a:lstStyle/>
+                    <a:p>
+                      <a:pPr>
+                        <a:buNone/>
+                      </a:pPr>
+                      <a:r>
+                        <a:rPr lang="pt-BR" b="1"/>
+                        <a:t>Bugs</a:t>
+                      </a:r>
+                    </a:p>
+                  </a:txBody>
+                  <a:tcPr anchor="ctr">
+                    <a:lnL>
+                      <a:noFill/>
+                    </a:lnL>
+                    <a:lnR>
+                      <a:noFill/>
+                    </a:lnR>
+                    <a:lnT>
+                      <a:noFill/>
+                    </a:lnT>
+                    <a:lnB>
+                      <a:noFill/>
+                    </a:lnB>
+                    <a:noFill/>
+                  </a:tcPr>
+                </a:tc>
+                <a:tc>
+                  <a:txBody>
+                    <a:bodyPr/>
+                    <a:lstStyle/>
+                    <a:p>
+                      <a:pPr>
+                        <a:buNone/>
+                      </a:pPr>
+                      <a:r>
+                        <a:rPr lang="pt-BR" b="1" dirty="0" err="1"/>
+                        <a:t>Code</a:t>
+                      </a:r>
+                      <a:r>
+                        <a:rPr lang="pt-BR" b="1" dirty="0"/>
+                        <a:t> </a:t>
+                      </a:r>
+                      <a:r>
+                        <a:rPr lang="pt-BR" b="1" dirty="0" err="1"/>
+                        <a:t>Smells</a:t>
+                      </a:r>
+                      <a:endParaRPr lang="pt-BR" b="1" dirty="0"/>
+                    </a:p>
+                  </a:txBody>
+                  <a:tcPr anchor="ctr">
+                    <a:lnL>
+                      <a:noFill/>
+                    </a:lnL>
+                    <a:lnR>
+                      <a:noFill/>
+                    </a:lnR>
+                    <a:lnT>
+                      <a:noFill/>
+                    </a:lnT>
+                    <a:lnB>
+                      <a:noFill/>
+                    </a:lnB>
+                    <a:noFill/>
+                  </a:tcPr>
+                </a:tc>
+                <a:extLst>
+                  <a:ext uri="{0D108BD9-81ED-4DB2-BD59-A6C34878D82A}">
+                    <a16:rowId xmlns:a16="http://schemas.microsoft.com/office/drawing/2014/main" val="2142904473"/>
+                  </a:ext>
+                </a:extLst>
+              </a:tr>
+              <a:tr h="0">
+                <a:tc>
+                  <a:txBody>
+                    <a:bodyPr/>
+                    <a:lstStyle/>
+                    <a:p>
+                      <a:pPr>
+                        <a:buNone/>
+                      </a:pPr>
+                      <a:r>
+                        <a:rPr lang="pt-BR"/>
+                        <a:t>ChatGPT</a:t>
+                      </a:r>
+                    </a:p>
+                  </a:txBody>
+                  <a:tcPr anchor="ctr">
+                    <a:lnL>
+                      <a:noFill/>
+                    </a:lnL>
+                    <a:lnR>
+                      <a:noFill/>
+                    </a:lnR>
+                    <a:lnT>
+                      <a:noFill/>
+                    </a:lnT>
+                    <a:lnB>
+                      <a:noFill/>
+                    </a:lnB>
+                    <a:noFill/>
+                  </a:tcPr>
+                </a:tc>
+                <a:tc>
+                  <a:txBody>
+                    <a:bodyPr/>
+                    <a:lstStyle/>
+                    <a:p>
+                      <a:pPr>
+                        <a:buNone/>
+                      </a:pPr>
+                      <a:r>
+                        <a:rPr lang="pt-BR"/>
+                        <a:t>1</a:t>
+                      </a:r>
+                    </a:p>
+                  </a:txBody>
+                  <a:tcPr anchor="ctr">
+                    <a:lnL>
+                      <a:noFill/>
+                    </a:lnL>
+                    <a:lnR>
+                      <a:noFill/>
+                    </a:lnR>
+                    <a:lnT>
+                      <a:noFill/>
+                    </a:lnT>
+                    <a:lnB>
+                      <a:noFill/>
+                    </a:lnB>
+                    <a:noFill/>
+                  </a:tcPr>
+                </a:tc>
+                <a:tc>
+                  <a:txBody>
+                    <a:bodyPr/>
+                    <a:lstStyle/>
+                    <a:p>
+                      <a:pPr>
+                        <a:buNone/>
+                      </a:pPr>
+                      <a:r>
+                        <a:rPr lang="pt-BR"/>
+                        <a:t>1</a:t>
+                      </a:r>
+                    </a:p>
+                  </a:txBody>
+                  <a:tcPr anchor="ctr">
+                    <a:lnL>
+                      <a:noFill/>
+                    </a:lnL>
+                    <a:lnR>
+                      <a:noFill/>
+                    </a:lnR>
+                    <a:lnT>
+                      <a:noFill/>
+                    </a:lnT>
+                    <a:lnB>
+                      <a:noFill/>
+                    </a:lnB>
+                    <a:noFill/>
+                  </a:tcPr>
+                </a:tc>
+                <a:tc>
+                  <a:txBody>
+                    <a:bodyPr/>
+                    <a:lstStyle/>
+                    <a:p>
+                      <a:pPr>
+                        <a:buNone/>
+                      </a:pPr>
+                      <a:r>
+                        <a:rPr lang="pt-BR"/>
+                        <a:t>20</a:t>
+                      </a:r>
+                    </a:p>
+                  </a:txBody>
+                  <a:tcPr anchor="ctr">
+                    <a:lnL>
+                      <a:noFill/>
+                    </a:lnL>
+                    <a:lnR>
+                      <a:noFill/>
+                    </a:lnR>
+                    <a:lnT>
+                      <a:noFill/>
+                    </a:lnT>
+                    <a:lnB>
+                      <a:noFill/>
+                    </a:lnB>
+                    <a:noFill/>
+                  </a:tcPr>
+                </a:tc>
+                <a:extLst>
+                  <a:ext uri="{0D108BD9-81ED-4DB2-BD59-A6C34878D82A}">
+                    <a16:rowId xmlns:a16="http://schemas.microsoft.com/office/drawing/2014/main" val="2265335899"/>
+                  </a:ext>
+                </a:extLst>
+              </a:tr>
+              <a:tr h="0">
+                <a:tc>
+                  <a:txBody>
+                    <a:bodyPr/>
+                    <a:lstStyle/>
+                    <a:p>
+                      <a:pPr>
+                        <a:buNone/>
+                      </a:pPr>
+                      <a:r>
+                        <a:rPr lang="pt-BR"/>
+                        <a:t>Copilot</a:t>
+                      </a:r>
+                    </a:p>
+                  </a:txBody>
+                  <a:tcPr anchor="ctr">
+                    <a:lnL>
+                      <a:noFill/>
+                    </a:lnL>
+                    <a:lnR>
+                      <a:noFill/>
+                    </a:lnR>
+                    <a:lnT>
+                      <a:noFill/>
+                    </a:lnT>
+                    <a:lnB>
+                      <a:noFill/>
+                    </a:lnB>
+                    <a:noFill/>
+                  </a:tcPr>
+                </a:tc>
+                <a:tc>
+                  <a:txBody>
+                    <a:bodyPr/>
+                    <a:lstStyle/>
+                    <a:p>
+                      <a:pPr>
+                        <a:buNone/>
+                      </a:pPr>
+                      <a:r>
+                        <a:rPr lang="pt-BR"/>
+                        <a:t>1</a:t>
+                      </a:r>
+                    </a:p>
+                  </a:txBody>
+                  <a:tcPr anchor="ctr">
+                    <a:lnL>
+                      <a:noFill/>
+                    </a:lnL>
+                    <a:lnR>
+                      <a:noFill/>
+                    </a:lnR>
+                    <a:lnT>
+                      <a:noFill/>
+                    </a:lnT>
+                    <a:lnB>
+                      <a:noFill/>
+                    </a:lnB>
+                    <a:noFill/>
+                  </a:tcPr>
+                </a:tc>
+                <a:tc>
+                  <a:txBody>
+                    <a:bodyPr/>
+                    <a:lstStyle/>
+                    <a:p>
+                      <a:pPr>
+                        <a:buNone/>
+                      </a:pPr>
+                      <a:r>
+                        <a:rPr lang="pt-BR"/>
+                        <a:t>0</a:t>
+                      </a:r>
+                    </a:p>
+                  </a:txBody>
+                  <a:tcPr anchor="ctr">
+                    <a:lnL>
+                      <a:noFill/>
+                    </a:lnL>
+                    <a:lnR>
+                      <a:noFill/>
+                    </a:lnR>
+                    <a:lnT>
+                      <a:noFill/>
+                    </a:lnT>
+                    <a:lnB>
+                      <a:noFill/>
+                    </a:lnB>
+                    <a:noFill/>
+                  </a:tcPr>
+                </a:tc>
+                <a:tc>
+                  <a:txBody>
+                    <a:bodyPr/>
+                    <a:lstStyle/>
+                    <a:p>
+                      <a:pPr>
+                        <a:buNone/>
+                      </a:pPr>
+                      <a:r>
+                        <a:rPr lang="pt-BR"/>
+                        <a:t>8</a:t>
+                      </a:r>
+                    </a:p>
+                  </a:txBody>
+                  <a:tcPr anchor="ctr">
+                    <a:lnL>
+                      <a:noFill/>
+                    </a:lnL>
+                    <a:lnR>
+                      <a:noFill/>
+                    </a:lnR>
+                    <a:lnT>
+                      <a:noFill/>
+                    </a:lnT>
+                    <a:lnB>
+                      <a:noFill/>
+                    </a:lnB>
+                    <a:noFill/>
+                  </a:tcPr>
+                </a:tc>
+                <a:extLst>
+                  <a:ext uri="{0D108BD9-81ED-4DB2-BD59-A6C34878D82A}">
+                    <a16:rowId xmlns:a16="http://schemas.microsoft.com/office/drawing/2014/main" val="955775841"/>
+                  </a:ext>
+                </a:extLst>
+              </a:tr>
+              <a:tr h="0">
+                <a:tc>
+                  <a:txBody>
+                    <a:bodyPr/>
+                    <a:lstStyle/>
+                    <a:p>
+                      <a:pPr>
+                        <a:buNone/>
+                      </a:pPr>
+                      <a:r>
+                        <a:rPr lang="pt-BR"/>
+                        <a:t>DeepSeek</a:t>
+                      </a:r>
+                    </a:p>
+                  </a:txBody>
+                  <a:tcPr anchor="ctr">
+                    <a:lnL>
+                      <a:noFill/>
+                    </a:lnL>
+                    <a:lnR>
+                      <a:noFill/>
+                    </a:lnR>
+                    <a:lnT>
+                      <a:noFill/>
+                    </a:lnT>
+                    <a:lnB>
+                      <a:noFill/>
+                    </a:lnB>
+                    <a:noFill/>
+                  </a:tcPr>
+                </a:tc>
+                <a:tc>
+                  <a:txBody>
+                    <a:bodyPr/>
+                    <a:lstStyle/>
+                    <a:p>
+                      <a:pPr>
+                        <a:buNone/>
+                      </a:pPr>
+                      <a:r>
+                        <a:rPr lang="pt-BR"/>
+                        <a:t>1</a:t>
+                      </a:r>
+                    </a:p>
+                  </a:txBody>
+                  <a:tcPr anchor="ctr">
+                    <a:lnL>
+                      <a:noFill/>
+                    </a:lnL>
+                    <a:lnR>
+                      <a:noFill/>
+                    </a:lnR>
+                    <a:lnT>
+                      <a:noFill/>
+                    </a:lnT>
+                    <a:lnB>
+                      <a:noFill/>
+                    </a:lnB>
+                    <a:noFill/>
+                  </a:tcPr>
+                </a:tc>
+                <a:tc>
+                  <a:txBody>
+                    <a:bodyPr/>
+                    <a:lstStyle/>
+                    <a:p>
+                      <a:pPr>
+                        <a:buNone/>
+                      </a:pPr>
+                      <a:r>
+                        <a:rPr lang="pt-BR"/>
+                        <a:t>0</a:t>
+                      </a:r>
+                    </a:p>
+                  </a:txBody>
+                  <a:tcPr anchor="ctr">
+                    <a:lnL>
+                      <a:noFill/>
+                    </a:lnL>
+                    <a:lnR>
+                      <a:noFill/>
+                    </a:lnR>
+                    <a:lnT>
+                      <a:noFill/>
+                    </a:lnT>
+                    <a:lnB>
+                      <a:noFill/>
+                    </a:lnB>
+                    <a:noFill/>
+                  </a:tcPr>
+                </a:tc>
+                <a:tc>
+                  <a:txBody>
+                    <a:bodyPr/>
+                    <a:lstStyle/>
+                    <a:p>
+                      <a:pPr>
+                        <a:buNone/>
+                      </a:pPr>
+                      <a:r>
+                        <a:rPr lang="pt-BR"/>
+                        <a:t>29</a:t>
+                      </a:r>
+                    </a:p>
+                  </a:txBody>
+                  <a:tcPr anchor="ctr">
+                    <a:lnL>
+                      <a:noFill/>
+                    </a:lnL>
+                    <a:lnR>
+                      <a:noFill/>
+                    </a:lnR>
+                    <a:lnT>
+                      <a:noFill/>
+                    </a:lnT>
+                    <a:lnB>
+                      <a:noFill/>
+                    </a:lnB>
+                    <a:noFill/>
+                  </a:tcPr>
+                </a:tc>
+                <a:extLst>
+                  <a:ext uri="{0D108BD9-81ED-4DB2-BD59-A6C34878D82A}">
+                    <a16:rowId xmlns:a16="http://schemas.microsoft.com/office/drawing/2014/main" val="1005542091"/>
+                  </a:ext>
+                </a:extLst>
+              </a:tr>
+              <a:tr h="0">
+                <a:tc>
+                  <a:txBody>
+                    <a:bodyPr/>
+                    <a:lstStyle/>
+                    <a:p>
+                      <a:pPr>
+                        <a:buNone/>
+                      </a:pPr>
+                      <a:r>
+                        <a:rPr lang="pt-BR"/>
+                        <a:t>Gemini</a:t>
+                      </a:r>
+                    </a:p>
+                  </a:txBody>
+                  <a:tcPr anchor="ctr">
+                    <a:lnL>
+                      <a:noFill/>
+                    </a:lnL>
+                    <a:lnR>
+                      <a:noFill/>
+                    </a:lnR>
+                    <a:lnT>
+                      <a:noFill/>
+                    </a:lnT>
+                    <a:lnB>
+                      <a:noFill/>
+                    </a:lnB>
+                    <a:noFill/>
+                  </a:tcPr>
+                </a:tc>
+                <a:tc>
+                  <a:txBody>
+                    <a:bodyPr/>
+                    <a:lstStyle/>
+                    <a:p>
+                      <a:pPr>
+                        <a:buNone/>
+                      </a:pPr>
+                      <a:r>
+                        <a:rPr lang="pt-BR"/>
+                        <a:t>2</a:t>
+                      </a:r>
+                    </a:p>
+                  </a:txBody>
+                  <a:tcPr anchor="ctr">
+                    <a:lnL>
+                      <a:noFill/>
+                    </a:lnL>
+                    <a:lnR>
+                      <a:noFill/>
+                    </a:lnR>
+                    <a:lnT>
+                      <a:noFill/>
+                    </a:lnT>
+                    <a:lnB>
+                      <a:noFill/>
+                    </a:lnB>
+                    <a:noFill/>
+                  </a:tcPr>
+                </a:tc>
+                <a:tc>
+                  <a:txBody>
+                    <a:bodyPr/>
+                    <a:lstStyle/>
+                    <a:p>
+                      <a:pPr>
+                        <a:buNone/>
+                      </a:pPr>
+                      <a:r>
+                        <a:rPr lang="pt-BR"/>
+                        <a:t>0</a:t>
+                      </a:r>
+                    </a:p>
+                  </a:txBody>
+                  <a:tcPr anchor="ctr">
+                    <a:lnL>
+                      <a:noFill/>
+                    </a:lnL>
+                    <a:lnR>
+                      <a:noFill/>
+                    </a:lnR>
+                    <a:lnT>
+                      <a:noFill/>
+                    </a:lnT>
+                    <a:lnB>
+                      <a:noFill/>
+                    </a:lnB>
+                    <a:noFill/>
+                  </a:tcPr>
+                </a:tc>
+                <a:tc>
+                  <a:txBody>
+                    <a:bodyPr/>
+                    <a:lstStyle/>
+                    <a:p>
+                      <a:pPr>
+                        <a:buNone/>
+                      </a:pPr>
+                      <a:r>
+                        <a:rPr lang="pt-BR"/>
+                        <a:t>13</a:t>
+                      </a:r>
+                    </a:p>
+                  </a:txBody>
+                  <a:tcPr anchor="ctr">
+                    <a:lnL>
+                      <a:noFill/>
+                    </a:lnL>
+                    <a:lnR>
+                      <a:noFill/>
+                    </a:lnR>
+                    <a:lnT>
+                      <a:noFill/>
+                    </a:lnT>
+                    <a:lnB>
+                      <a:noFill/>
+                    </a:lnB>
+                    <a:noFill/>
+                  </a:tcPr>
+                </a:tc>
+                <a:extLst>
+                  <a:ext uri="{0D108BD9-81ED-4DB2-BD59-A6C34878D82A}">
+                    <a16:rowId xmlns:a16="http://schemas.microsoft.com/office/drawing/2014/main" val="2882238148"/>
+                  </a:ext>
+                </a:extLst>
+              </a:tr>
+              <a:tr h="0">
+                <a:tc>
+                  <a:txBody>
+                    <a:bodyPr/>
+                    <a:lstStyle/>
+                    <a:p>
+                      <a:pPr>
+                        <a:buNone/>
+                      </a:pPr>
+                      <a:r>
+                        <a:rPr lang="pt-BR"/>
+                        <a:t>MetaAI</a:t>
+                      </a:r>
+                    </a:p>
+                  </a:txBody>
+                  <a:tcPr anchor="ctr">
+                    <a:lnL>
+                      <a:noFill/>
+                    </a:lnL>
+                    <a:lnR>
+                      <a:noFill/>
+                    </a:lnR>
+                    <a:lnT>
+                      <a:noFill/>
+                    </a:lnT>
+                    <a:lnB>
+                      <a:noFill/>
+                    </a:lnB>
+                    <a:noFill/>
+                  </a:tcPr>
+                </a:tc>
+                <a:tc>
+                  <a:txBody>
+                    <a:bodyPr/>
+                    <a:lstStyle/>
+                    <a:p>
+                      <a:pPr>
+                        <a:buNone/>
+                      </a:pPr>
+                      <a:r>
+                        <a:rPr lang="pt-BR" dirty="0"/>
+                        <a:t>2</a:t>
+                      </a:r>
+                    </a:p>
+                  </a:txBody>
+                  <a:tcPr anchor="ctr">
+                    <a:lnL>
+                      <a:noFill/>
+                    </a:lnL>
+                    <a:lnR>
+                      <a:noFill/>
+                    </a:lnR>
+                    <a:lnT>
+                      <a:noFill/>
+                    </a:lnT>
+                    <a:lnB>
+                      <a:noFill/>
+                    </a:lnB>
+                    <a:noFill/>
+                  </a:tcPr>
+                </a:tc>
+                <a:tc>
+                  <a:txBody>
+                    <a:bodyPr/>
+                    <a:lstStyle/>
+                    <a:p>
+                      <a:pPr>
+                        <a:buNone/>
+                      </a:pPr>
+                      <a:r>
+                        <a:rPr lang="pt-BR"/>
+                        <a:t>0</a:t>
+                      </a:r>
+                    </a:p>
+                  </a:txBody>
+                  <a:tcPr anchor="ctr">
+                    <a:lnL>
+                      <a:noFill/>
+                    </a:lnL>
+                    <a:lnR>
+                      <a:noFill/>
+                    </a:lnR>
+                    <a:lnT>
+                      <a:noFill/>
+                    </a:lnT>
+                    <a:lnB>
+                      <a:noFill/>
+                    </a:lnB>
+                    <a:noFill/>
+                  </a:tcPr>
+                </a:tc>
+                <a:tc>
+                  <a:txBody>
+                    <a:bodyPr/>
+                    <a:lstStyle/>
+                    <a:p>
+                      <a:pPr>
+                        <a:buNone/>
+                      </a:pPr>
+                      <a:r>
+                        <a:rPr lang="pt-BR" dirty="0"/>
+                        <a:t>5</a:t>
+                      </a:r>
+                    </a:p>
+                  </a:txBody>
+                  <a:tcPr anchor="ctr">
+                    <a:lnL>
+                      <a:noFill/>
+                    </a:lnL>
+                    <a:lnR>
+                      <a:noFill/>
+                    </a:lnR>
+                    <a:lnT>
+                      <a:noFill/>
+                    </a:lnT>
+                    <a:lnB>
+                      <a:noFill/>
+                    </a:lnB>
+                    <a:noFill/>
+                  </a:tcPr>
+                </a:tc>
+                <a:extLst>
+                  <a:ext uri="{0D108BD9-81ED-4DB2-BD59-A6C34878D82A}">
+                    <a16:rowId xmlns:a16="http://schemas.microsoft.com/office/drawing/2014/main" val="1794369030"/>
+                  </a:ext>
+                </a:extLst>
+              </a:tr>
+            </a:tbl>
+          </a:graphicData>
+        </a:graphic>
+      </p:graphicFrame>
+    </p:spTree>
+    <p:extLst>
+      <p:ext uri="{BB962C8B-B14F-4D97-AF65-F5344CB8AC3E}">
+        <p14:creationId xmlns:p14="http://schemas.microsoft.com/office/powerpoint/2010/main" val="3547002022"/>
+      </p:ext>
+    </p:extLst>
+  </p:cSld>
+  <p:clrMapOvr>
+    <a:masterClrMapping/>
+  </p:clrMapOvr>
+</p:sld>
+</file>
+
+<file path=ppt/slides/slide11.xml><?xml version="1.0" encoding="utf-8"?>
+<p:sld xmlns:a="http://schemas.openxmlformats.org/drawingml/2006/main" xmlns:r="http://schemas.openxmlformats.org/officeDocument/2006/relationships" xmlns:p="http://schemas.openxmlformats.org/presentationml/2006/main">
+  <p:cSld>
+    <p:spTree>
+      <p:nvGrpSpPr>
+        <p:cNvPr id="1" name="">
+          <a:extLst>
+            <a:ext uri="{FF2B5EF4-FFF2-40B4-BE49-F238E27FC236}">
+              <a16:creationId xmlns:a16="http://schemas.microsoft.com/office/drawing/2014/main" id="{A8CE4016-214D-F6E8-AAFF-5641B3E392E2}"/>
+            </a:ext>
+          </a:extLst>
+        </p:cNvPr>
+        <p:cNvGrpSpPr/>
+        <p:nvPr/>
+      </p:nvGrpSpPr>
+      <p:grpSpPr>
+        <a:xfrm>
+          <a:off x="0" y="0"/>
+          <a:ext cx="0" cy="0"/>
+          <a:chOff x="0" y="0"/>
+          <a:chExt cx="0" cy="0"/>
+        </a:xfrm>
+      </p:grpSpPr>
+      <p:sp>
+        <p:nvSpPr>
+          <p:cNvPr id="2" name="Title 1">
+            <a:extLst>
+              <a:ext uri="{FF2B5EF4-FFF2-40B4-BE49-F238E27FC236}">
+                <a16:creationId xmlns:a16="http://schemas.microsoft.com/office/drawing/2014/main" id="{8381BBFD-2494-D7DF-DB0B-79F4D4505DE4}"/>
+              </a:ext>
+            </a:extLst>
+          </p:cNvPr>
+          <p:cNvSpPr>
+            <a:spLocks noGrp="1"/>
+          </p:cNvSpPr>
+          <p:nvPr/>
+        </p:nvSpPr>
+        <p:spPr>
+          <a:xfrm>
+            <a:off x="1981200" y="503237"/>
+            <a:ext cx="8229600" cy="1143000"/>
+          </a:xfrm>
+          <a:prstGeom prst="rect">
+            <a:avLst/>
+          </a:prstGeom>
+        </p:spPr>
+        <p:txBody>
+          <a:bodyPr vert="horz" lIns="91440" tIns="45720" rIns="91440" bIns="45720" rtlCol="0" anchor="ctr">
+            <a:normAutofit/>
+          </a:bodyPr>
+          <a:lstStyle>
+            <a:lvl1pPr algn="ctr" defTabSz="457200" rtl="0" eaLnBrk="1" latinLnBrk="0" hangingPunct="1">
+              <a:spcBef>
+                <a:spcPct val="0"/>
+              </a:spcBef>
+              <a:buNone/>
+              <a:defRPr sz="4400" kern="1200">
+                <a:solidFill>
+                  <a:schemeClr val="tx1"/>
+                </a:solidFill>
+                <a:latin typeface="+mj-lt"/>
+                <a:ea typeface="+mj-ea"/>
+                <a:cs typeface="+mj-cs"/>
+              </a:defRPr>
+            </a:lvl1pPr>
+          </a:lstStyle>
+          <a:p>
+            <a:r>
+              <a:rPr lang="pt-BR" b="1" dirty="0"/>
+              <a:t>Resultados – Severidades</a:t>
+            </a:r>
+            <a:endParaRPr b="1" dirty="0"/>
+          </a:p>
+        </p:txBody>
+      </p:sp>
+      <p:sp>
+        <p:nvSpPr>
+          <p:cNvPr id="3" name="Content Placeholder 2">
+            <a:extLst>
+              <a:ext uri="{FF2B5EF4-FFF2-40B4-BE49-F238E27FC236}">
+                <a16:creationId xmlns:a16="http://schemas.microsoft.com/office/drawing/2014/main" id="{39F9B504-407F-A4C8-3B0E-248CB92EEE62}"/>
+              </a:ext>
+            </a:extLst>
+          </p:cNvPr>
+          <p:cNvSpPr>
+            <a:spLocks noGrp="1"/>
+          </p:cNvSpPr>
+          <p:nvPr/>
+        </p:nvSpPr>
+        <p:spPr>
+          <a:xfrm>
+            <a:off x="1981200" y="1828799"/>
+            <a:ext cx="8229600" cy="4525963"/>
+          </a:xfrm>
+          <a:prstGeom prst="rect">
+            <a:avLst/>
+          </a:prstGeom>
+        </p:spPr>
+        <p:txBody>
+          <a:bodyPr vert="horz" lIns="91440" tIns="45720" rIns="91440" bIns="45720" rtlCol="0">
+            <a:normAutofit/>
+          </a:bodyPr>
+          <a:lstStyle>
+            <a:lvl1pPr marL="342900" indent="-342900" algn="l" defTabSz="457200" rtl="0" eaLnBrk="1" latinLnBrk="0" hangingPunct="1">
+              <a:spcBef>
+                <a:spcPct val="20000"/>
+              </a:spcBef>
+              <a:buFont typeface="Arial"/>
+              <a:buChar char="•"/>
+              <a:defRPr sz="3200" kern="1200">
+                <a:solidFill>
+                  <a:schemeClr val="tx1"/>
+                </a:solidFill>
+                <a:latin typeface="+mn-lt"/>
+                <a:ea typeface="+mn-ea"/>
+                <a:cs typeface="+mn-cs"/>
+              </a:defRPr>
+            </a:lvl1pPr>
+            <a:lvl2pPr marL="742950" indent="-285750" algn="l" defTabSz="457200" rtl="0" eaLnBrk="1" latinLnBrk="0" hangingPunct="1">
+              <a:spcBef>
+                <a:spcPct val="20000"/>
+              </a:spcBef>
+              <a:buFont typeface="Arial"/>
+              <a:buChar char="–"/>
+              <a:defRPr sz="2800" kern="1200">
+                <a:solidFill>
+                  <a:schemeClr val="tx1"/>
+                </a:solidFill>
+                <a:latin typeface="+mn-lt"/>
+                <a:ea typeface="+mn-ea"/>
+                <a:cs typeface="+mn-cs"/>
+              </a:defRPr>
+            </a:lvl2pPr>
+            <a:lvl3pPr marL="1143000" indent="-228600" algn="l" defTabSz="457200" rtl="0" eaLnBrk="1" latinLnBrk="0" hangingPunct="1">
+              <a:spcBef>
+                <a:spcPct val="20000"/>
+              </a:spcBef>
+              <a:buFont typeface="Arial"/>
+              <a:buChar char="•"/>
+              <a:defRPr sz="2400" kern="1200">
+                <a:solidFill>
+                  <a:schemeClr val="tx1"/>
+                </a:solidFill>
+                <a:latin typeface="+mn-lt"/>
+                <a:ea typeface="+mn-ea"/>
+                <a:cs typeface="+mn-cs"/>
+              </a:defRPr>
+            </a:lvl3pPr>
+            <a:lvl4pPr marL="1600200" indent="-228600" algn="l" defTabSz="457200" rtl="0" eaLnBrk="1" latinLnBrk="0" hangingPunct="1">
+              <a:spcBef>
+                <a:spcPct val="20000"/>
+              </a:spcBef>
+              <a:buFont typeface="Arial"/>
+              <a:buChar char="–"/>
+              <a:defRPr sz="2000" kern="1200">
+                <a:solidFill>
+                  <a:schemeClr val="tx1"/>
+                </a:solidFill>
+                <a:latin typeface="+mn-lt"/>
+                <a:ea typeface="+mn-ea"/>
+                <a:cs typeface="+mn-cs"/>
+              </a:defRPr>
+            </a:lvl4pPr>
+            <a:lvl5pPr marL="2057400" indent="-228600" algn="l" defTabSz="457200" rtl="0" eaLnBrk="1" latinLnBrk="0" hangingPunct="1">
+              <a:spcBef>
+                <a:spcPct val="20000"/>
+              </a:spcBef>
+              <a:buFont typeface="Arial"/>
+              <a:buChar char="»"/>
+              <a:defRPr sz="2000" kern="1200">
+                <a:solidFill>
+                  <a:schemeClr val="tx1"/>
+                </a:solidFill>
+                <a:latin typeface="+mn-lt"/>
+                <a:ea typeface="+mn-ea"/>
+                <a:cs typeface="+mn-cs"/>
+              </a:defRPr>
+            </a:lvl5pPr>
+            <a:lvl6pPr marL="2514600" indent="-228600" algn="l" defTabSz="457200" rtl="0" eaLnBrk="1" latinLnBrk="0" hangingPunct="1">
+              <a:spcBef>
+                <a:spcPct val="20000"/>
+              </a:spcBef>
+              <a:buFont typeface="Arial"/>
+              <a:buChar char="•"/>
+              <a:defRPr sz="2000" kern="1200">
+                <a:solidFill>
+                  <a:schemeClr val="tx1"/>
+                </a:solidFill>
+                <a:latin typeface="+mn-lt"/>
+                <a:ea typeface="+mn-ea"/>
+                <a:cs typeface="+mn-cs"/>
+              </a:defRPr>
+            </a:lvl6pPr>
+            <a:lvl7pPr marL="2971800" indent="-228600" algn="l" defTabSz="457200" rtl="0" eaLnBrk="1" latinLnBrk="0" hangingPunct="1">
+              <a:spcBef>
+                <a:spcPct val="20000"/>
+              </a:spcBef>
+              <a:buFont typeface="Arial"/>
+              <a:buChar char="•"/>
+              <a:defRPr sz="2000" kern="1200">
+                <a:solidFill>
+                  <a:schemeClr val="tx1"/>
+                </a:solidFill>
+                <a:latin typeface="+mn-lt"/>
+                <a:ea typeface="+mn-ea"/>
+                <a:cs typeface="+mn-cs"/>
+              </a:defRPr>
+            </a:lvl7pPr>
+            <a:lvl8pPr marL="3429000" indent="-228600" algn="l" defTabSz="457200" rtl="0" eaLnBrk="1" latinLnBrk="0" hangingPunct="1">
+              <a:spcBef>
+                <a:spcPct val="20000"/>
+              </a:spcBef>
+              <a:buFont typeface="Arial"/>
+              <a:buChar char="•"/>
+              <a:defRPr sz="2000" kern="1200">
+                <a:solidFill>
+                  <a:schemeClr val="tx1"/>
+                </a:solidFill>
+                <a:latin typeface="+mn-lt"/>
+                <a:ea typeface="+mn-ea"/>
+                <a:cs typeface="+mn-cs"/>
+              </a:defRPr>
+            </a:lvl8pPr>
+            <a:lvl9pPr marL="3886200" indent="-228600" algn="l" defTabSz="457200" rtl="0" eaLnBrk="1" latinLnBrk="0" hangingPunct="1">
+              <a:spcBef>
+                <a:spcPct val="20000"/>
+              </a:spcBef>
+              <a:buFont typeface="Arial"/>
+              <a:buChar char="•"/>
+              <a:defRPr sz="2000" kern="1200">
+                <a:solidFill>
+                  <a:schemeClr val="tx1"/>
+                </a:solidFill>
+                <a:latin typeface="+mn-lt"/>
+                <a:ea typeface="+mn-ea"/>
+                <a:cs typeface="+mn-cs"/>
+              </a:defRPr>
+            </a:lvl9pPr>
+          </a:lstStyle>
+          <a:p>
+            <a:pPr marL="0" indent="0">
+              <a:buNone/>
+            </a:pPr>
+            <a:endParaRPr dirty="0"/>
+          </a:p>
+        </p:txBody>
+      </p:sp>
+      <p:graphicFrame>
+        <p:nvGraphicFramePr>
+          <p:cNvPr id="5" name="Tabela 4">
+            <a:extLst>
+              <a:ext uri="{FF2B5EF4-FFF2-40B4-BE49-F238E27FC236}">
+                <a16:creationId xmlns:a16="http://schemas.microsoft.com/office/drawing/2014/main" id="{715E1D88-2036-6EDE-2F61-71EC6F92ABE4}"/>
+              </a:ext>
+            </a:extLst>
+          </p:cNvPr>
+          <p:cNvGraphicFramePr>
+            <a:graphicFrameLocks noGrp="1"/>
+          </p:cNvGraphicFramePr>
+          <p:nvPr>
+            <p:extLst>
+              <p:ext uri="{D42A27DB-BD31-4B8C-83A1-F6EECF244321}">
+                <p14:modId xmlns:p14="http://schemas.microsoft.com/office/powerpoint/2010/main" val="2455352348"/>
+              </p:ext>
+            </p:extLst>
+          </p:nvPr>
+        </p:nvGraphicFramePr>
+        <p:xfrm>
+          <a:off x="838200" y="2331720"/>
+          <a:ext cx="10515600" cy="2194560"/>
+        </p:xfrm>
+        <a:graphic>
+          <a:graphicData uri="http://schemas.openxmlformats.org/drawingml/2006/table">
+            <a:tbl>
+              <a:tblPr/>
+              <a:tblGrid>
+                <a:gridCol w="1752600">
+                  <a:extLst>
+                    <a:ext uri="{9D8B030D-6E8A-4147-A177-3AD203B41FA5}">
+                      <a16:colId xmlns:a16="http://schemas.microsoft.com/office/drawing/2014/main" val="716194022"/>
+                    </a:ext>
+                  </a:extLst>
+                </a:gridCol>
+                <a:gridCol w="1752600">
+                  <a:extLst>
+                    <a:ext uri="{9D8B030D-6E8A-4147-A177-3AD203B41FA5}">
+                      <a16:colId xmlns:a16="http://schemas.microsoft.com/office/drawing/2014/main" val="3981250057"/>
+                    </a:ext>
+                  </a:extLst>
+                </a:gridCol>
+                <a:gridCol w="1752600">
+                  <a:extLst>
+                    <a:ext uri="{9D8B030D-6E8A-4147-A177-3AD203B41FA5}">
+                      <a16:colId xmlns:a16="http://schemas.microsoft.com/office/drawing/2014/main" val="2989649049"/>
+                    </a:ext>
+                  </a:extLst>
+                </a:gridCol>
+                <a:gridCol w="1752600">
+                  <a:extLst>
+                    <a:ext uri="{9D8B030D-6E8A-4147-A177-3AD203B41FA5}">
+                      <a16:colId xmlns:a16="http://schemas.microsoft.com/office/drawing/2014/main" val="3942317680"/>
+                    </a:ext>
+                  </a:extLst>
+                </a:gridCol>
+                <a:gridCol w="1752600">
+                  <a:extLst>
+                    <a:ext uri="{9D8B030D-6E8A-4147-A177-3AD203B41FA5}">
+                      <a16:colId xmlns:a16="http://schemas.microsoft.com/office/drawing/2014/main" val="295958947"/>
+                    </a:ext>
+                  </a:extLst>
+                </a:gridCol>
+                <a:gridCol w="1752600">
+                  <a:extLst>
+                    <a:ext uri="{9D8B030D-6E8A-4147-A177-3AD203B41FA5}">
+                      <a16:colId xmlns:a16="http://schemas.microsoft.com/office/drawing/2014/main" val="1110204864"/>
+                    </a:ext>
+                  </a:extLst>
+                </a:gridCol>
+              </a:tblGrid>
+              <a:tr h="0">
+                <a:tc>
+                  <a:txBody>
+                    <a:bodyPr/>
+                    <a:lstStyle/>
+                    <a:p>
+                      <a:pPr>
+                        <a:buNone/>
+                      </a:pPr>
+                      <a:r>
+                        <a:rPr lang="pt-BR" b="1" dirty="0"/>
+                        <a:t>IA</a:t>
+                      </a:r>
+                    </a:p>
+                  </a:txBody>
+                  <a:tcPr anchor="ctr">
+                    <a:lnL>
+                      <a:noFill/>
+                    </a:lnL>
+                    <a:lnR>
+                      <a:noFill/>
+                    </a:lnR>
+                    <a:lnT>
+                      <a:noFill/>
+                    </a:lnT>
+                    <a:lnB>
+                      <a:noFill/>
+                    </a:lnB>
+                    <a:noFill/>
+                  </a:tcPr>
+                </a:tc>
+                <a:tc>
+                  <a:txBody>
+                    <a:bodyPr/>
+                    <a:lstStyle/>
+                    <a:p>
+                      <a:pPr>
+                        <a:buNone/>
+                      </a:pPr>
+                      <a:r>
+                        <a:rPr lang="pt-BR" b="1" dirty="0"/>
+                        <a:t>Total</a:t>
+                      </a:r>
+                    </a:p>
+                  </a:txBody>
+                  <a:tcPr anchor="ctr">
+                    <a:lnL>
+                      <a:noFill/>
+                    </a:lnL>
+                    <a:lnR>
+                      <a:noFill/>
+                    </a:lnR>
+                    <a:lnT>
+                      <a:noFill/>
+                    </a:lnT>
+                    <a:lnB>
+                      <a:noFill/>
+                    </a:lnB>
+                    <a:noFill/>
+                  </a:tcPr>
+                </a:tc>
+                <a:tc>
+                  <a:txBody>
+                    <a:bodyPr/>
+                    <a:lstStyle/>
+                    <a:p>
+                      <a:pPr>
+                        <a:buNone/>
+                      </a:pPr>
+                      <a:r>
+                        <a:rPr lang="pt-BR" b="1"/>
+                        <a:t>Bloqueios</a:t>
+                      </a:r>
+                    </a:p>
+                  </a:txBody>
+                  <a:tcPr anchor="ctr">
+                    <a:lnL>
+                      <a:noFill/>
+                    </a:lnL>
+                    <a:lnR>
+                      <a:noFill/>
+                    </a:lnR>
+                    <a:lnT>
+                      <a:noFill/>
+                    </a:lnT>
+                    <a:lnB>
+                      <a:noFill/>
+                    </a:lnB>
+                    <a:noFill/>
+                  </a:tcPr>
+                </a:tc>
+                <a:tc>
+                  <a:txBody>
+                    <a:bodyPr/>
+                    <a:lstStyle/>
+                    <a:p>
+                      <a:pPr>
+                        <a:buNone/>
+                      </a:pPr>
+                      <a:r>
+                        <a:rPr lang="pt-BR" b="1"/>
+                        <a:t>Críticas</a:t>
+                      </a:r>
+                    </a:p>
+                  </a:txBody>
+                  <a:tcPr anchor="ctr">
+                    <a:lnL>
+                      <a:noFill/>
+                    </a:lnL>
+                    <a:lnR>
+                      <a:noFill/>
+                    </a:lnR>
+                    <a:lnT>
+                      <a:noFill/>
+                    </a:lnT>
+                    <a:lnB>
+                      <a:noFill/>
+                    </a:lnB>
+                    <a:noFill/>
+                  </a:tcPr>
+                </a:tc>
+                <a:tc>
+                  <a:txBody>
+                    <a:bodyPr/>
+                    <a:lstStyle/>
+                    <a:p>
+                      <a:pPr>
+                        <a:buNone/>
+                      </a:pPr>
+                      <a:r>
+                        <a:rPr lang="pt-BR" b="1"/>
+                        <a:t>Principais</a:t>
+                      </a:r>
+                    </a:p>
+                  </a:txBody>
+                  <a:tcPr anchor="ctr">
+                    <a:lnL>
+                      <a:noFill/>
+                    </a:lnL>
+                    <a:lnR>
+                      <a:noFill/>
+                    </a:lnR>
+                    <a:lnT>
+                      <a:noFill/>
+                    </a:lnT>
+                    <a:lnB>
+                      <a:noFill/>
+                    </a:lnB>
+                    <a:noFill/>
+                  </a:tcPr>
+                </a:tc>
+                <a:tc>
+                  <a:txBody>
+                    <a:bodyPr/>
+                    <a:lstStyle/>
+                    <a:p>
+                      <a:pPr>
+                        <a:buNone/>
+                      </a:pPr>
+                      <a:r>
+                        <a:rPr lang="pt-BR" b="1" dirty="0"/>
+                        <a:t>Secundárias</a:t>
+                      </a:r>
+                    </a:p>
+                  </a:txBody>
+                  <a:tcPr anchor="ctr">
+                    <a:lnL>
+                      <a:noFill/>
+                    </a:lnL>
+                    <a:lnR>
+                      <a:noFill/>
+                    </a:lnR>
+                    <a:lnT>
+                      <a:noFill/>
+                    </a:lnT>
+                    <a:lnB>
+                      <a:noFill/>
+                    </a:lnB>
+                    <a:noFill/>
+                  </a:tcPr>
+                </a:tc>
+                <a:extLst>
+                  <a:ext uri="{0D108BD9-81ED-4DB2-BD59-A6C34878D82A}">
+                    <a16:rowId xmlns:a16="http://schemas.microsoft.com/office/drawing/2014/main" val="4186958419"/>
+                  </a:ext>
+                </a:extLst>
+              </a:tr>
+              <a:tr h="0">
+                <a:tc>
+                  <a:txBody>
+                    <a:bodyPr/>
+                    <a:lstStyle/>
+                    <a:p>
+                      <a:pPr>
+                        <a:buNone/>
+                      </a:pPr>
+                      <a:r>
+                        <a:rPr lang="pt-BR"/>
+                        <a:t>ChatGPT</a:t>
+                      </a:r>
+                    </a:p>
+                  </a:txBody>
+                  <a:tcPr anchor="ctr">
+                    <a:lnL>
+                      <a:noFill/>
+                    </a:lnL>
+                    <a:lnR>
+                      <a:noFill/>
+                    </a:lnR>
+                    <a:lnT>
+                      <a:noFill/>
+                    </a:lnT>
+                    <a:lnB>
+                      <a:noFill/>
+                    </a:lnB>
+                    <a:noFill/>
+                  </a:tcPr>
+                </a:tc>
+                <a:tc>
+                  <a:txBody>
+                    <a:bodyPr/>
+                    <a:lstStyle/>
+                    <a:p>
+                      <a:pPr>
+                        <a:buNone/>
+                      </a:pPr>
+                      <a:r>
+                        <a:rPr lang="pt-BR"/>
+                        <a:t>22</a:t>
+                      </a:r>
+                    </a:p>
+                  </a:txBody>
+                  <a:tcPr anchor="ctr">
+                    <a:lnL>
+                      <a:noFill/>
+                    </a:lnL>
+                    <a:lnR>
+                      <a:noFill/>
+                    </a:lnR>
+                    <a:lnT>
+                      <a:noFill/>
+                    </a:lnT>
+                    <a:lnB>
+                      <a:noFill/>
+                    </a:lnB>
+                    <a:noFill/>
+                  </a:tcPr>
+                </a:tc>
+                <a:tc>
+                  <a:txBody>
+                    <a:bodyPr/>
+                    <a:lstStyle/>
+                    <a:p>
+                      <a:pPr>
+                        <a:buNone/>
+                      </a:pPr>
+                      <a:r>
+                        <a:rPr lang="pt-BR"/>
+                        <a:t>1</a:t>
+                      </a:r>
+                    </a:p>
+                  </a:txBody>
+                  <a:tcPr anchor="ctr">
+                    <a:lnL>
+                      <a:noFill/>
+                    </a:lnL>
+                    <a:lnR>
+                      <a:noFill/>
+                    </a:lnR>
+                    <a:lnT>
+                      <a:noFill/>
+                    </a:lnT>
+                    <a:lnB>
+                      <a:noFill/>
+                    </a:lnB>
+                    <a:noFill/>
+                  </a:tcPr>
+                </a:tc>
+                <a:tc>
+                  <a:txBody>
+                    <a:bodyPr/>
+                    <a:lstStyle/>
+                    <a:p>
+                      <a:pPr>
+                        <a:buNone/>
+                      </a:pPr>
+                      <a:r>
+                        <a:rPr lang="pt-BR"/>
+                        <a:t>0</a:t>
+                      </a:r>
+                    </a:p>
+                  </a:txBody>
+                  <a:tcPr anchor="ctr">
+                    <a:lnL>
+                      <a:noFill/>
+                    </a:lnL>
+                    <a:lnR>
+                      <a:noFill/>
+                    </a:lnR>
+                    <a:lnT>
+                      <a:noFill/>
+                    </a:lnT>
+                    <a:lnB>
+                      <a:noFill/>
+                    </a:lnB>
+                    <a:noFill/>
+                  </a:tcPr>
+                </a:tc>
+                <a:tc>
+                  <a:txBody>
+                    <a:bodyPr/>
+                    <a:lstStyle/>
+                    <a:p>
+                      <a:pPr>
+                        <a:buNone/>
+                      </a:pPr>
+                      <a:r>
+                        <a:rPr lang="pt-BR"/>
+                        <a:t>9</a:t>
+                      </a:r>
+                    </a:p>
+                  </a:txBody>
+                  <a:tcPr anchor="ctr">
+                    <a:lnL>
+                      <a:noFill/>
+                    </a:lnL>
+                    <a:lnR>
+                      <a:noFill/>
+                    </a:lnR>
+                    <a:lnT>
+                      <a:noFill/>
+                    </a:lnT>
+                    <a:lnB>
+                      <a:noFill/>
+                    </a:lnB>
+                    <a:noFill/>
+                  </a:tcPr>
+                </a:tc>
+                <a:tc>
+                  <a:txBody>
+                    <a:bodyPr/>
+                    <a:lstStyle/>
+                    <a:p>
+                      <a:pPr>
+                        <a:buNone/>
+                      </a:pPr>
+                      <a:r>
+                        <a:rPr lang="pt-BR"/>
+                        <a:t>12</a:t>
+                      </a:r>
+                    </a:p>
+                  </a:txBody>
+                  <a:tcPr anchor="ctr">
+                    <a:lnL>
+                      <a:noFill/>
+                    </a:lnL>
+                    <a:lnR>
+                      <a:noFill/>
+                    </a:lnR>
+                    <a:lnT>
+                      <a:noFill/>
+                    </a:lnT>
+                    <a:lnB>
+                      <a:noFill/>
+                    </a:lnB>
+                    <a:noFill/>
+                  </a:tcPr>
+                </a:tc>
+                <a:extLst>
+                  <a:ext uri="{0D108BD9-81ED-4DB2-BD59-A6C34878D82A}">
+                    <a16:rowId xmlns:a16="http://schemas.microsoft.com/office/drawing/2014/main" val="2694464506"/>
+                  </a:ext>
+                </a:extLst>
+              </a:tr>
+              <a:tr h="0">
+                <a:tc>
+                  <a:txBody>
+                    <a:bodyPr/>
+                    <a:lstStyle/>
+                    <a:p>
+                      <a:pPr>
+                        <a:buNone/>
+                      </a:pPr>
+                      <a:r>
+                        <a:rPr lang="pt-BR"/>
+                        <a:t>Copilot</a:t>
+                      </a:r>
+                    </a:p>
+                  </a:txBody>
+                  <a:tcPr anchor="ctr">
+                    <a:lnL>
+                      <a:noFill/>
+                    </a:lnL>
+                    <a:lnR>
+                      <a:noFill/>
+                    </a:lnR>
+                    <a:lnT>
+                      <a:noFill/>
+                    </a:lnT>
+                    <a:lnB>
+                      <a:noFill/>
+                    </a:lnB>
+                    <a:noFill/>
+                  </a:tcPr>
+                </a:tc>
+                <a:tc>
+                  <a:txBody>
+                    <a:bodyPr/>
+                    <a:lstStyle/>
+                    <a:p>
+                      <a:pPr>
+                        <a:buNone/>
+                      </a:pPr>
+                      <a:r>
+                        <a:rPr lang="pt-BR"/>
+                        <a:t>9</a:t>
+                      </a:r>
+                    </a:p>
+                  </a:txBody>
+                  <a:tcPr anchor="ctr">
+                    <a:lnL>
+                      <a:noFill/>
+                    </a:lnL>
+                    <a:lnR>
+                      <a:noFill/>
+                    </a:lnR>
+                    <a:lnT>
+                      <a:noFill/>
+                    </a:lnT>
+                    <a:lnB>
+                      <a:noFill/>
+                    </a:lnB>
+                    <a:noFill/>
+                  </a:tcPr>
+                </a:tc>
+                <a:tc>
+                  <a:txBody>
+                    <a:bodyPr/>
+                    <a:lstStyle/>
+                    <a:p>
+                      <a:pPr>
+                        <a:buNone/>
+                      </a:pPr>
+                      <a:r>
+                        <a:rPr lang="pt-BR"/>
+                        <a:t>1</a:t>
+                      </a:r>
+                    </a:p>
+                  </a:txBody>
+                  <a:tcPr anchor="ctr">
+                    <a:lnL>
+                      <a:noFill/>
+                    </a:lnL>
+                    <a:lnR>
+                      <a:noFill/>
+                    </a:lnR>
+                    <a:lnT>
+                      <a:noFill/>
+                    </a:lnT>
+                    <a:lnB>
+                      <a:noFill/>
+                    </a:lnB>
+                    <a:noFill/>
+                  </a:tcPr>
+                </a:tc>
+                <a:tc>
+                  <a:txBody>
+                    <a:bodyPr/>
+                    <a:lstStyle/>
+                    <a:p>
+                      <a:pPr>
+                        <a:buNone/>
+                      </a:pPr>
+                      <a:r>
+                        <a:rPr lang="pt-BR"/>
+                        <a:t>3</a:t>
+                      </a:r>
+                    </a:p>
+                  </a:txBody>
+                  <a:tcPr anchor="ctr">
+                    <a:lnL>
+                      <a:noFill/>
+                    </a:lnL>
+                    <a:lnR>
+                      <a:noFill/>
+                    </a:lnR>
+                    <a:lnT>
+                      <a:noFill/>
+                    </a:lnT>
+                    <a:lnB>
+                      <a:noFill/>
+                    </a:lnB>
+                    <a:noFill/>
+                  </a:tcPr>
+                </a:tc>
+                <a:tc>
+                  <a:txBody>
+                    <a:bodyPr/>
+                    <a:lstStyle/>
+                    <a:p>
+                      <a:pPr>
+                        <a:buNone/>
+                      </a:pPr>
+                      <a:r>
+                        <a:rPr lang="pt-BR"/>
+                        <a:t>3</a:t>
+                      </a:r>
+                    </a:p>
+                  </a:txBody>
+                  <a:tcPr anchor="ctr">
+                    <a:lnL>
+                      <a:noFill/>
+                    </a:lnL>
+                    <a:lnR>
+                      <a:noFill/>
+                    </a:lnR>
+                    <a:lnT>
+                      <a:noFill/>
+                    </a:lnT>
+                    <a:lnB>
+                      <a:noFill/>
+                    </a:lnB>
+                    <a:noFill/>
+                  </a:tcPr>
+                </a:tc>
+                <a:tc>
+                  <a:txBody>
+                    <a:bodyPr/>
+                    <a:lstStyle/>
+                    <a:p>
+                      <a:pPr>
+                        <a:buNone/>
+                      </a:pPr>
+                      <a:r>
+                        <a:rPr lang="pt-BR"/>
+                        <a:t>2</a:t>
+                      </a:r>
+                    </a:p>
+                  </a:txBody>
+                  <a:tcPr anchor="ctr">
+                    <a:lnL>
+                      <a:noFill/>
+                    </a:lnL>
+                    <a:lnR>
+                      <a:noFill/>
+                    </a:lnR>
+                    <a:lnT>
+                      <a:noFill/>
+                    </a:lnT>
+                    <a:lnB>
+                      <a:noFill/>
+                    </a:lnB>
+                    <a:noFill/>
+                  </a:tcPr>
+                </a:tc>
+                <a:extLst>
+                  <a:ext uri="{0D108BD9-81ED-4DB2-BD59-A6C34878D82A}">
+                    <a16:rowId xmlns:a16="http://schemas.microsoft.com/office/drawing/2014/main" val="533392937"/>
+                  </a:ext>
+                </a:extLst>
+              </a:tr>
+              <a:tr h="0">
+                <a:tc>
+                  <a:txBody>
+                    <a:bodyPr/>
+                    <a:lstStyle/>
+                    <a:p>
+                      <a:pPr>
+                        <a:buNone/>
+                      </a:pPr>
+                      <a:r>
+                        <a:rPr lang="pt-BR"/>
+                        <a:t>DeepSeek</a:t>
+                      </a:r>
+                    </a:p>
+                  </a:txBody>
+                  <a:tcPr anchor="ctr">
+                    <a:lnL>
+                      <a:noFill/>
+                    </a:lnL>
+                    <a:lnR>
+                      <a:noFill/>
+                    </a:lnR>
+                    <a:lnT>
+                      <a:noFill/>
+                    </a:lnT>
+                    <a:lnB>
+                      <a:noFill/>
+                    </a:lnB>
+                    <a:noFill/>
+                  </a:tcPr>
+                </a:tc>
+                <a:tc>
+                  <a:txBody>
+                    <a:bodyPr/>
+                    <a:lstStyle/>
+                    <a:p>
+                      <a:pPr>
+                        <a:buNone/>
+                      </a:pPr>
+                      <a:r>
+                        <a:rPr lang="pt-BR"/>
+                        <a:t>30</a:t>
+                      </a:r>
+                    </a:p>
+                  </a:txBody>
+                  <a:tcPr anchor="ctr">
+                    <a:lnL>
+                      <a:noFill/>
+                    </a:lnL>
+                    <a:lnR>
+                      <a:noFill/>
+                    </a:lnR>
+                    <a:lnT>
+                      <a:noFill/>
+                    </a:lnT>
+                    <a:lnB>
+                      <a:noFill/>
+                    </a:lnB>
+                    <a:noFill/>
+                  </a:tcPr>
+                </a:tc>
+                <a:tc>
+                  <a:txBody>
+                    <a:bodyPr/>
+                    <a:lstStyle/>
+                    <a:p>
+                      <a:pPr>
+                        <a:buNone/>
+                      </a:pPr>
+                      <a:r>
+                        <a:rPr lang="pt-BR"/>
+                        <a:t>1</a:t>
+                      </a:r>
+                    </a:p>
+                  </a:txBody>
+                  <a:tcPr anchor="ctr">
+                    <a:lnL>
+                      <a:noFill/>
+                    </a:lnL>
+                    <a:lnR>
+                      <a:noFill/>
+                    </a:lnR>
+                    <a:lnT>
+                      <a:noFill/>
+                    </a:lnT>
+                    <a:lnB>
+                      <a:noFill/>
+                    </a:lnB>
+                    <a:noFill/>
+                  </a:tcPr>
+                </a:tc>
+                <a:tc>
+                  <a:txBody>
+                    <a:bodyPr/>
+                    <a:lstStyle/>
+                    <a:p>
+                      <a:pPr>
+                        <a:buNone/>
+                      </a:pPr>
+                      <a:r>
+                        <a:rPr lang="pt-BR"/>
+                        <a:t>9</a:t>
+                      </a:r>
+                    </a:p>
+                  </a:txBody>
+                  <a:tcPr anchor="ctr">
+                    <a:lnL>
+                      <a:noFill/>
+                    </a:lnL>
+                    <a:lnR>
+                      <a:noFill/>
+                    </a:lnR>
+                    <a:lnT>
+                      <a:noFill/>
+                    </a:lnT>
+                    <a:lnB>
+                      <a:noFill/>
+                    </a:lnB>
+                    <a:noFill/>
+                  </a:tcPr>
+                </a:tc>
+                <a:tc>
+                  <a:txBody>
+                    <a:bodyPr/>
+                    <a:lstStyle/>
+                    <a:p>
+                      <a:pPr>
+                        <a:buNone/>
+                      </a:pPr>
+                      <a:r>
+                        <a:rPr lang="pt-BR"/>
+                        <a:t>13</a:t>
+                      </a:r>
+                    </a:p>
+                  </a:txBody>
+                  <a:tcPr anchor="ctr">
+                    <a:lnL>
+                      <a:noFill/>
+                    </a:lnL>
+                    <a:lnR>
+                      <a:noFill/>
+                    </a:lnR>
+                    <a:lnT>
+                      <a:noFill/>
+                    </a:lnT>
+                    <a:lnB>
+                      <a:noFill/>
+                    </a:lnB>
+                    <a:noFill/>
+                  </a:tcPr>
+                </a:tc>
+                <a:tc>
+                  <a:txBody>
+                    <a:bodyPr/>
+                    <a:lstStyle/>
+                    <a:p>
+                      <a:pPr>
+                        <a:buNone/>
+                      </a:pPr>
+                      <a:r>
+                        <a:rPr lang="pt-BR"/>
+                        <a:t>7</a:t>
+                      </a:r>
+                    </a:p>
+                  </a:txBody>
+                  <a:tcPr anchor="ctr">
+                    <a:lnL>
+                      <a:noFill/>
+                    </a:lnL>
+                    <a:lnR>
+                      <a:noFill/>
+                    </a:lnR>
+                    <a:lnT>
+                      <a:noFill/>
+                    </a:lnT>
+                    <a:lnB>
+                      <a:noFill/>
+                    </a:lnB>
+                    <a:noFill/>
+                  </a:tcPr>
+                </a:tc>
+                <a:extLst>
+                  <a:ext uri="{0D108BD9-81ED-4DB2-BD59-A6C34878D82A}">
+                    <a16:rowId xmlns:a16="http://schemas.microsoft.com/office/drawing/2014/main" val="1684842970"/>
+                  </a:ext>
+                </a:extLst>
+              </a:tr>
+              <a:tr h="0">
+                <a:tc>
+                  <a:txBody>
+                    <a:bodyPr/>
+                    <a:lstStyle/>
+                    <a:p>
+                      <a:pPr>
+                        <a:buNone/>
+                      </a:pPr>
+                      <a:r>
+                        <a:rPr lang="pt-BR"/>
+                        <a:t>Gemini</a:t>
+                      </a:r>
+                    </a:p>
+                  </a:txBody>
+                  <a:tcPr anchor="ctr">
+                    <a:lnL>
+                      <a:noFill/>
+                    </a:lnL>
+                    <a:lnR>
+                      <a:noFill/>
+                    </a:lnR>
+                    <a:lnT>
+                      <a:noFill/>
+                    </a:lnT>
+                    <a:lnB>
+                      <a:noFill/>
+                    </a:lnB>
+                    <a:noFill/>
+                  </a:tcPr>
+                </a:tc>
+                <a:tc>
+                  <a:txBody>
+                    <a:bodyPr/>
+                    <a:lstStyle/>
+                    <a:p>
+                      <a:pPr>
+                        <a:buNone/>
+                      </a:pPr>
+                      <a:r>
+                        <a:rPr lang="pt-BR"/>
+                        <a:t>15</a:t>
+                      </a:r>
+                    </a:p>
+                  </a:txBody>
+                  <a:tcPr anchor="ctr">
+                    <a:lnL>
+                      <a:noFill/>
+                    </a:lnL>
+                    <a:lnR>
+                      <a:noFill/>
+                    </a:lnR>
+                    <a:lnT>
+                      <a:noFill/>
+                    </a:lnT>
+                    <a:lnB>
+                      <a:noFill/>
+                    </a:lnB>
+                    <a:noFill/>
+                  </a:tcPr>
+                </a:tc>
+                <a:tc>
+                  <a:txBody>
+                    <a:bodyPr/>
+                    <a:lstStyle/>
+                    <a:p>
+                      <a:pPr>
+                        <a:buNone/>
+                      </a:pPr>
+                      <a:r>
+                        <a:rPr lang="pt-BR"/>
+                        <a:t>2</a:t>
+                      </a:r>
+                    </a:p>
+                  </a:txBody>
+                  <a:tcPr anchor="ctr">
+                    <a:lnL>
+                      <a:noFill/>
+                    </a:lnL>
+                    <a:lnR>
+                      <a:noFill/>
+                    </a:lnR>
+                    <a:lnT>
+                      <a:noFill/>
+                    </a:lnT>
+                    <a:lnB>
+                      <a:noFill/>
+                    </a:lnB>
+                    <a:noFill/>
+                  </a:tcPr>
+                </a:tc>
+                <a:tc>
+                  <a:txBody>
+                    <a:bodyPr/>
+                    <a:lstStyle/>
+                    <a:p>
+                      <a:pPr>
+                        <a:buNone/>
+                      </a:pPr>
+                      <a:r>
+                        <a:rPr lang="pt-BR"/>
+                        <a:t>1</a:t>
+                      </a:r>
+                    </a:p>
+                  </a:txBody>
+                  <a:tcPr anchor="ctr">
+                    <a:lnL>
+                      <a:noFill/>
+                    </a:lnL>
+                    <a:lnR>
+                      <a:noFill/>
+                    </a:lnR>
+                    <a:lnT>
+                      <a:noFill/>
+                    </a:lnT>
+                    <a:lnB>
+                      <a:noFill/>
+                    </a:lnB>
+                    <a:noFill/>
+                  </a:tcPr>
+                </a:tc>
+                <a:tc>
+                  <a:txBody>
+                    <a:bodyPr/>
+                    <a:lstStyle/>
+                    <a:p>
+                      <a:pPr>
+                        <a:buNone/>
+                      </a:pPr>
+                      <a:r>
+                        <a:rPr lang="pt-BR"/>
+                        <a:t>9</a:t>
+                      </a:r>
+                    </a:p>
+                  </a:txBody>
+                  <a:tcPr anchor="ctr">
+                    <a:lnL>
+                      <a:noFill/>
+                    </a:lnL>
+                    <a:lnR>
+                      <a:noFill/>
+                    </a:lnR>
+                    <a:lnT>
+                      <a:noFill/>
+                    </a:lnT>
+                    <a:lnB>
+                      <a:noFill/>
+                    </a:lnB>
+                    <a:noFill/>
+                  </a:tcPr>
+                </a:tc>
+                <a:tc>
+                  <a:txBody>
+                    <a:bodyPr/>
+                    <a:lstStyle/>
+                    <a:p>
+                      <a:pPr>
+                        <a:buNone/>
+                      </a:pPr>
+                      <a:r>
+                        <a:rPr lang="pt-BR"/>
+                        <a:t>3</a:t>
+                      </a:r>
+                    </a:p>
+                  </a:txBody>
+                  <a:tcPr anchor="ctr">
+                    <a:lnL>
+                      <a:noFill/>
+                    </a:lnL>
+                    <a:lnR>
+                      <a:noFill/>
+                    </a:lnR>
+                    <a:lnT>
+                      <a:noFill/>
+                    </a:lnT>
+                    <a:lnB>
+                      <a:noFill/>
+                    </a:lnB>
+                    <a:noFill/>
+                  </a:tcPr>
+                </a:tc>
+                <a:extLst>
+                  <a:ext uri="{0D108BD9-81ED-4DB2-BD59-A6C34878D82A}">
+                    <a16:rowId xmlns:a16="http://schemas.microsoft.com/office/drawing/2014/main" val="1901901883"/>
+                  </a:ext>
+                </a:extLst>
+              </a:tr>
+              <a:tr h="0">
+                <a:tc>
+                  <a:txBody>
+                    <a:bodyPr/>
+                    <a:lstStyle/>
+                    <a:p>
+                      <a:pPr>
+                        <a:buNone/>
+                      </a:pPr>
+                      <a:r>
+                        <a:rPr lang="pt-BR"/>
+                        <a:t>MetaAI</a:t>
+                      </a:r>
+                    </a:p>
+                  </a:txBody>
+                  <a:tcPr anchor="ctr">
+                    <a:lnL>
+                      <a:noFill/>
+                    </a:lnL>
+                    <a:lnR>
+                      <a:noFill/>
+                    </a:lnR>
+                    <a:lnT>
+                      <a:noFill/>
+                    </a:lnT>
+                    <a:lnB>
+                      <a:noFill/>
+                    </a:lnB>
+                    <a:noFill/>
+                  </a:tcPr>
+                </a:tc>
+                <a:tc>
+                  <a:txBody>
+                    <a:bodyPr/>
+                    <a:lstStyle/>
+                    <a:p>
+                      <a:pPr>
+                        <a:buNone/>
+                      </a:pPr>
+                      <a:r>
+                        <a:rPr lang="pt-BR"/>
+                        <a:t>7</a:t>
+                      </a:r>
+                    </a:p>
+                  </a:txBody>
+                  <a:tcPr anchor="ctr">
+                    <a:lnL>
+                      <a:noFill/>
+                    </a:lnL>
+                    <a:lnR>
+                      <a:noFill/>
+                    </a:lnR>
+                    <a:lnT>
+                      <a:noFill/>
+                    </a:lnT>
+                    <a:lnB>
+                      <a:noFill/>
+                    </a:lnB>
+                    <a:noFill/>
+                  </a:tcPr>
+                </a:tc>
+                <a:tc>
+                  <a:txBody>
+                    <a:bodyPr/>
+                    <a:lstStyle/>
+                    <a:p>
+                      <a:pPr>
+                        <a:buNone/>
+                      </a:pPr>
+                      <a:r>
+                        <a:rPr lang="pt-BR"/>
+                        <a:t>2</a:t>
+                      </a:r>
+                    </a:p>
+                  </a:txBody>
+                  <a:tcPr anchor="ctr">
+                    <a:lnL>
+                      <a:noFill/>
+                    </a:lnL>
+                    <a:lnR>
+                      <a:noFill/>
+                    </a:lnR>
+                    <a:lnT>
+                      <a:noFill/>
+                    </a:lnT>
+                    <a:lnB>
+                      <a:noFill/>
+                    </a:lnB>
+                    <a:noFill/>
+                  </a:tcPr>
+                </a:tc>
+                <a:tc>
+                  <a:txBody>
+                    <a:bodyPr/>
+                    <a:lstStyle/>
+                    <a:p>
+                      <a:pPr>
+                        <a:buNone/>
+                      </a:pPr>
+                      <a:r>
+                        <a:rPr lang="pt-BR"/>
+                        <a:t>0</a:t>
+                      </a:r>
+                    </a:p>
+                  </a:txBody>
+                  <a:tcPr anchor="ctr">
+                    <a:lnL>
+                      <a:noFill/>
+                    </a:lnL>
+                    <a:lnR>
+                      <a:noFill/>
+                    </a:lnR>
+                    <a:lnT>
+                      <a:noFill/>
+                    </a:lnT>
+                    <a:lnB>
+                      <a:noFill/>
+                    </a:lnB>
+                    <a:noFill/>
+                  </a:tcPr>
+                </a:tc>
+                <a:tc>
+                  <a:txBody>
+                    <a:bodyPr/>
+                    <a:lstStyle/>
+                    <a:p>
+                      <a:pPr>
+                        <a:buNone/>
+                      </a:pPr>
+                      <a:r>
+                        <a:rPr lang="pt-BR"/>
+                        <a:t>4</a:t>
+                      </a:r>
+                    </a:p>
+                  </a:txBody>
+                  <a:tcPr anchor="ctr">
+                    <a:lnL>
+                      <a:noFill/>
+                    </a:lnL>
+                    <a:lnR>
+                      <a:noFill/>
+                    </a:lnR>
+                    <a:lnT>
+                      <a:noFill/>
+                    </a:lnT>
+                    <a:lnB>
+                      <a:noFill/>
+                    </a:lnB>
+                    <a:noFill/>
+                  </a:tcPr>
+                </a:tc>
+                <a:tc>
+                  <a:txBody>
+                    <a:bodyPr/>
+                    <a:lstStyle/>
+                    <a:p>
+                      <a:pPr>
+                        <a:buNone/>
+                      </a:pPr>
+                      <a:r>
+                        <a:rPr lang="pt-BR" dirty="0"/>
+                        <a:t>1</a:t>
+                      </a:r>
+                    </a:p>
+                  </a:txBody>
+                  <a:tcPr anchor="ctr">
+                    <a:lnL>
+                      <a:noFill/>
+                    </a:lnL>
+                    <a:lnR>
+                      <a:noFill/>
+                    </a:lnR>
+                    <a:lnT>
+                      <a:noFill/>
+                    </a:lnT>
+                    <a:lnB>
+                      <a:noFill/>
+                    </a:lnB>
+                    <a:noFill/>
+                  </a:tcPr>
+                </a:tc>
+                <a:extLst>
+                  <a:ext uri="{0D108BD9-81ED-4DB2-BD59-A6C34878D82A}">
+                    <a16:rowId xmlns:a16="http://schemas.microsoft.com/office/drawing/2014/main" val="821868334"/>
+                  </a:ext>
+                </a:extLst>
+              </a:tr>
+            </a:tbl>
+          </a:graphicData>
+        </a:graphic>
+      </p:graphicFrame>
+    </p:spTree>
+    <p:extLst>
+      <p:ext uri="{BB962C8B-B14F-4D97-AF65-F5344CB8AC3E}">
+        <p14:creationId xmlns:p14="http://schemas.microsoft.com/office/powerpoint/2010/main" val="3466748080"/>
+      </p:ext>
+    </p:extLst>
+  </p:cSld>
+  <p:clrMapOvr>
+    <a:masterClrMapping/>
+  </p:clrMapOvr>
+</p:sld>
+</file>
+
+<file path=ppt/slides/slide12.xml><?xml version="1.0" encoding="utf-8"?>
+<p:sld xmlns:a="http://schemas.openxmlformats.org/drawingml/2006/main" xmlns:r="http://schemas.openxmlformats.org/officeDocument/2006/relationships" xmlns:p="http://schemas.openxmlformats.org/presentationml/2006/main">
+  <p:cSld>
+    <p:spTree>
+      <p:nvGrpSpPr>
+        <p:cNvPr id="1" name="">
+          <a:extLst>
+            <a:ext uri="{FF2B5EF4-FFF2-40B4-BE49-F238E27FC236}">
+              <a16:creationId xmlns:a16="http://schemas.microsoft.com/office/drawing/2014/main" id="{C6E57636-55AB-D76D-CD2B-1794B59C8EAE}"/>
+            </a:ext>
+          </a:extLst>
+        </p:cNvPr>
+        <p:cNvGrpSpPr/>
+        <p:nvPr/>
+      </p:nvGrpSpPr>
+      <p:grpSpPr>
+        <a:xfrm>
+          <a:off x="0" y="0"/>
+          <a:ext cx="0" cy="0"/>
+          <a:chOff x="0" y="0"/>
+          <a:chExt cx="0" cy="0"/>
+        </a:xfrm>
+      </p:grpSpPr>
+      <p:sp>
+        <p:nvSpPr>
+          <p:cNvPr id="2" name="Title 1">
+            <a:extLst>
+              <a:ext uri="{FF2B5EF4-FFF2-40B4-BE49-F238E27FC236}">
+                <a16:creationId xmlns:a16="http://schemas.microsoft.com/office/drawing/2014/main" id="{F1BF83CA-501D-60D2-759A-AB0FDC3814B5}"/>
+              </a:ext>
+            </a:extLst>
+          </p:cNvPr>
+          <p:cNvSpPr>
+            <a:spLocks noGrp="1"/>
+          </p:cNvSpPr>
+          <p:nvPr/>
+        </p:nvSpPr>
+        <p:spPr>
+          <a:xfrm>
+            <a:off x="1981200" y="503237"/>
+            <a:ext cx="8229600" cy="1143000"/>
+          </a:xfrm>
+          <a:prstGeom prst="rect">
+            <a:avLst/>
+          </a:prstGeom>
+        </p:spPr>
+        <p:txBody>
+          <a:bodyPr vert="horz" lIns="91440" tIns="45720" rIns="91440" bIns="45720" rtlCol="0" anchor="ctr">
+            <a:normAutofit/>
+          </a:bodyPr>
+          <a:lstStyle>
+            <a:lvl1pPr algn="ctr" defTabSz="457200" rtl="0" eaLnBrk="1" latinLnBrk="0" hangingPunct="1">
+              <a:spcBef>
+                <a:spcPct val="0"/>
+              </a:spcBef>
+              <a:buNone/>
+              <a:defRPr sz="4400" kern="1200">
+                <a:solidFill>
+                  <a:schemeClr val="tx1"/>
+                </a:solidFill>
+                <a:latin typeface="+mj-lt"/>
+                <a:ea typeface="+mj-ea"/>
+                <a:cs typeface="+mj-cs"/>
+              </a:defRPr>
+            </a:lvl1pPr>
+          </a:lstStyle>
+          <a:p>
+            <a:r>
+              <a:rPr lang="pt-BR" b="1" dirty="0"/>
+              <a:t>Resultados – Tempo de Correção</a:t>
+            </a:r>
+            <a:endParaRPr b="1" dirty="0"/>
+          </a:p>
+        </p:txBody>
+      </p:sp>
+      <p:sp>
+        <p:nvSpPr>
+          <p:cNvPr id="3" name="Content Placeholder 2">
+            <a:extLst>
+              <a:ext uri="{FF2B5EF4-FFF2-40B4-BE49-F238E27FC236}">
+                <a16:creationId xmlns:a16="http://schemas.microsoft.com/office/drawing/2014/main" id="{9F6A9758-7FAC-B834-A3FB-BC4F78430819}"/>
+              </a:ext>
+            </a:extLst>
+          </p:cNvPr>
+          <p:cNvSpPr>
+            <a:spLocks noGrp="1"/>
+          </p:cNvSpPr>
+          <p:nvPr/>
+        </p:nvSpPr>
+        <p:spPr>
+          <a:xfrm>
+            <a:off x="1981200" y="1828799"/>
+            <a:ext cx="8229600" cy="4525963"/>
+          </a:xfrm>
+          <a:prstGeom prst="rect">
+            <a:avLst/>
+          </a:prstGeom>
+        </p:spPr>
+        <p:txBody>
+          <a:bodyPr vert="horz" lIns="91440" tIns="45720" rIns="91440" bIns="45720" rtlCol="0">
+            <a:normAutofit/>
+          </a:bodyPr>
+          <a:lstStyle>
+            <a:lvl1pPr marL="342900" indent="-342900" algn="l" defTabSz="457200" rtl="0" eaLnBrk="1" latinLnBrk="0" hangingPunct="1">
+              <a:spcBef>
+                <a:spcPct val="20000"/>
+              </a:spcBef>
+              <a:buFont typeface="Arial"/>
+              <a:buChar char="•"/>
+              <a:defRPr sz="3200" kern="1200">
+                <a:solidFill>
+                  <a:schemeClr val="tx1"/>
+                </a:solidFill>
+                <a:latin typeface="+mn-lt"/>
+                <a:ea typeface="+mn-ea"/>
+                <a:cs typeface="+mn-cs"/>
+              </a:defRPr>
+            </a:lvl1pPr>
+            <a:lvl2pPr marL="742950" indent="-285750" algn="l" defTabSz="457200" rtl="0" eaLnBrk="1" latinLnBrk="0" hangingPunct="1">
+              <a:spcBef>
+                <a:spcPct val="20000"/>
+              </a:spcBef>
+              <a:buFont typeface="Arial"/>
+              <a:buChar char="–"/>
+              <a:defRPr sz="2800" kern="1200">
+                <a:solidFill>
+                  <a:schemeClr val="tx1"/>
+                </a:solidFill>
+                <a:latin typeface="+mn-lt"/>
+                <a:ea typeface="+mn-ea"/>
+                <a:cs typeface="+mn-cs"/>
+              </a:defRPr>
+            </a:lvl2pPr>
+            <a:lvl3pPr marL="1143000" indent="-228600" algn="l" defTabSz="457200" rtl="0" eaLnBrk="1" latinLnBrk="0" hangingPunct="1">
+              <a:spcBef>
+                <a:spcPct val="20000"/>
+              </a:spcBef>
+              <a:buFont typeface="Arial"/>
+              <a:buChar char="•"/>
+              <a:defRPr sz="2400" kern="1200">
+                <a:solidFill>
+                  <a:schemeClr val="tx1"/>
+                </a:solidFill>
+                <a:latin typeface="+mn-lt"/>
+                <a:ea typeface="+mn-ea"/>
+                <a:cs typeface="+mn-cs"/>
+              </a:defRPr>
+            </a:lvl3pPr>
+            <a:lvl4pPr marL="1600200" indent="-228600" algn="l" defTabSz="457200" rtl="0" eaLnBrk="1" latinLnBrk="0" hangingPunct="1">
+              <a:spcBef>
+                <a:spcPct val="20000"/>
+              </a:spcBef>
+              <a:buFont typeface="Arial"/>
+              <a:buChar char="–"/>
+              <a:defRPr sz="2000" kern="1200">
+                <a:solidFill>
+                  <a:schemeClr val="tx1"/>
+                </a:solidFill>
+                <a:latin typeface="+mn-lt"/>
+                <a:ea typeface="+mn-ea"/>
+                <a:cs typeface="+mn-cs"/>
+              </a:defRPr>
+            </a:lvl4pPr>
+            <a:lvl5pPr marL="2057400" indent="-228600" algn="l" defTabSz="457200" rtl="0" eaLnBrk="1" latinLnBrk="0" hangingPunct="1">
+              <a:spcBef>
+                <a:spcPct val="20000"/>
+              </a:spcBef>
+              <a:buFont typeface="Arial"/>
+              <a:buChar char="»"/>
+              <a:defRPr sz="2000" kern="1200">
+                <a:solidFill>
+                  <a:schemeClr val="tx1"/>
+                </a:solidFill>
+                <a:latin typeface="+mn-lt"/>
+                <a:ea typeface="+mn-ea"/>
+                <a:cs typeface="+mn-cs"/>
+              </a:defRPr>
+            </a:lvl5pPr>
+            <a:lvl6pPr marL="2514600" indent="-228600" algn="l" defTabSz="457200" rtl="0" eaLnBrk="1" latinLnBrk="0" hangingPunct="1">
+              <a:spcBef>
+                <a:spcPct val="20000"/>
+              </a:spcBef>
+              <a:buFont typeface="Arial"/>
+              <a:buChar char="•"/>
+              <a:defRPr sz="2000" kern="1200">
+                <a:solidFill>
+                  <a:schemeClr val="tx1"/>
+                </a:solidFill>
+                <a:latin typeface="+mn-lt"/>
+                <a:ea typeface="+mn-ea"/>
+                <a:cs typeface="+mn-cs"/>
+              </a:defRPr>
+            </a:lvl6pPr>
+            <a:lvl7pPr marL="2971800" indent="-228600" algn="l" defTabSz="457200" rtl="0" eaLnBrk="1" latinLnBrk="0" hangingPunct="1">
+              <a:spcBef>
+                <a:spcPct val="20000"/>
+              </a:spcBef>
+              <a:buFont typeface="Arial"/>
+              <a:buChar char="•"/>
+              <a:defRPr sz="2000" kern="1200">
+                <a:solidFill>
+                  <a:schemeClr val="tx1"/>
+                </a:solidFill>
+                <a:latin typeface="+mn-lt"/>
+                <a:ea typeface="+mn-ea"/>
+                <a:cs typeface="+mn-cs"/>
+              </a:defRPr>
+            </a:lvl7pPr>
+            <a:lvl8pPr marL="3429000" indent="-228600" algn="l" defTabSz="457200" rtl="0" eaLnBrk="1" latinLnBrk="0" hangingPunct="1">
+              <a:spcBef>
+                <a:spcPct val="20000"/>
+              </a:spcBef>
+              <a:buFont typeface="Arial"/>
+              <a:buChar char="•"/>
+              <a:defRPr sz="2000" kern="1200">
+                <a:solidFill>
+                  <a:schemeClr val="tx1"/>
+                </a:solidFill>
+                <a:latin typeface="+mn-lt"/>
+                <a:ea typeface="+mn-ea"/>
+                <a:cs typeface="+mn-cs"/>
+              </a:defRPr>
+            </a:lvl8pPr>
+            <a:lvl9pPr marL="3886200" indent="-228600" algn="l" defTabSz="457200" rtl="0" eaLnBrk="1" latinLnBrk="0" hangingPunct="1">
+              <a:spcBef>
+                <a:spcPct val="20000"/>
+              </a:spcBef>
+              <a:buFont typeface="Arial"/>
+              <a:buChar char="•"/>
+              <a:defRPr sz="2000" kern="1200">
+                <a:solidFill>
+                  <a:schemeClr val="tx1"/>
+                </a:solidFill>
+                <a:latin typeface="+mn-lt"/>
+                <a:ea typeface="+mn-ea"/>
+                <a:cs typeface="+mn-cs"/>
+              </a:defRPr>
+            </a:lvl9pPr>
+          </a:lstStyle>
+          <a:p>
+            <a:pPr marL="0" indent="0">
+              <a:buNone/>
+            </a:pPr>
+            <a:endParaRPr dirty="0"/>
+          </a:p>
+        </p:txBody>
+      </p:sp>
+      <p:graphicFrame>
+        <p:nvGraphicFramePr>
+          <p:cNvPr id="4" name="Tabela 3">
+            <a:extLst>
+              <a:ext uri="{FF2B5EF4-FFF2-40B4-BE49-F238E27FC236}">
+                <a16:creationId xmlns:a16="http://schemas.microsoft.com/office/drawing/2014/main" id="{07D232C9-81B2-7517-440A-67F483960A67}"/>
+              </a:ext>
+            </a:extLst>
+          </p:cNvPr>
+          <p:cNvGraphicFramePr>
+            <a:graphicFrameLocks noGrp="1"/>
+          </p:cNvGraphicFramePr>
+          <p:nvPr>
+            <p:extLst>
+              <p:ext uri="{D42A27DB-BD31-4B8C-83A1-F6EECF244321}">
+                <p14:modId xmlns:p14="http://schemas.microsoft.com/office/powerpoint/2010/main" val="690555408"/>
+              </p:ext>
+            </p:extLst>
+          </p:nvPr>
+        </p:nvGraphicFramePr>
+        <p:xfrm>
+          <a:off x="838200" y="2331720"/>
+          <a:ext cx="10515600" cy="2194560"/>
+        </p:xfrm>
+        <a:graphic>
+          <a:graphicData uri="http://schemas.openxmlformats.org/drawingml/2006/table">
+            <a:tbl>
+              <a:tblPr/>
+              <a:tblGrid>
+                <a:gridCol w="2103120">
+                  <a:extLst>
+                    <a:ext uri="{9D8B030D-6E8A-4147-A177-3AD203B41FA5}">
+                      <a16:colId xmlns:a16="http://schemas.microsoft.com/office/drawing/2014/main" val="2203664745"/>
+                    </a:ext>
+                  </a:extLst>
+                </a:gridCol>
+                <a:gridCol w="2103120">
+                  <a:extLst>
+                    <a:ext uri="{9D8B030D-6E8A-4147-A177-3AD203B41FA5}">
+                      <a16:colId xmlns:a16="http://schemas.microsoft.com/office/drawing/2014/main" val="3155353838"/>
+                    </a:ext>
+                  </a:extLst>
+                </a:gridCol>
+                <a:gridCol w="2103120">
+                  <a:extLst>
+                    <a:ext uri="{9D8B030D-6E8A-4147-A177-3AD203B41FA5}">
+                      <a16:colId xmlns:a16="http://schemas.microsoft.com/office/drawing/2014/main" val="1809273086"/>
+                    </a:ext>
+                  </a:extLst>
+                </a:gridCol>
+                <a:gridCol w="2103120">
+                  <a:extLst>
+                    <a:ext uri="{9D8B030D-6E8A-4147-A177-3AD203B41FA5}">
+                      <a16:colId xmlns:a16="http://schemas.microsoft.com/office/drawing/2014/main" val="1254040919"/>
+                    </a:ext>
+                  </a:extLst>
+                </a:gridCol>
+                <a:gridCol w="2103120">
+                  <a:extLst>
+                    <a:ext uri="{9D8B030D-6E8A-4147-A177-3AD203B41FA5}">
+                      <a16:colId xmlns:a16="http://schemas.microsoft.com/office/drawing/2014/main" val="3269808807"/>
+                    </a:ext>
+                  </a:extLst>
+                </a:gridCol>
+              </a:tblGrid>
+              <a:tr h="0">
+                <a:tc>
+                  <a:txBody>
+                    <a:bodyPr/>
+                    <a:lstStyle/>
+                    <a:p>
+                      <a:pPr>
+                        <a:buNone/>
+                      </a:pPr>
+                      <a:r>
+                        <a:rPr lang="pt-BR" b="1"/>
+                        <a:t>IA</a:t>
+                      </a:r>
+                    </a:p>
+                  </a:txBody>
+                  <a:tcPr anchor="ctr">
+                    <a:lnL>
+                      <a:noFill/>
+                    </a:lnL>
+                    <a:lnR>
+                      <a:noFill/>
+                    </a:lnR>
+                    <a:lnT>
+                      <a:noFill/>
+                    </a:lnT>
+                    <a:lnB>
+                      <a:noFill/>
+                    </a:lnB>
+                    <a:noFill/>
+                  </a:tcPr>
+                </a:tc>
+                <a:tc>
+                  <a:txBody>
+                    <a:bodyPr/>
+                    <a:lstStyle/>
+                    <a:p>
+                      <a:pPr>
+                        <a:buNone/>
+                      </a:pPr>
+                      <a:r>
+                        <a:rPr lang="pt-BR" b="1"/>
+                        <a:t>Total</a:t>
+                      </a:r>
+                    </a:p>
+                  </a:txBody>
+                  <a:tcPr anchor="ctr">
+                    <a:lnL>
+                      <a:noFill/>
+                    </a:lnL>
+                    <a:lnR>
+                      <a:noFill/>
+                    </a:lnR>
+                    <a:lnT>
+                      <a:noFill/>
+                    </a:lnT>
+                    <a:lnB>
+                      <a:noFill/>
+                    </a:lnB>
+                    <a:noFill/>
+                  </a:tcPr>
+                </a:tc>
+                <a:tc>
+                  <a:txBody>
+                    <a:bodyPr/>
+                    <a:lstStyle/>
+                    <a:p>
+                      <a:pPr>
+                        <a:buNone/>
+                      </a:pPr>
+                      <a:r>
+                        <a:rPr lang="pt-BR" b="1"/>
+                        <a:t>Segurança</a:t>
+                      </a:r>
+                    </a:p>
+                  </a:txBody>
+                  <a:tcPr anchor="ctr">
+                    <a:lnL>
+                      <a:noFill/>
+                    </a:lnL>
+                    <a:lnR>
+                      <a:noFill/>
+                    </a:lnR>
+                    <a:lnT>
+                      <a:noFill/>
+                    </a:lnT>
+                    <a:lnB>
+                      <a:noFill/>
+                    </a:lnB>
+                    <a:noFill/>
+                  </a:tcPr>
+                </a:tc>
+                <a:tc>
+                  <a:txBody>
+                    <a:bodyPr/>
+                    <a:lstStyle/>
+                    <a:p>
+                      <a:pPr>
+                        <a:buNone/>
+                      </a:pPr>
+                      <a:r>
+                        <a:rPr lang="pt-BR" b="1"/>
+                        <a:t>Confiabilidade</a:t>
+                      </a:r>
+                    </a:p>
+                  </a:txBody>
+                  <a:tcPr anchor="ctr">
+                    <a:lnL>
+                      <a:noFill/>
+                    </a:lnL>
+                    <a:lnR>
+                      <a:noFill/>
+                    </a:lnR>
+                    <a:lnT>
+                      <a:noFill/>
+                    </a:lnT>
+                    <a:lnB>
+                      <a:noFill/>
+                    </a:lnB>
+                    <a:noFill/>
+                  </a:tcPr>
+                </a:tc>
+                <a:tc>
+                  <a:txBody>
+                    <a:bodyPr/>
+                    <a:lstStyle/>
+                    <a:p>
+                      <a:pPr>
+                        <a:buNone/>
+                      </a:pPr>
+                      <a:r>
+                        <a:rPr lang="pt-BR" b="1" dirty="0"/>
+                        <a:t>Manutenção</a:t>
+                      </a:r>
+                    </a:p>
+                  </a:txBody>
+                  <a:tcPr anchor="ctr">
+                    <a:lnL>
+                      <a:noFill/>
+                    </a:lnL>
+                    <a:lnR>
+                      <a:noFill/>
+                    </a:lnR>
+                    <a:lnT>
+                      <a:noFill/>
+                    </a:lnT>
+                    <a:lnB>
+                      <a:noFill/>
+                    </a:lnB>
+                    <a:noFill/>
+                  </a:tcPr>
+                </a:tc>
+                <a:extLst>
+                  <a:ext uri="{0D108BD9-81ED-4DB2-BD59-A6C34878D82A}">
+                    <a16:rowId xmlns:a16="http://schemas.microsoft.com/office/drawing/2014/main" val="2633630947"/>
+                  </a:ext>
+                </a:extLst>
+              </a:tr>
+              <a:tr h="0">
+                <a:tc>
+                  <a:txBody>
+                    <a:bodyPr/>
+                    <a:lstStyle/>
+                    <a:p>
+                      <a:pPr>
+                        <a:buNone/>
+                      </a:pPr>
+                      <a:r>
+                        <a:rPr lang="pt-BR"/>
+                        <a:t>ChatGPT</a:t>
+                      </a:r>
+                    </a:p>
+                  </a:txBody>
+                  <a:tcPr anchor="ctr">
+                    <a:lnL>
+                      <a:noFill/>
+                    </a:lnL>
+                    <a:lnR>
+                      <a:noFill/>
+                    </a:lnR>
+                    <a:lnT>
+                      <a:noFill/>
+                    </a:lnT>
+                    <a:lnB>
+                      <a:noFill/>
+                    </a:lnB>
+                    <a:noFill/>
+                  </a:tcPr>
+                </a:tc>
+                <a:tc>
+                  <a:txBody>
+                    <a:bodyPr/>
+                    <a:lstStyle/>
+                    <a:p>
+                      <a:pPr>
+                        <a:buNone/>
+                      </a:pPr>
+                      <a:r>
+                        <a:rPr lang="pt-BR"/>
+                        <a:t>02h27</a:t>
+                      </a:r>
+                    </a:p>
+                  </a:txBody>
+                  <a:tcPr anchor="ctr">
+                    <a:lnL>
+                      <a:noFill/>
+                    </a:lnL>
+                    <a:lnR>
+                      <a:noFill/>
+                    </a:lnR>
+                    <a:lnT>
+                      <a:noFill/>
+                    </a:lnT>
+                    <a:lnB>
+                      <a:noFill/>
+                    </a:lnB>
+                    <a:noFill/>
+                  </a:tcPr>
+                </a:tc>
+                <a:tc>
+                  <a:txBody>
+                    <a:bodyPr/>
+                    <a:lstStyle/>
+                    <a:p>
+                      <a:pPr>
+                        <a:buNone/>
+                      </a:pPr>
+                      <a:r>
+                        <a:rPr lang="pt-BR"/>
+                        <a:t>00h30</a:t>
+                      </a:r>
+                    </a:p>
+                  </a:txBody>
+                  <a:tcPr anchor="ctr">
+                    <a:lnL>
+                      <a:noFill/>
+                    </a:lnL>
+                    <a:lnR>
+                      <a:noFill/>
+                    </a:lnR>
+                    <a:lnT>
+                      <a:noFill/>
+                    </a:lnT>
+                    <a:lnB>
+                      <a:noFill/>
+                    </a:lnB>
+                    <a:noFill/>
+                  </a:tcPr>
+                </a:tc>
+                <a:tc>
+                  <a:txBody>
+                    <a:bodyPr/>
+                    <a:lstStyle/>
+                    <a:p>
+                      <a:pPr>
+                        <a:buNone/>
+                      </a:pPr>
+                      <a:r>
+                        <a:rPr lang="pt-BR"/>
+                        <a:t>00h10</a:t>
+                      </a:r>
+                    </a:p>
+                  </a:txBody>
+                  <a:tcPr anchor="ctr">
+                    <a:lnL>
+                      <a:noFill/>
+                    </a:lnL>
+                    <a:lnR>
+                      <a:noFill/>
+                    </a:lnR>
+                    <a:lnT>
+                      <a:noFill/>
+                    </a:lnT>
+                    <a:lnB>
+                      <a:noFill/>
+                    </a:lnB>
+                    <a:noFill/>
+                  </a:tcPr>
+                </a:tc>
+                <a:tc>
+                  <a:txBody>
+                    <a:bodyPr/>
+                    <a:lstStyle/>
+                    <a:p>
+                      <a:pPr>
+                        <a:buNone/>
+                      </a:pPr>
+                      <a:r>
+                        <a:rPr lang="pt-BR"/>
+                        <a:t>01h47</a:t>
+                      </a:r>
+                    </a:p>
+                  </a:txBody>
+                  <a:tcPr anchor="ctr">
+                    <a:lnL>
+                      <a:noFill/>
+                    </a:lnL>
+                    <a:lnR>
+                      <a:noFill/>
+                    </a:lnR>
+                    <a:lnT>
+                      <a:noFill/>
+                    </a:lnT>
+                    <a:lnB>
+                      <a:noFill/>
+                    </a:lnB>
+                    <a:noFill/>
+                  </a:tcPr>
+                </a:tc>
+                <a:extLst>
+                  <a:ext uri="{0D108BD9-81ED-4DB2-BD59-A6C34878D82A}">
+                    <a16:rowId xmlns:a16="http://schemas.microsoft.com/office/drawing/2014/main" val="2237220283"/>
+                  </a:ext>
+                </a:extLst>
+              </a:tr>
+              <a:tr h="0">
+                <a:tc>
+                  <a:txBody>
+                    <a:bodyPr/>
+                    <a:lstStyle/>
+                    <a:p>
+                      <a:pPr>
+                        <a:buNone/>
+                      </a:pPr>
+                      <a:r>
+                        <a:rPr lang="pt-BR"/>
+                        <a:t>Copilot</a:t>
+                      </a:r>
+                    </a:p>
+                  </a:txBody>
+                  <a:tcPr anchor="ctr">
+                    <a:lnL>
+                      <a:noFill/>
+                    </a:lnL>
+                    <a:lnR>
+                      <a:noFill/>
+                    </a:lnR>
+                    <a:lnT>
+                      <a:noFill/>
+                    </a:lnT>
+                    <a:lnB>
+                      <a:noFill/>
+                    </a:lnB>
+                    <a:noFill/>
+                  </a:tcPr>
+                </a:tc>
+                <a:tc>
+                  <a:txBody>
+                    <a:bodyPr/>
+                    <a:lstStyle/>
+                    <a:p>
+                      <a:pPr>
+                        <a:buNone/>
+                      </a:pPr>
+                      <a:r>
+                        <a:rPr lang="pt-BR"/>
+                        <a:t>01h14</a:t>
+                      </a:r>
+                    </a:p>
+                  </a:txBody>
+                  <a:tcPr anchor="ctr">
+                    <a:lnL>
+                      <a:noFill/>
+                    </a:lnL>
+                    <a:lnR>
+                      <a:noFill/>
+                    </a:lnR>
+                    <a:lnT>
+                      <a:noFill/>
+                    </a:lnT>
+                    <a:lnB>
+                      <a:noFill/>
+                    </a:lnB>
+                    <a:noFill/>
+                  </a:tcPr>
+                </a:tc>
+                <a:tc>
+                  <a:txBody>
+                    <a:bodyPr/>
+                    <a:lstStyle/>
+                    <a:p>
+                      <a:pPr>
+                        <a:buNone/>
+                      </a:pPr>
+                      <a:r>
+                        <a:rPr lang="pt-BR"/>
+                        <a:t>00h30</a:t>
+                      </a:r>
+                    </a:p>
+                  </a:txBody>
+                  <a:tcPr anchor="ctr">
+                    <a:lnL>
+                      <a:noFill/>
+                    </a:lnL>
+                    <a:lnR>
+                      <a:noFill/>
+                    </a:lnR>
+                    <a:lnT>
+                      <a:noFill/>
+                    </a:lnT>
+                    <a:lnB>
+                      <a:noFill/>
+                    </a:lnB>
+                    <a:noFill/>
+                  </a:tcPr>
+                </a:tc>
+                <a:tc>
+                  <a:txBody>
+                    <a:bodyPr/>
+                    <a:lstStyle/>
+                    <a:p>
+                      <a:pPr>
+                        <a:buNone/>
+                      </a:pPr>
+                      <a:r>
+                        <a:rPr lang="pt-BR"/>
+                        <a:t>00h00</a:t>
+                      </a:r>
+                    </a:p>
+                  </a:txBody>
+                  <a:tcPr anchor="ctr">
+                    <a:lnL>
+                      <a:noFill/>
+                    </a:lnL>
+                    <a:lnR>
+                      <a:noFill/>
+                    </a:lnR>
+                    <a:lnT>
+                      <a:noFill/>
+                    </a:lnT>
+                    <a:lnB>
+                      <a:noFill/>
+                    </a:lnB>
+                    <a:noFill/>
+                  </a:tcPr>
+                </a:tc>
+                <a:tc>
+                  <a:txBody>
+                    <a:bodyPr/>
+                    <a:lstStyle/>
+                    <a:p>
+                      <a:pPr>
+                        <a:buNone/>
+                      </a:pPr>
+                      <a:r>
+                        <a:rPr lang="pt-BR"/>
+                        <a:t>00h44</a:t>
+                      </a:r>
+                    </a:p>
+                  </a:txBody>
+                  <a:tcPr anchor="ctr">
+                    <a:lnL>
+                      <a:noFill/>
+                    </a:lnL>
+                    <a:lnR>
+                      <a:noFill/>
+                    </a:lnR>
+                    <a:lnT>
+                      <a:noFill/>
+                    </a:lnT>
+                    <a:lnB>
+                      <a:noFill/>
+                    </a:lnB>
+                    <a:noFill/>
+                  </a:tcPr>
+                </a:tc>
+                <a:extLst>
+                  <a:ext uri="{0D108BD9-81ED-4DB2-BD59-A6C34878D82A}">
+                    <a16:rowId xmlns:a16="http://schemas.microsoft.com/office/drawing/2014/main" val="1175662075"/>
+                  </a:ext>
+                </a:extLst>
+              </a:tr>
+              <a:tr h="0">
+                <a:tc>
+                  <a:txBody>
+                    <a:bodyPr/>
+                    <a:lstStyle/>
+                    <a:p>
+                      <a:pPr>
+                        <a:buNone/>
+                      </a:pPr>
+                      <a:r>
+                        <a:rPr lang="pt-BR"/>
+                        <a:t>DeepSeek</a:t>
+                      </a:r>
+                    </a:p>
+                  </a:txBody>
+                  <a:tcPr anchor="ctr">
+                    <a:lnL>
+                      <a:noFill/>
+                    </a:lnL>
+                    <a:lnR>
+                      <a:noFill/>
+                    </a:lnR>
+                    <a:lnT>
+                      <a:noFill/>
+                    </a:lnT>
+                    <a:lnB>
+                      <a:noFill/>
+                    </a:lnB>
+                    <a:noFill/>
+                  </a:tcPr>
+                </a:tc>
+                <a:tc>
+                  <a:txBody>
+                    <a:bodyPr/>
+                    <a:lstStyle/>
+                    <a:p>
+                      <a:pPr>
+                        <a:buNone/>
+                      </a:pPr>
+                      <a:r>
+                        <a:rPr lang="pt-BR"/>
+                        <a:t>04h30</a:t>
+                      </a:r>
+                    </a:p>
+                  </a:txBody>
+                  <a:tcPr anchor="ctr">
+                    <a:lnL>
+                      <a:noFill/>
+                    </a:lnL>
+                    <a:lnR>
+                      <a:noFill/>
+                    </a:lnR>
+                    <a:lnT>
+                      <a:noFill/>
+                    </a:lnT>
+                    <a:lnB>
+                      <a:noFill/>
+                    </a:lnB>
+                    <a:noFill/>
+                  </a:tcPr>
+                </a:tc>
+                <a:tc>
+                  <a:txBody>
+                    <a:bodyPr/>
+                    <a:lstStyle/>
+                    <a:p>
+                      <a:pPr>
+                        <a:buNone/>
+                      </a:pPr>
+                      <a:r>
+                        <a:rPr lang="pt-BR"/>
+                        <a:t>00h30</a:t>
+                      </a:r>
+                    </a:p>
+                  </a:txBody>
+                  <a:tcPr anchor="ctr">
+                    <a:lnL>
+                      <a:noFill/>
+                    </a:lnL>
+                    <a:lnR>
+                      <a:noFill/>
+                    </a:lnR>
+                    <a:lnT>
+                      <a:noFill/>
+                    </a:lnT>
+                    <a:lnB>
+                      <a:noFill/>
+                    </a:lnB>
+                    <a:noFill/>
+                  </a:tcPr>
+                </a:tc>
+                <a:tc>
+                  <a:txBody>
+                    <a:bodyPr/>
+                    <a:lstStyle/>
+                    <a:p>
+                      <a:pPr>
+                        <a:buNone/>
+                      </a:pPr>
+                      <a:r>
+                        <a:rPr lang="pt-BR"/>
+                        <a:t>00h00</a:t>
+                      </a:r>
+                    </a:p>
+                  </a:txBody>
+                  <a:tcPr anchor="ctr">
+                    <a:lnL>
+                      <a:noFill/>
+                    </a:lnL>
+                    <a:lnR>
+                      <a:noFill/>
+                    </a:lnR>
+                    <a:lnT>
+                      <a:noFill/>
+                    </a:lnT>
+                    <a:lnB>
+                      <a:noFill/>
+                    </a:lnB>
+                    <a:noFill/>
+                  </a:tcPr>
+                </a:tc>
+                <a:tc>
+                  <a:txBody>
+                    <a:bodyPr/>
+                    <a:lstStyle/>
+                    <a:p>
+                      <a:pPr>
+                        <a:buNone/>
+                      </a:pPr>
+                      <a:r>
+                        <a:rPr lang="pt-BR"/>
+                        <a:t>04h00</a:t>
+                      </a:r>
+                    </a:p>
+                  </a:txBody>
+                  <a:tcPr anchor="ctr">
+                    <a:lnL>
+                      <a:noFill/>
+                    </a:lnL>
+                    <a:lnR>
+                      <a:noFill/>
+                    </a:lnR>
+                    <a:lnT>
+                      <a:noFill/>
+                    </a:lnT>
+                    <a:lnB>
+                      <a:noFill/>
+                    </a:lnB>
+                    <a:noFill/>
+                  </a:tcPr>
+                </a:tc>
+                <a:extLst>
+                  <a:ext uri="{0D108BD9-81ED-4DB2-BD59-A6C34878D82A}">
+                    <a16:rowId xmlns:a16="http://schemas.microsoft.com/office/drawing/2014/main" val="635531852"/>
+                  </a:ext>
+                </a:extLst>
+              </a:tr>
+              <a:tr h="0">
+                <a:tc>
+                  <a:txBody>
+                    <a:bodyPr/>
+                    <a:lstStyle/>
+                    <a:p>
+                      <a:pPr>
+                        <a:buNone/>
+                      </a:pPr>
+                      <a:r>
+                        <a:rPr lang="pt-BR"/>
+                        <a:t>Gemini</a:t>
+                      </a:r>
+                    </a:p>
+                  </a:txBody>
+                  <a:tcPr anchor="ctr">
+                    <a:lnL>
+                      <a:noFill/>
+                    </a:lnL>
+                    <a:lnR>
+                      <a:noFill/>
+                    </a:lnR>
+                    <a:lnT>
+                      <a:noFill/>
+                    </a:lnT>
+                    <a:lnB>
+                      <a:noFill/>
+                    </a:lnB>
+                    <a:noFill/>
+                  </a:tcPr>
+                </a:tc>
+                <a:tc>
+                  <a:txBody>
+                    <a:bodyPr/>
+                    <a:lstStyle/>
+                    <a:p>
+                      <a:pPr>
+                        <a:buNone/>
+                      </a:pPr>
+                      <a:r>
+                        <a:rPr lang="pt-BR"/>
+                        <a:t>03h45</a:t>
+                      </a:r>
+                    </a:p>
+                  </a:txBody>
+                  <a:tcPr anchor="ctr">
+                    <a:lnL>
+                      <a:noFill/>
+                    </a:lnL>
+                    <a:lnR>
+                      <a:noFill/>
+                    </a:lnR>
+                    <a:lnT>
+                      <a:noFill/>
+                    </a:lnT>
+                    <a:lnB>
+                      <a:noFill/>
+                    </a:lnB>
+                    <a:noFill/>
+                  </a:tcPr>
+                </a:tc>
+                <a:tc>
+                  <a:txBody>
+                    <a:bodyPr/>
+                    <a:lstStyle/>
+                    <a:p>
+                      <a:pPr>
+                        <a:buNone/>
+                      </a:pPr>
+                      <a:r>
+                        <a:rPr lang="pt-BR"/>
+                        <a:t>01h00</a:t>
+                      </a:r>
+                    </a:p>
+                  </a:txBody>
+                  <a:tcPr anchor="ctr">
+                    <a:lnL>
+                      <a:noFill/>
+                    </a:lnL>
+                    <a:lnR>
+                      <a:noFill/>
+                    </a:lnR>
+                    <a:lnT>
+                      <a:noFill/>
+                    </a:lnT>
+                    <a:lnB>
+                      <a:noFill/>
+                    </a:lnB>
+                    <a:noFill/>
+                  </a:tcPr>
+                </a:tc>
+                <a:tc>
+                  <a:txBody>
+                    <a:bodyPr/>
+                    <a:lstStyle/>
+                    <a:p>
+                      <a:pPr>
+                        <a:buNone/>
+                      </a:pPr>
+                      <a:r>
+                        <a:rPr lang="pt-BR"/>
+                        <a:t>00h00</a:t>
+                      </a:r>
+                    </a:p>
+                  </a:txBody>
+                  <a:tcPr anchor="ctr">
+                    <a:lnL>
+                      <a:noFill/>
+                    </a:lnL>
+                    <a:lnR>
+                      <a:noFill/>
+                    </a:lnR>
+                    <a:lnT>
+                      <a:noFill/>
+                    </a:lnT>
+                    <a:lnB>
+                      <a:noFill/>
+                    </a:lnB>
+                    <a:noFill/>
+                  </a:tcPr>
+                </a:tc>
+                <a:tc>
+                  <a:txBody>
+                    <a:bodyPr/>
+                    <a:lstStyle/>
+                    <a:p>
+                      <a:pPr>
+                        <a:buNone/>
+                      </a:pPr>
+                      <a:r>
+                        <a:rPr lang="pt-BR"/>
+                        <a:t>02h45</a:t>
+                      </a:r>
+                    </a:p>
+                  </a:txBody>
+                  <a:tcPr anchor="ctr">
+                    <a:lnL>
+                      <a:noFill/>
+                    </a:lnL>
+                    <a:lnR>
+                      <a:noFill/>
+                    </a:lnR>
+                    <a:lnT>
+                      <a:noFill/>
+                    </a:lnT>
+                    <a:lnB>
+                      <a:noFill/>
+                    </a:lnB>
+                    <a:noFill/>
+                  </a:tcPr>
+                </a:tc>
+                <a:extLst>
+                  <a:ext uri="{0D108BD9-81ED-4DB2-BD59-A6C34878D82A}">
+                    <a16:rowId xmlns:a16="http://schemas.microsoft.com/office/drawing/2014/main" val="2156528909"/>
+                  </a:ext>
+                </a:extLst>
+              </a:tr>
+              <a:tr h="0">
+                <a:tc>
+                  <a:txBody>
+                    <a:bodyPr/>
+                    <a:lstStyle/>
+                    <a:p>
+                      <a:pPr>
+                        <a:buNone/>
+                      </a:pPr>
+                      <a:r>
+                        <a:rPr lang="pt-BR"/>
+                        <a:t>MetaAI</a:t>
+                      </a:r>
+                    </a:p>
+                  </a:txBody>
+                  <a:tcPr anchor="ctr">
+                    <a:lnL>
+                      <a:noFill/>
+                    </a:lnL>
+                    <a:lnR>
+                      <a:noFill/>
+                    </a:lnR>
+                    <a:lnT>
+                      <a:noFill/>
+                    </a:lnT>
+                    <a:lnB>
+                      <a:noFill/>
+                    </a:lnB>
+                    <a:noFill/>
+                  </a:tcPr>
+                </a:tc>
+                <a:tc>
+                  <a:txBody>
+                    <a:bodyPr/>
+                    <a:lstStyle/>
+                    <a:p>
+                      <a:pPr>
+                        <a:buNone/>
+                      </a:pPr>
+                      <a:r>
+                        <a:rPr lang="pt-BR"/>
+                        <a:t>02h07</a:t>
+                      </a:r>
+                    </a:p>
+                  </a:txBody>
+                  <a:tcPr anchor="ctr">
+                    <a:lnL>
+                      <a:noFill/>
+                    </a:lnL>
+                    <a:lnR>
+                      <a:noFill/>
+                    </a:lnR>
+                    <a:lnT>
+                      <a:noFill/>
+                    </a:lnT>
+                    <a:lnB>
+                      <a:noFill/>
+                    </a:lnB>
+                    <a:noFill/>
+                  </a:tcPr>
+                </a:tc>
+                <a:tc>
+                  <a:txBody>
+                    <a:bodyPr/>
+                    <a:lstStyle/>
+                    <a:p>
+                      <a:pPr>
+                        <a:buNone/>
+                      </a:pPr>
+                      <a:r>
+                        <a:rPr lang="pt-BR"/>
+                        <a:t>01h00</a:t>
+                      </a:r>
+                    </a:p>
+                  </a:txBody>
+                  <a:tcPr anchor="ctr">
+                    <a:lnL>
+                      <a:noFill/>
+                    </a:lnL>
+                    <a:lnR>
+                      <a:noFill/>
+                    </a:lnR>
+                    <a:lnT>
+                      <a:noFill/>
+                    </a:lnT>
+                    <a:lnB>
+                      <a:noFill/>
+                    </a:lnB>
+                    <a:noFill/>
+                  </a:tcPr>
+                </a:tc>
+                <a:tc>
+                  <a:txBody>
+                    <a:bodyPr/>
+                    <a:lstStyle/>
+                    <a:p>
+                      <a:pPr>
+                        <a:buNone/>
+                      </a:pPr>
+                      <a:r>
+                        <a:rPr lang="pt-BR"/>
+                        <a:t>00h00</a:t>
+                      </a:r>
+                    </a:p>
+                  </a:txBody>
+                  <a:tcPr anchor="ctr">
+                    <a:lnL>
+                      <a:noFill/>
+                    </a:lnL>
+                    <a:lnR>
+                      <a:noFill/>
+                    </a:lnR>
+                    <a:lnT>
+                      <a:noFill/>
+                    </a:lnT>
+                    <a:lnB>
+                      <a:noFill/>
+                    </a:lnB>
+                    <a:noFill/>
+                  </a:tcPr>
+                </a:tc>
+                <a:tc>
+                  <a:txBody>
+                    <a:bodyPr/>
+                    <a:lstStyle/>
+                    <a:p>
+                      <a:pPr>
+                        <a:buNone/>
+                      </a:pPr>
+                      <a:r>
+                        <a:rPr lang="pt-BR" dirty="0"/>
+                        <a:t>01h07</a:t>
+                      </a:r>
+                    </a:p>
+                  </a:txBody>
+                  <a:tcPr anchor="ctr">
+                    <a:lnL>
+                      <a:noFill/>
+                    </a:lnL>
+                    <a:lnR>
+                      <a:noFill/>
+                    </a:lnR>
+                    <a:lnT>
+                      <a:noFill/>
+                    </a:lnT>
+                    <a:lnB>
+                      <a:noFill/>
+                    </a:lnB>
+                    <a:noFill/>
+                  </a:tcPr>
+                </a:tc>
+                <a:extLst>
+                  <a:ext uri="{0D108BD9-81ED-4DB2-BD59-A6C34878D82A}">
+                    <a16:rowId xmlns:a16="http://schemas.microsoft.com/office/drawing/2014/main" val="2188846798"/>
+                  </a:ext>
+                </a:extLst>
+              </a:tr>
+            </a:tbl>
+          </a:graphicData>
+        </a:graphic>
+      </p:graphicFrame>
+    </p:spTree>
+    <p:extLst>
+      <p:ext uri="{BB962C8B-B14F-4D97-AF65-F5344CB8AC3E}">
+        <p14:creationId xmlns:p14="http://schemas.microsoft.com/office/powerpoint/2010/main" val="3348309468"/>
+      </p:ext>
+    </p:extLst>
+  </p:cSld>
+  <p:clrMapOvr>
+    <a:masterClrMapping/>
+  </p:clrMapOvr>
+</p:sld>
+</file>
+
+<file path=ppt/slides/slide13.xml><?xml version="1.0" encoding="utf-8"?>
+<p:sld xmlns:a="http://schemas.openxmlformats.org/drawingml/2006/main" xmlns:r="http://schemas.openxmlformats.org/officeDocument/2006/relationships" xmlns:p="http://schemas.openxmlformats.org/presentationml/2006/main">
+  <p:cSld>
+    <p:spTree>
+      <p:nvGrpSpPr>
+        <p:cNvPr id="1" name="">
+          <a:extLst>
+            <a:ext uri="{FF2B5EF4-FFF2-40B4-BE49-F238E27FC236}">
               <a16:creationId xmlns:a16="http://schemas.microsoft.com/office/drawing/2014/main" id="{9F77F07D-62AD-F8DF-F0E1-5DE5E5B52819}"/>
             </a:ext>
           </a:extLst>
@@ -8905,7 +12730,7 @@
 </p:sld>
 </file>
 
-<file path=ppt/slides/slide11.xml><?xml version="1.0" encoding="utf-8"?>
+<file path=ppt/slides/slide14.xml><?xml version="1.0" encoding="utf-8"?>
 <p:sld xmlns:a="http://schemas.openxmlformats.org/drawingml/2006/main" xmlns:r="http://schemas.openxmlformats.org/officeDocument/2006/relationships" xmlns:p="http://schemas.openxmlformats.org/presentationml/2006/main">
   <p:cSld>
     <p:spTree>
@@ -9802,7 +13627,7 @@
 </p:sld>
 </file>
 
-<file path=ppt/slides/slide12.xml><?xml version="1.0" encoding="utf-8"?>
+<file path=ppt/slides/slide15.xml><?xml version="1.0" encoding="utf-8"?>
 <p:sld xmlns:a="http://schemas.openxmlformats.org/drawingml/2006/main" xmlns:r="http://schemas.openxmlformats.org/officeDocument/2006/relationships" xmlns:p="http://schemas.openxmlformats.org/presentationml/2006/main">
   <p:cSld>
     <p:spTree>
@@ -10252,7 +14077,7 @@
 </p:sld>
 </file>
 
-<file path=ppt/slides/slide13.xml><?xml version="1.0" encoding="utf-8"?>
+<file path=ppt/slides/slide16.xml><?xml version="1.0" encoding="utf-8"?>
 <p:sld xmlns:a="http://schemas.openxmlformats.org/drawingml/2006/main" xmlns:r="http://schemas.openxmlformats.org/officeDocument/2006/relationships" xmlns:p="http://schemas.openxmlformats.org/presentationml/2006/main">
   <p:cSld>
     <p:spTree>
@@ -10583,7 +14408,7 @@
 </p:sld>
 </file>
 
-<file path=ppt/slides/slide14.xml><?xml version="1.0" encoding="utf-8"?>
+<file path=ppt/slides/slide17.xml><?xml version="1.0" encoding="utf-8"?>
 <p:sld xmlns:a="http://schemas.openxmlformats.org/drawingml/2006/main" xmlns:r="http://schemas.openxmlformats.org/officeDocument/2006/relationships" xmlns:p="http://schemas.openxmlformats.org/presentationml/2006/main">
   <p:cSld>
     <p:spTree>
@@ -13001,7 +16826,7 @@
         <p:cNvPr id="1" name="">
           <a:extLst>
             <a:ext uri="{FF2B5EF4-FFF2-40B4-BE49-F238E27FC236}">
-              <a16:creationId xmlns:a16="http://schemas.microsoft.com/office/drawing/2014/main" id="{07DE3702-BB21-12E5-0847-452876648B2E}"/>
+              <a16:creationId xmlns:a16="http://schemas.microsoft.com/office/drawing/2014/main" id="{99FBA4E8-30D6-B450-771B-BF7869804951}"/>
             </a:ext>
           </a:extLst>
         </p:cNvPr>
@@ -13018,10 +16843,10 @@
       </p:grpSpPr>
       <p:sp>
         <p:nvSpPr>
-          <p:cNvPr id="2" name="Title 1">
+          <p:cNvPr id="4" name="Title 1">
             <a:extLst>
               <a:ext uri="{FF2B5EF4-FFF2-40B4-BE49-F238E27FC236}">
-                <a16:creationId xmlns:a16="http://schemas.microsoft.com/office/drawing/2014/main" id="{A7DBAE16-D19D-4ED6-FB6C-D053736E9674}"/>
+                <a16:creationId xmlns:a16="http://schemas.microsoft.com/office/drawing/2014/main" id="{6BE61435-C620-01AC-A962-7E5DAC3B99BD}"/>
               </a:ext>
             </a:extLst>
           </p:cNvPr>
@@ -13061,8 +16886,12 @@
           </a:lstStyle>
           <a:p>
             <a:r>
-              <a:rPr lang="pt-BR" b="1" dirty="0"/>
-              <a:t>Resultados – Segurança e Qualidade</a:t>
+              <a:rPr b="1" dirty="0"/>
+              <a:t>Material e </a:t>
+            </a:r>
+            <a:r>
+              <a:rPr b="1" dirty="0" err="1"/>
+              <a:t>Métodos</a:t>
             </a:r>
             <a:endParaRPr b="1" dirty="0"/>
           </a:p>
@@ -13073,7 +16902,7 @@
           <p:cNvPr id="3" name="Content Placeholder 2">
             <a:extLst>
               <a:ext uri="{FF2B5EF4-FFF2-40B4-BE49-F238E27FC236}">
-                <a16:creationId xmlns:a16="http://schemas.microsoft.com/office/drawing/2014/main" id="{9E7FAB4B-7B26-D723-0B33-BB65BFFAAEBD}"/>
+                <a16:creationId xmlns:a16="http://schemas.microsoft.com/office/drawing/2014/main" id="{5C9E91D4-E59B-CACE-2C0F-76A20F5E5223}"/>
               </a:ext>
             </a:extLst>
           </p:cNvPr>
@@ -13084,8 +16913,8 @@
         </p:nvSpPr>
         <p:spPr>
           <a:xfrm>
-            <a:off x="1981200" y="1828799"/>
-            <a:ext cx="8229600" cy="4525963"/>
+            <a:off x="704851" y="1828799"/>
+            <a:ext cx="10772774" cy="4525963"/>
           </a:xfrm>
           <a:prstGeom prst="rect">
             <a:avLst/>
@@ -13093,7 +16922,7 @@
         </p:spPr>
         <p:txBody>
           <a:bodyPr vert="horz" lIns="91440" tIns="45720" rIns="91440" bIns="45720" rtlCol="0">
-            <a:normAutofit/>
+            <a:normAutofit fontScale="92500" lnSpcReduction="20000"/>
           </a:bodyPr>
           <a:lstStyle>
             <a:lvl1pPr marL="342900" indent="-342900" algn="l" defTabSz="457200" rtl="0" eaLnBrk="1" latinLnBrk="0" hangingPunct="1">
@@ -13236,847 +17065,127 @@
             <a:pPr marL="0" indent="0">
               <a:buNone/>
             </a:pPr>
-            <a:endParaRPr dirty="0"/>
+            <a:r>
+              <a:rPr lang="pt-BR" dirty="0"/>
+              <a:t>Cada modelo de IA (ChatGPT, </a:t>
+            </a:r>
+            <a:r>
+              <a:rPr lang="pt-BR" dirty="0" err="1"/>
+              <a:t>Copilot</a:t>
+            </a:r>
+            <a:r>
+              <a:rPr lang="pt-BR" dirty="0"/>
+              <a:t>, </a:t>
+            </a:r>
+            <a:r>
+              <a:rPr lang="pt-BR" dirty="0" err="1"/>
+              <a:t>DeepSeek</a:t>
+            </a:r>
+            <a:r>
+              <a:rPr lang="pt-BR" dirty="0"/>
+              <a:t>, Gemini e Meta AI) recebeu os mesmos prompts para gerar o </a:t>
+            </a:r>
+            <a:r>
+              <a:rPr lang="pt-BR" dirty="0" err="1"/>
+              <a:t>backend</a:t>
+            </a:r>
+            <a:r>
+              <a:rPr lang="pt-BR" dirty="0"/>
+              <a:t> de uma API voltada à simulação de investimentos, utilizando:</a:t>
+            </a:r>
+          </a:p>
+          <a:p>
+            <a:pPr marL="0" indent="0">
+              <a:buNone/>
+            </a:pPr>
+            <a:r>
+              <a:rPr lang="pt-BR" dirty="0"/>
+              <a:t>Principais funcionalidades pedidas:</a:t>
+            </a:r>
+          </a:p>
+          <a:p>
+            <a:pPr marL="0" indent="0">
+              <a:buNone/>
+            </a:pPr>
+            <a:r>
+              <a:rPr lang="pt-BR" dirty="0"/>
+              <a:t>• Importar dados de planilhas Excel e preencher tabelas no banco</a:t>
+            </a:r>
+          </a:p>
+          <a:p>
+            <a:pPr marL="0" indent="0">
+              <a:buNone/>
+            </a:pPr>
+            <a:r>
+              <a:rPr lang="pt-BR" dirty="0"/>
+              <a:t>• Consumir dados de APIs externas (Banco Central e Yahoo </a:t>
+            </a:r>
+            <a:r>
+              <a:rPr lang="pt-BR" dirty="0" err="1"/>
+              <a:t>Finance</a:t>
+            </a:r>
+            <a:r>
+              <a:rPr lang="pt-BR" dirty="0"/>
+              <a:t>)</a:t>
+            </a:r>
+          </a:p>
+          <a:p>
+            <a:pPr marL="0" indent="0">
+              <a:buNone/>
+            </a:pPr>
+            <a:r>
+              <a:rPr lang="pt-BR" dirty="0"/>
+              <a:t>• Calcular indicadores financeiros (Beta, Sharpe, Volatilidade, Percentil)</a:t>
+            </a:r>
+          </a:p>
+          <a:p>
+            <a:pPr marL="0" indent="0">
+              <a:buNone/>
+            </a:pPr>
+            <a:r>
+              <a:rPr lang="pt-BR" dirty="0"/>
+              <a:t>• Implementar Design </a:t>
+            </a:r>
+            <a:r>
+              <a:rPr lang="pt-BR" dirty="0" err="1"/>
+              <a:t>Pattern</a:t>
+            </a:r>
+            <a:r>
+              <a:rPr lang="pt-BR" dirty="0"/>
+              <a:t> (</a:t>
+            </a:r>
+            <a:r>
+              <a:rPr lang="pt-BR" dirty="0" err="1"/>
+              <a:t>Adapter</a:t>
+            </a:r>
+            <a:r>
+              <a:rPr lang="pt-BR" dirty="0"/>
+              <a:t>)</a:t>
+            </a:r>
+          </a:p>
+          <a:p>
+            <a:pPr marL="0" indent="0">
+              <a:buNone/>
+            </a:pPr>
+            <a:r>
+              <a:rPr lang="pt-BR" dirty="0"/>
+              <a:t>• Avaliar qualidade do código via </a:t>
+            </a:r>
+            <a:r>
+              <a:rPr lang="pt-BR" dirty="0" err="1"/>
+              <a:t>SonarQube</a:t>
+            </a:r>
+            <a:endParaRPr lang="pt-BR" dirty="0"/>
+          </a:p>
+          <a:p>
+            <a:endParaRPr lang="pt-BR" dirty="0"/>
           </a:p>
         </p:txBody>
       </p:sp>
-      <p:graphicFrame>
-        <p:nvGraphicFramePr>
-          <p:cNvPr id="4" name="Tabela 3">
-            <a:extLst>
-              <a:ext uri="{FF2B5EF4-FFF2-40B4-BE49-F238E27FC236}">
-                <a16:creationId xmlns:a16="http://schemas.microsoft.com/office/drawing/2014/main" id="{AC4F29D3-E81E-1C48-B289-802DE2801C65}"/>
-              </a:ext>
-            </a:extLst>
-          </p:cNvPr>
-          <p:cNvGraphicFramePr>
-            <a:graphicFrameLocks noGrp="1"/>
-          </p:cNvGraphicFramePr>
-          <p:nvPr>
-            <p:extLst>
-              <p:ext uri="{D42A27DB-BD31-4B8C-83A1-F6EECF244321}">
-                <p14:modId xmlns:p14="http://schemas.microsoft.com/office/powerpoint/2010/main" val="1338407591"/>
-              </p:ext>
-            </p:extLst>
-          </p:nvPr>
-        </p:nvGraphicFramePr>
-        <p:xfrm>
-          <a:off x="838200" y="2331720"/>
-          <a:ext cx="10515600" cy="2194560"/>
-        </p:xfrm>
-        <a:graphic>
-          <a:graphicData uri="http://schemas.openxmlformats.org/drawingml/2006/table">
-            <a:tbl>
-              <a:tblPr/>
-              <a:tblGrid>
-                <a:gridCol w="2628900">
-                  <a:extLst>
-                    <a:ext uri="{9D8B030D-6E8A-4147-A177-3AD203B41FA5}">
-                      <a16:colId xmlns:a16="http://schemas.microsoft.com/office/drawing/2014/main" val="3757933997"/>
-                    </a:ext>
-                  </a:extLst>
-                </a:gridCol>
-                <a:gridCol w="2628900">
-                  <a:extLst>
-                    <a:ext uri="{9D8B030D-6E8A-4147-A177-3AD203B41FA5}">
-                      <a16:colId xmlns:a16="http://schemas.microsoft.com/office/drawing/2014/main" val="3017764929"/>
-                    </a:ext>
-                  </a:extLst>
-                </a:gridCol>
-                <a:gridCol w="2628900">
-                  <a:extLst>
-                    <a:ext uri="{9D8B030D-6E8A-4147-A177-3AD203B41FA5}">
-                      <a16:colId xmlns:a16="http://schemas.microsoft.com/office/drawing/2014/main" val="2793146401"/>
-                    </a:ext>
-                  </a:extLst>
-                </a:gridCol>
-                <a:gridCol w="2628900">
-                  <a:extLst>
-                    <a:ext uri="{9D8B030D-6E8A-4147-A177-3AD203B41FA5}">
-                      <a16:colId xmlns:a16="http://schemas.microsoft.com/office/drawing/2014/main" val="3737517290"/>
-                    </a:ext>
-                  </a:extLst>
-                </a:gridCol>
-              </a:tblGrid>
-              <a:tr h="0">
-                <a:tc>
-                  <a:txBody>
-                    <a:bodyPr/>
-                    <a:lstStyle/>
-                    <a:p>
-                      <a:pPr>
-                        <a:buNone/>
-                      </a:pPr>
-                      <a:r>
-                        <a:rPr lang="pt-BR" b="1"/>
-                        <a:t>IA</a:t>
-                      </a:r>
-                    </a:p>
-                  </a:txBody>
-                  <a:tcPr anchor="ctr">
-                    <a:lnL>
-                      <a:noFill/>
-                    </a:lnL>
-                    <a:lnR>
-                      <a:noFill/>
-                    </a:lnR>
-                    <a:lnT>
-                      <a:noFill/>
-                    </a:lnT>
-                    <a:lnB>
-                      <a:noFill/>
-                    </a:lnB>
-                    <a:noFill/>
-                  </a:tcPr>
-                </a:tc>
-                <a:tc>
-                  <a:txBody>
-                    <a:bodyPr/>
-                    <a:lstStyle/>
-                    <a:p>
-                      <a:pPr>
-                        <a:buNone/>
-                      </a:pPr>
-                      <a:r>
-                        <a:rPr lang="pt-BR" b="1"/>
-                        <a:t>Vulnerabilidades</a:t>
-                      </a:r>
-                    </a:p>
-                  </a:txBody>
-                  <a:tcPr anchor="ctr">
-                    <a:lnL>
-                      <a:noFill/>
-                    </a:lnL>
-                    <a:lnR>
-                      <a:noFill/>
-                    </a:lnR>
-                    <a:lnT>
-                      <a:noFill/>
-                    </a:lnT>
-                    <a:lnB>
-                      <a:noFill/>
-                    </a:lnB>
-                    <a:noFill/>
-                  </a:tcPr>
-                </a:tc>
-                <a:tc>
-                  <a:txBody>
-                    <a:bodyPr/>
-                    <a:lstStyle/>
-                    <a:p>
-                      <a:pPr>
-                        <a:buNone/>
-                      </a:pPr>
-                      <a:r>
-                        <a:rPr lang="pt-BR" b="1"/>
-                        <a:t>Bugs</a:t>
-                      </a:r>
-                    </a:p>
-                  </a:txBody>
-                  <a:tcPr anchor="ctr">
-                    <a:lnL>
-                      <a:noFill/>
-                    </a:lnL>
-                    <a:lnR>
-                      <a:noFill/>
-                    </a:lnR>
-                    <a:lnT>
-                      <a:noFill/>
-                    </a:lnT>
-                    <a:lnB>
-                      <a:noFill/>
-                    </a:lnB>
-                    <a:noFill/>
-                  </a:tcPr>
-                </a:tc>
-                <a:tc>
-                  <a:txBody>
-                    <a:bodyPr/>
-                    <a:lstStyle/>
-                    <a:p>
-                      <a:pPr>
-                        <a:buNone/>
-                      </a:pPr>
-                      <a:r>
-                        <a:rPr lang="pt-BR" b="1" dirty="0" err="1"/>
-                        <a:t>Code</a:t>
-                      </a:r>
-                      <a:r>
-                        <a:rPr lang="pt-BR" b="1" dirty="0"/>
-                        <a:t> </a:t>
-                      </a:r>
-                      <a:r>
-                        <a:rPr lang="pt-BR" b="1" dirty="0" err="1"/>
-                        <a:t>Smells</a:t>
-                      </a:r>
-                      <a:endParaRPr lang="pt-BR" b="1" dirty="0"/>
-                    </a:p>
-                  </a:txBody>
-                  <a:tcPr anchor="ctr">
-                    <a:lnL>
-                      <a:noFill/>
-                    </a:lnL>
-                    <a:lnR>
-                      <a:noFill/>
-                    </a:lnR>
-                    <a:lnT>
-                      <a:noFill/>
-                    </a:lnT>
-                    <a:lnB>
-                      <a:noFill/>
-                    </a:lnB>
-                    <a:noFill/>
-                  </a:tcPr>
-                </a:tc>
-                <a:extLst>
-                  <a:ext uri="{0D108BD9-81ED-4DB2-BD59-A6C34878D82A}">
-                    <a16:rowId xmlns:a16="http://schemas.microsoft.com/office/drawing/2014/main" val="2142904473"/>
-                  </a:ext>
-                </a:extLst>
-              </a:tr>
-              <a:tr h="0">
-                <a:tc>
-                  <a:txBody>
-                    <a:bodyPr/>
-                    <a:lstStyle/>
-                    <a:p>
-                      <a:pPr>
-                        <a:buNone/>
-                      </a:pPr>
-                      <a:r>
-                        <a:rPr lang="pt-BR"/>
-                        <a:t>ChatGPT</a:t>
-                      </a:r>
-                    </a:p>
-                  </a:txBody>
-                  <a:tcPr anchor="ctr">
-                    <a:lnL>
-                      <a:noFill/>
-                    </a:lnL>
-                    <a:lnR>
-                      <a:noFill/>
-                    </a:lnR>
-                    <a:lnT>
-                      <a:noFill/>
-                    </a:lnT>
-                    <a:lnB>
-                      <a:noFill/>
-                    </a:lnB>
-                    <a:noFill/>
-                  </a:tcPr>
-                </a:tc>
-                <a:tc>
-                  <a:txBody>
-                    <a:bodyPr/>
-                    <a:lstStyle/>
-                    <a:p>
-                      <a:pPr>
-                        <a:buNone/>
-                      </a:pPr>
-                      <a:r>
-                        <a:rPr lang="pt-BR"/>
-                        <a:t>1</a:t>
-                      </a:r>
-                    </a:p>
-                  </a:txBody>
-                  <a:tcPr anchor="ctr">
-                    <a:lnL>
-                      <a:noFill/>
-                    </a:lnL>
-                    <a:lnR>
-                      <a:noFill/>
-                    </a:lnR>
-                    <a:lnT>
-                      <a:noFill/>
-                    </a:lnT>
-                    <a:lnB>
-                      <a:noFill/>
-                    </a:lnB>
-                    <a:noFill/>
-                  </a:tcPr>
-                </a:tc>
-                <a:tc>
-                  <a:txBody>
-                    <a:bodyPr/>
-                    <a:lstStyle/>
-                    <a:p>
-                      <a:pPr>
-                        <a:buNone/>
-                      </a:pPr>
-                      <a:r>
-                        <a:rPr lang="pt-BR"/>
-                        <a:t>1</a:t>
-                      </a:r>
-                    </a:p>
-                  </a:txBody>
-                  <a:tcPr anchor="ctr">
-                    <a:lnL>
-                      <a:noFill/>
-                    </a:lnL>
-                    <a:lnR>
-                      <a:noFill/>
-                    </a:lnR>
-                    <a:lnT>
-                      <a:noFill/>
-                    </a:lnT>
-                    <a:lnB>
-                      <a:noFill/>
-                    </a:lnB>
-                    <a:noFill/>
-                  </a:tcPr>
-                </a:tc>
-                <a:tc>
-                  <a:txBody>
-                    <a:bodyPr/>
-                    <a:lstStyle/>
-                    <a:p>
-                      <a:pPr>
-                        <a:buNone/>
-                      </a:pPr>
-                      <a:r>
-                        <a:rPr lang="pt-BR"/>
-                        <a:t>20</a:t>
-                      </a:r>
-                    </a:p>
-                  </a:txBody>
-                  <a:tcPr anchor="ctr">
-                    <a:lnL>
-                      <a:noFill/>
-                    </a:lnL>
-                    <a:lnR>
-                      <a:noFill/>
-                    </a:lnR>
-                    <a:lnT>
-                      <a:noFill/>
-                    </a:lnT>
-                    <a:lnB>
-                      <a:noFill/>
-                    </a:lnB>
-                    <a:noFill/>
-                  </a:tcPr>
-                </a:tc>
-                <a:extLst>
-                  <a:ext uri="{0D108BD9-81ED-4DB2-BD59-A6C34878D82A}">
-                    <a16:rowId xmlns:a16="http://schemas.microsoft.com/office/drawing/2014/main" val="2265335899"/>
-                  </a:ext>
-                </a:extLst>
-              </a:tr>
-              <a:tr h="0">
-                <a:tc>
-                  <a:txBody>
-                    <a:bodyPr/>
-                    <a:lstStyle/>
-                    <a:p>
-                      <a:pPr>
-                        <a:buNone/>
-                      </a:pPr>
-                      <a:r>
-                        <a:rPr lang="pt-BR"/>
-                        <a:t>Copilot</a:t>
-                      </a:r>
-                    </a:p>
-                  </a:txBody>
-                  <a:tcPr anchor="ctr">
-                    <a:lnL>
-                      <a:noFill/>
-                    </a:lnL>
-                    <a:lnR>
-                      <a:noFill/>
-                    </a:lnR>
-                    <a:lnT>
-                      <a:noFill/>
-                    </a:lnT>
-                    <a:lnB>
-                      <a:noFill/>
-                    </a:lnB>
-                    <a:noFill/>
-                  </a:tcPr>
-                </a:tc>
-                <a:tc>
-                  <a:txBody>
-                    <a:bodyPr/>
-                    <a:lstStyle/>
-                    <a:p>
-                      <a:pPr>
-                        <a:buNone/>
-                      </a:pPr>
-                      <a:r>
-                        <a:rPr lang="pt-BR"/>
-                        <a:t>1</a:t>
-                      </a:r>
-                    </a:p>
-                  </a:txBody>
-                  <a:tcPr anchor="ctr">
-                    <a:lnL>
-                      <a:noFill/>
-                    </a:lnL>
-                    <a:lnR>
-                      <a:noFill/>
-                    </a:lnR>
-                    <a:lnT>
-                      <a:noFill/>
-                    </a:lnT>
-                    <a:lnB>
-                      <a:noFill/>
-                    </a:lnB>
-                    <a:noFill/>
-                  </a:tcPr>
-                </a:tc>
-                <a:tc>
-                  <a:txBody>
-                    <a:bodyPr/>
-                    <a:lstStyle/>
-                    <a:p>
-                      <a:pPr>
-                        <a:buNone/>
-                      </a:pPr>
-                      <a:r>
-                        <a:rPr lang="pt-BR"/>
-                        <a:t>0</a:t>
-                      </a:r>
-                    </a:p>
-                  </a:txBody>
-                  <a:tcPr anchor="ctr">
-                    <a:lnL>
-                      <a:noFill/>
-                    </a:lnL>
-                    <a:lnR>
-                      <a:noFill/>
-                    </a:lnR>
-                    <a:lnT>
-                      <a:noFill/>
-                    </a:lnT>
-                    <a:lnB>
-                      <a:noFill/>
-                    </a:lnB>
-                    <a:noFill/>
-                  </a:tcPr>
-                </a:tc>
-                <a:tc>
-                  <a:txBody>
-                    <a:bodyPr/>
-                    <a:lstStyle/>
-                    <a:p>
-                      <a:pPr>
-                        <a:buNone/>
-                      </a:pPr>
-                      <a:r>
-                        <a:rPr lang="pt-BR"/>
-                        <a:t>8</a:t>
-                      </a:r>
-                    </a:p>
-                  </a:txBody>
-                  <a:tcPr anchor="ctr">
-                    <a:lnL>
-                      <a:noFill/>
-                    </a:lnL>
-                    <a:lnR>
-                      <a:noFill/>
-                    </a:lnR>
-                    <a:lnT>
-                      <a:noFill/>
-                    </a:lnT>
-                    <a:lnB>
-                      <a:noFill/>
-                    </a:lnB>
-                    <a:noFill/>
-                  </a:tcPr>
-                </a:tc>
-                <a:extLst>
-                  <a:ext uri="{0D108BD9-81ED-4DB2-BD59-A6C34878D82A}">
-                    <a16:rowId xmlns:a16="http://schemas.microsoft.com/office/drawing/2014/main" val="955775841"/>
-                  </a:ext>
-                </a:extLst>
-              </a:tr>
-              <a:tr h="0">
-                <a:tc>
-                  <a:txBody>
-                    <a:bodyPr/>
-                    <a:lstStyle/>
-                    <a:p>
-                      <a:pPr>
-                        <a:buNone/>
-                      </a:pPr>
-                      <a:r>
-                        <a:rPr lang="pt-BR"/>
-                        <a:t>DeepSeek</a:t>
-                      </a:r>
-                    </a:p>
-                  </a:txBody>
-                  <a:tcPr anchor="ctr">
-                    <a:lnL>
-                      <a:noFill/>
-                    </a:lnL>
-                    <a:lnR>
-                      <a:noFill/>
-                    </a:lnR>
-                    <a:lnT>
-                      <a:noFill/>
-                    </a:lnT>
-                    <a:lnB>
-                      <a:noFill/>
-                    </a:lnB>
-                    <a:noFill/>
-                  </a:tcPr>
-                </a:tc>
-                <a:tc>
-                  <a:txBody>
-                    <a:bodyPr/>
-                    <a:lstStyle/>
-                    <a:p>
-                      <a:pPr>
-                        <a:buNone/>
-                      </a:pPr>
-                      <a:r>
-                        <a:rPr lang="pt-BR"/>
-                        <a:t>1</a:t>
-                      </a:r>
-                    </a:p>
-                  </a:txBody>
-                  <a:tcPr anchor="ctr">
-                    <a:lnL>
-                      <a:noFill/>
-                    </a:lnL>
-                    <a:lnR>
-                      <a:noFill/>
-                    </a:lnR>
-                    <a:lnT>
-                      <a:noFill/>
-                    </a:lnT>
-                    <a:lnB>
-                      <a:noFill/>
-                    </a:lnB>
-                    <a:noFill/>
-                  </a:tcPr>
-                </a:tc>
-                <a:tc>
-                  <a:txBody>
-                    <a:bodyPr/>
-                    <a:lstStyle/>
-                    <a:p>
-                      <a:pPr>
-                        <a:buNone/>
-                      </a:pPr>
-                      <a:r>
-                        <a:rPr lang="pt-BR"/>
-                        <a:t>0</a:t>
-                      </a:r>
-                    </a:p>
-                  </a:txBody>
-                  <a:tcPr anchor="ctr">
-                    <a:lnL>
-                      <a:noFill/>
-                    </a:lnL>
-                    <a:lnR>
-                      <a:noFill/>
-                    </a:lnR>
-                    <a:lnT>
-                      <a:noFill/>
-                    </a:lnT>
-                    <a:lnB>
-                      <a:noFill/>
-                    </a:lnB>
-                    <a:noFill/>
-                  </a:tcPr>
-                </a:tc>
-                <a:tc>
-                  <a:txBody>
-                    <a:bodyPr/>
-                    <a:lstStyle/>
-                    <a:p>
-                      <a:pPr>
-                        <a:buNone/>
-                      </a:pPr>
-                      <a:r>
-                        <a:rPr lang="pt-BR"/>
-                        <a:t>29</a:t>
-                      </a:r>
-                    </a:p>
-                  </a:txBody>
-                  <a:tcPr anchor="ctr">
-                    <a:lnL>
-                      <a:noFill/>
-                    </a:lnL>
-                    <a:lnR>
-                      <a:noFill/>
-                    </a:lnR>
-                    <a:lnT>
-                      <a:noFill/>
-                    </a:lnT>
-                    <a:lnB>
-                      <a:noFill/>
-                    </a:lnB>
-                    <a:noFill/>
-                  </a:tcPr>
-                </a:tc>
-                <a:extLst>
-                  <a:ext uri="{0D108BD9-81ED-4DB2-BD59-A6C34878D82A}">
-                    <a16:rowId xmlns:a16="http://schemas.microsoft.com/office/drawing/2014/main" val="1005542091"/>
-                  </a:ext>
-                </a:extLst>
-              </a:tr>
-              <a:tr h="0">
-                <a:tc>
-                  <a:txBody>
-                    <a:bodyPr/>
-                    <a:lstStyle/>
-                    <a:p>
-                      <a:pPr>
-                        <a:buNone/>
-                      </a:pPr>
-                      <a:r>
-                        <a:rPr lang="pt-BR"/>
-                        <a:t>Gemini</a:t>
-                      </a:r>
-                    </a:p>
-                  </a:txBody>
-                  <a:tcPr anchor="ctr">
-                    <a:lnL>
-                      <a:noFill/>
-                    </a:lnL>
-                    <a:lnR>
-                      <a:noFill/>
-                    </a:lnR>
-                    <a:lnT>
-                      <a:noFill/>
-                    </a:lnT>
-                    <a:lnB>
-                      <a:noFill/>
-                    </a:lnB>
-                    <a:noFill/>
-                  </a:tcPr>
-                </a:tc>
-                <a:tc>
-                  <a:txBody>
-                    <a:bodyPr/>
-                    <a:lstStyle/>
-                    <a:p>
-                      <a:pPr>
-                        <a:buNone/>
-                      </a:pPr>
-                      <a:r>
-                        <a:rPr lang="pt-BR"/>
-                        <a:t>2</a:t>
-                      </a:r>
-                    </a:p>
-                  </a:txBody>
-                  <a:tcPr anchor="ctr">
-                    <a:lnL>
-                      <a:noFill/>
-                    </a:lnL>
-                    <a:lnR>
-                      <a:noFill/>
-                    </a:lnR>
-                    <a:lnT>
-                      <a:noFill/>
-                    </a:lnT>
-                    <a:lnB>
-                      <a:noFill/>
-                    </a:lnB>
-                    <a:noFill/>
-                  </a:tcPr>
-                </a:tc>
-                <a:tc>
-                  <a:txBody>
-                    <a:bodyPr/>
-                    <a:lstStyle/>
-                    <a:p>
-                      <a:pPr>
-                        <a:buNone/>
-                      </a:pPr>
-                      <a:r>
-                        <a:rPr lang="pt-BR"/>
-                        <a:t>0</a:t>
-                      </a:r>
-                    </a:p>
-                  </a:txBody>
-                  <a:tcPr anchor="ctr">
-                    <a:lnL>
-                      <a:noFill/>
-                    </a:lnL>
-                    <a:lnR>
-                      <a:noFill/>
-                    </a:lnR>
-                    <a:lnT>
-                      <a:noFill/>
-                    </a:lnT>
-                    <a:lnB>
-                      <a:noFill/>
-                    </a:lnB>
-                    <a:noFill/>
-                  </a:tcPr>
-                </a:tc>
-                <a:tc>
-                  <a:txBody>
-                    <a:bodyPr/>
-                    <a:lstStyle/>
-                    <a:p>
-                      <a:pPr>
-                        <a:buNone/>
-                      </a:pPr>
-                      <a:r>
-                        <a:rPr lang="pt-BR"/>
-                        <a:t>13</a:t>
-                      </a:r>
-                    </a:p>
-                  </a:txBody>
-                  <a:tcPr anchor="ctr">
-                    <a:lnL>
-                      <a:noFill/>
-                    </a:lnL>
-                    <a:lnR>
-                      <a:noFill/>
-                    </a:lnR>
-                    <a:lnT>
-                      <a:noFill/>
-                    </a:lnT>
-                    <a:lnB>
-                      <a:noFill/>
-                    </a:lnB>
-                    <a:noFill/>
-                  </a:tcPr>
-                </a:tc>
-                <a:extLst>
-                  <a:ext uri="{0D108BD9-81ED-4DB2-BD59-A6C34878D82A}">
-                    <a16:rowId xmlns:a16="http://schemas.microsoft.com/office/drawing/2014/main" val="2882238148"/>
-                  </a:ext>
-                </a:extLst>
-              </a:tr>
-              <a:tr h="0">
-                <a:tc>
-                  <a:txBody>
-                    <a:bodyPr/>
-                    <a:lstStyle/>
-                    <a:p>
-                      <a:pPr>
-                        <a:buNone/>
-                      </a:pPr>
-                      <a:r>
-                        <a:rPr lang="pt-BR"/>
-                        <a:t>MetaAI</a:t>
-                      </a:r>
-                    </a:p>
-                  </a:txBody>
-                  <a:tcPr anchor="ctr">
-                    <a:lnL>
-                      <a:noFill/>
-                    </a:lnL>
-                    <a:lnR>
-                      <a:noFill/>
-                    </a:lnR>
-                    <a:lnT>
-                      <a:noFill/>
-                    </a:lnT>
-                    <a:lnB>
-                      <a:noFill/>
-                    </a:lnB>
-                    <a:noFill/>
-                  </a:tcPr>
-                </a:tc>
-                <a:tc>
-                  <a:txBody>
-                    <a:bodyPr/>
-                    <a:lstStyle/>
-                    <a:p>
-                      <a:pPr>
-                        <a:buNone/>
-                      </a:pPr>
-                      <a:r>
-                        <a:rPr lang="pt-BR" dirty="0"/>
-                        <a:t>2</a:t>
-                      </a:r>
-                    </a:p>
-                  </a:txBody>
-                  <a:tcPr anchor="ctr">
-                    <a:lnL>
-                      <a:noFill/>
-                    </a:lnL>
-                    <a:lnR>
-                      <a:noFill/>
-                    </a:lnR>
-                    <a:lnT>
-                      <a:noFill/>
-                    </a:lnT>
-                    <a:lnB>
-                      <a:noFill/>
-                    </a:lnB>
-                    <a:noFill/>
-                  </a:tcPr>
-                </a:tc>
-                <a:tc>
-                  <a:txBody>
-                    <a:bodyPr/>
-                    <a:lstStyle/>
-                    <a:p>
-                      <a:pPr>
-                        <a:buNone/>
-                      </a:pPr>
-                      <a:r>
-                        <a:rPr lang="pt-BR"/>
-                        <a:t>0</a:t>
-                      </a:r>
-                    </a:p>
-                  </a:txBody>
-                  <a:tcPr anchor="ctr">
-                    <a:lnL>
-                      <a:noFill/>
-                    </a:lnL>
-                    <a:lnR>
-                      <a:noFill/>
-                    </a:lnR>
-                    <a:lnT>
-                      <a:noFill/>
-                    </a:lnT>
-                    <a:lnB>
-                      <a:noFill/>
-                    </a:lnB>
-                    <a:noFill/>
-                  </a:tcPr>
-                </a:tc>
-                <a:tc>
-                  <a:txBody>
-                    <a:bodyPr/>
-                    <a:lstStyle/>
-                    <a:p>
-                      <a:pPr>
-                        <a:buNone/>
-                      </a:pPr>
-                      <a:r>
-                        <a:rPr lang="pt-BR" dirty="0"/>
-                        <a:t>5</a:t>
-                      </a:r>
-                    </a:p>
-                  </a:txBody>
-                  <a:tcPr anchor="ctr">
-                    <a:lnL>
-                      <a:noFill/>
-                    </a:lnL>
-                    <a:lnR>
-                      <a:noFill/>
-                    </a:lnR>
-                    <a:lnT>
-                      <a:noFill/>
-                    </a:lnT>
-                    <a:lnB>
-                      <a:noFill/>
-                    </a:lnB>
-                    <a:noFill/>
-                  </a:tcPr>
-                </a:tc>
-                <a:extLst>
-                  <a:ext uri="{0D108BD9-81ED-4DB2-BD59-A6C34878D82A}">
-                    <a16:rowId xmlns:a16="http://schemas.microsoft.com/office/drawing/2014/main" val="1794369030"/>
-                  </a:ext>
-                </a:extLst>
-              </a:tr>
-            </a:tbl>
-          </a:graphicData>
-        </a:graphic>
-      </p:graphicFrame>
     </p:spTree>
     <p:extLst>
       <p:ext uri="{BB962C8B-B14F-4D97-AF65-F5344CB8AC3E}">
-        <p14:creationId xmlns:p14="http://schemas.microsoft.com/office/powerpoint/2010/main" val="3547002022"/>
+        <p14:creationId xmlns:p14="http://schemas.microsoft.com/office/powerpoint/2010/main" val="995026017"/>
       </p:ext>
     </p:extLst>
   </p:cSld>
@@ -14094,7 +17203,7 @@
         <p:cNvPr id="1" name="">
           <a:extLst>
             <a:ext uri="{FF2B5EF4-FFF2-40B4-BE49-F238E27FC236}">
-              <a16:creationId xmlns:a16="http://schemas.microsoft.com/office/drawing/2014/main" id="{A8CE4016-214D-F6E8-AAFF-5641B3E392E2}"/>
+              <a16:creationId xmlns:a16="http://schemas.microsoft.com/office/drawing/2014/main" id="{3A39FD75-9F79-98B5-74CE-CCFE50A3A5E6}"/>
             </a:ext>
           </a:extLst>
         </p:cNvPr>
@@ -14111,10 +17220,10 @@
       </p:grpSpPr>
       <p:sp>
         <p:nvSpPr>
-          <p:cNvPr id="2" name="Title 1">
+          <p:cNvPr id="4" name="Title 1">
             <a:extLst>
               <a:ext uri="{FF2B5EF4-FFF2-40B4-BE49-F238E27FC236}">
-                <a16:creationId xmlns:a16="http://schemas.microsoft.com/office/drawing/2014/main" id="{8381BBFD-2494-D7DF-DB0B-79F4D4505DE4}"/>
+                <a16:creationId xmlns:a16="http://schemas.microsoft.com/office/drawing/2014/main" id="{54D7E848-A4A7-DDD5-BB7C-7C2CA171CD85}"/>
               </a:ext>
             </a:extLst>
           </p:cNvPr>
@@ -14154,8 +17263,12 @@
           </a:lstStyle>
           <a:p>
             <a:r>
-              <a:rPr lang="pt-BR" b="1" dirty="0"/>
-              <a:t>Resultados – Severidades</a:t>
+              <a:rPr b="1" dirty="0"/>
+              <a:t>Material e </a:t>
+            </a:r>
+            <a:r>
+              <a:rPr b="1" dirty="0" err="1"/>
+              <a:t>Métodos</a:t>
             </a:r>
             <a:endParaRPr b="1" dirty="0"/>
           </a:p>
@@ -14163,10 +17276,10 @@
       </p:sp>
       <p:sp>
         <p:nvSpPr>
-          <p:cNvPr id="3" name="Content Placeholder 2">
+          <p:cNvPr id="2" name="Content Placeholder 2">
             <a:extLst>
               <a:ext uri="{FF2B5EF4-FFF2-40B4-BE49-F238E27FC236}">
-                <a16:creationId xmlns:a16="http://schemas.microsoft.com/office/drawing/2014/main" id="{39F9B504-407F-A4C8-3B0E-248CB92EEE62}"/>
+                <a16:creationId xmlns:a16="http://schemas.microsoft.com/office/drawing/2014/main" id="{DDA4B463-33E0-D8E9-8641-3911A7D7D37C}"/>
               </a:ext>
             </a:extLst>
           </p:cNvPr>
@@ -14177,8 +17290,8 @@
         </p:nvSpPr>
         <p:spPr>
           <a:xfrm>
-            <a:off x="1981200" y="1828799"/>
-            <a:ext cx="8229600" cy="4525963"/>
+            <a:off x="704851" y="1828799"/>
+            <a:ext cx="10772774" cy="4525963"/>
           </a:xfrm>
           <a:prstGeom prst="rect">
             <a:avLst/>
@@ -14186,7 +17299,7 @@
         </p:spPr>
         <p:txBody>
           <a:bodyPr vert="horz" lIns="91440" tIns="45720" rIns="91440" bIns="45720" rtlCol="0">
-            <a:normAutofit/>
+            <a:normAutofit fontScale="77500" lnSpcReduction="20000"/>
           </a:bodyPr>
           <a:lstStyle>
             <a:lvl1pPr marL="342900" indent="-342900" algn="l" defTabSz="457200" rtl="0" eaLnBrk="1" latinLnBrk="0" hangingPunct="1">
@@ -14329,1212 +17442,120 @@
             <a:pPr marL="0" indent="0">
               <a:buNone/>
             </a:pPr>
-            <a:endParaRPr dirty="0"/>
+            <a:r>
+              <a:rPr lang="pt-BR" dirty="0"/>
+              <a:t>Exemplo de prompt:</a:t>
+            </a:r>
+          </a:p>
+          <a:p>
+            <a:pPr marL="0" indent="0">
+              <a:buNone/>
+            </a:pPr>
+            <a:r>
+              <a:rPr lang="pt-BR" dirty="0"/>
+              <a:t>“Como consumir dados do seguinte endereço https://api.bcb.gov.br/dados/serie/bcdata.sgs.12/dados?formato=json&amp;dataInicial=08/04/2015&amp;dataFinal=08/04/2025 por meio de um </a:t>
+            </a:r>
+            <a:r>
+              <a:rPr lang="pt-BR" dirty="0" err="1"/>
+              <a:t>adapter</a:t>
+            </a:r>
+            <a:r>
+              <a:rPr lang="pt-BR" dirty="0"/>
+              <a:t> (design </a:t>
+            </a:r>
+            <a:r>
+              <a:rPr lang="pt-BR" dirty="0" err="1"/>
+              <a:t>pattern</a:t>
+            </a:r>
+            <a:r>
+              <a:rPr lang="pt-BR" dirty="0"/>
+              <a:t>) em Clean </a:t>
+            </a:r>
+            <a:r>
+              <a:rPr lang="pt-BR" dirty="0" err="1"/>
+              <a:t>Architecture</a:t>
+            </a:r>
+            <a:r>
+              <a:rPr lang="pt-BR" dirty="0"/>
+              <a:t> usando </a:t>
+            </a:r>
+            <a:r>
+              <a:rPr lang="pt-BR" dirty="0" err="1"/>
+              <a:t>FastAPI</a:t>
+            </a:r>
+            <a:r>
+              <a:rPr lang="pt-BR" dirty="0"/>
+              <a:t>, salvando os dados consumidos na tabela:</a:t>
+            </a:r>
+          </a:p>
+          <a:p>
+            <a:endParaRPr lang="pt-BR" dirty="0"/>
+          </a:p>
+          <a:p>
+            <a:pPr marL="0" indent="0">
+              <a:buNone/>
+            </a:pPr>
+            <a:r>
+              <a:rPr lang="pt-BR" dirty="0"/>
+              <a:t>CREATE TABLE </a:t>
+            </a:r>
+            <a:r>
+              <a:rPr lang="pt-BR" dirty="0" err="1"/>
+              <a:t>CDI_Diario</a:t>
+            </a:r>
+            <a:r>
+              <a:rPr lang="pt-BR" dirty="0"/>
+              <a:t> (</a:t>
+            </a:r>
+          </a:p>
+          <a:p>
+            <a:pPr marL="0" indent="0">
+              <a:buNone/>
+            </a:pPr>
+            <a:r>
+              <a:rPr lang="pt-BR" dirty="0"/>
+              <a:t>    Data DATE NOT NULL,</a:t>
+            </a:r>
+          </a:p>
+          <a:p>
+            <a:pPr marL="0" indent="0">
+              <a:buNone/>
+            </a:pPr>
+            <a:r>
+              <a:rPr lang="pt-BR" dirty="0"/>
+              <a:t>    Valor FLOAT NOT NULL,</a:t>
+            </a:r>
+          </a:p>
+          <a:p>
+            <a:pPr marL="0" indent="0">
+              <a:buNone/>
+            </a:pPr>
+            <a:r>
+              <a:rPr lang="pt-BR" dirty="0"/>
+              <a:t>    PRIMARY KEY (Data)</a:t>
+            </a:r>
+          </a:p>
+          <a:p>
+            <a:pPr marL="0" indent="0">
+              <a:buNone/>
+            </a:pPr>
+            <a:r>
+              <a:rPr lang="pt-BR" dirty="0"/>
+              <a:t>);”</a:t>
+            </a:r>
+          </a:p>
+          <a:p>
+            <a:pPr marL="0" indent="0">
+              <a:buNone/>
+            </a:pPr>
+            <a:endParaRPr lang="pt-BR" dirty="0"/>
           </a:p>
         </p:txBody>
       </p:sp>
-      <p:graphicFrame>
-        <p:nvGraphicFramePr>
-          <p:cNvPr id="5" name="Tabela 4">
-            <a:extLst>
-              <a:ext uri="{FF2B5EF4-FFF2-40B4-BE49-F238E27FC236}">
-                <a16:creationId xmlns:a16="http://schemas.microsoft.com/office/drawing/2014/main" id="{715E1D88-2036-6EDE-2F61-71EC6F92ABE4}"/>
-              </a:ext>
-            </a:extLst>
-          </p:cNvPr>
-          <p:cNvGraphicFramePr>
-            <a:graphicFrameLocks noGrp="1"/>
-          </p:cNvGraphicFramePr>
-          <p:nvPr>
-            <p:extLst>
-              <p:ext uri="{D42A27DB-BD31-4B8C-83A1-F6EECF244321}">
-                <p14:modId xmlns:p14="http://schemas.microsoft.com/office/powerpoint/2010/main" val="2455352348"/>
-              </p:ext>
-            </p:extLst>
-          </p:nvPr>
-        </p:nvGraphicFramePr>
-        <p:xfrm>
-          <a:off x="838200" y="2331720"/>
-          <a:ext cx="10515600" cy="2194560"/>
-        </p:xfrm>
-        <a:graphic>
-          <a:graphicData uri="http://schemas.openxmlformats.org/drawingml/2006/table">
-            <a:tbl>
-              <a:tblPr/>
-              <a:tblGrid>
-                <a:gridCol w="1752600">
-                  <a:extLst>
-                    <a:ext uri="{9D8B030D-6E8A-4147-A177-3AD203B41FA5}">
-                      <a16:colId xmlns:a16="http://schemas.microsoft.com/office/drawing/2014/main" val="716194022"/>
-                    </a:ext>
-                  </a:extLst>
-                </a:gridCol>
-                <a:gridCol w="1752600">
-                  <a:extLst>
-                    <a:ext uri="{9D8B030D-6E8A-4147-A177-3AD203B41FA5}">
-                      <a16:colId xmlns:a16="http://schemas.microsoft.com/office/drawing/2014/main" val="3981250057"/>
-                    </a:ext>
-                  </a:extLst>
-                </a:gridCol>
-                <a:gridCol w="1752600">
-                  <a:extLst>
-                    <a:ext uri="{9D8B030D-6E8A-4147-A177-3AD203B41FA5}">
-                      <a16:colId xmlns:a16="http://schemas.microsoft.com/office/drawing/2014/main" val="2989649049"/>
-                    </a:ext>
-                  </a:extLst>
-                </a:gridCol>
-                <a:gridCol w="1752600">
-                  <a:extLst>
-                    <a:ext uri="{9D8B030D-6E8A-4147-A177-3AD203B41FA5}">
-                      <a16:colId xmlns:a16="http://schemas.microsoft.com/office/drawing/2014/main" val="3942317680"/>
-                    </a:ext>
-                  </a:extLst>
-                </a:gridCol>
-                <a:gridCol w="1752600">
-                  <a:extLst>
-                    <a:ext uri="{9D8B030D-6E8A-4147-A177-3AD203B41FA5}">
-                      <a16:colId xmlns:a16="http://schemas.microsoft.com/office/drawing/2014/main" val="295958947"/>
-                    </a:ext>
-                  </a:extLst>
-                </a:gridCol>
-                <a:gridCol w="1752600">
-                  <a:extLst>
-                    <a:ext uri="{9D8B030D-6E8A-4147-A177-3AD203B41FA5}">
-                      <a16:colId xmlns:a16="http://schemas.microsoft.com/office/drawing/2014/main" val="1110204864"/>
-                    </a:ext>
-                  </a:extLst>
-                </a:gridCol>
-              </a:tblGrid>
-              <a:tr h="0">
-                <a:tc>
-                  <a:txBody>
-                    <a:bodyPr/>
-                    <a:lstStyle/>
-                    <a:p>
-                      <a:pPr>
-                        <a:buNone/>
-                      </a:pPr>
-                      <a:r>
-                        <a:rPr lang="pt-BR" b="1" dirty="0"/>
-                        <a:t>IA</a:t>
-                      </a:r>
-                    </a:p>
-                  </a:txBody>
-                  <a:tcPr anchor="ctr">
-                    <a:lnL>
-                      <a:noFill/>
-                    </a:lnL>
-                    <a:lnR>
-                      <a:noFill/>
-                    </a:lnR>
-                    <a:lnT>
-                      <a:noFill/>
-                    </a:lnT>
-                    <a:lnB>
-                      <a:noFill/>
-                    </a:lnB>
-                    <a:noFill/>
-                  </a:tcPr>
-                </a:tc>
-                <a:tc>
-                  <a:txBody>
-                    <a:bodyPr/>
-                    <a:lstStyle/>
-                    <a:p>
-                      <a:pPr>
-                        <a:buNone/>
-                      </a:pPr>
-                      <a:r>
-                        <a:rPr lang="pt-BR" b="1" dirty="0"/>
-                        <a:t>Total</a:t>
-                      </a:r>
-                    </a:p>
-                  </a:txBody>
-                  <a:tcPr anchor="ctr">
-                    <a:lnL>
-                      <a:noFill/>
-                    </a:lnL>
-                    <a:lnR>
-                      <a:noFill/>
-                    </a:lnR>
-                    <a:lnT>
-                      <a:noFill/>
-                    </a:lnT>
-                    <a:lnB>
-                      <a:noFill/>
-                    </a:lnB>
-                    <a:noFill/>
-                  </a:tcPr>
-                </a:tc>
-                <a:tc>
-                  <a:txBody>
-                    <a:bodyPr/>
-                    <a:lstStyle/>
-                    <a:p>
-                      <a:pPr>
-                        <a:buNone/>
-                      </a:pPr>
-                      <a:r>
-                        <a:rPr lang="pt-BR" b="1"/>
-                        <a:t>Bloqueios</a:t>
-                      </a:r>
-                    </a:p>
-                  </a:txBody>
-                  <a:tcPr anchor="ctr">
-                    <a:lnL>
-                      <a:noFill/>
-                    </a:lnL>
-                    <a:lnR>
-                      <a:noFill/>
-                    </a:lnR>
-                    <a:lnT>
-                      <a:noFill/>
-                    </a:lnT>
-                    <a:lnB>
-                      <a:noFill/>
-                    </a:lnB>
-                    <a:noFill/>
-                  </a:tcPr>
-                </a:tc>
-                <a:tc>
-                  <a:txBody>
-                    <a:bodyPr/>
-                    <a:lstStyle/>
-                    <a:p>
-                      <a:pPr>
-                        <a:buNone/>
-                      </a:pPr>
-                      <a:r>
-                        <a:rPr lang="pt-BR" b="1"/>
-                        <a:t>Críticas</a:t>
-                      </a:r>
-                    </a:p>
-                  </a:txBody>
-                  <a:tcPr anchor="ctr">
-                    <a:lnL>
-                      <a:noFill/>
-                    </a:lnL>
-                    <a:lnR>
-                      <a:noFill/>
-                    </a:lnR>
-                    <a:lnT>
-                      <a:noFill/>
-                    </a:lnT>
-                    <a:lnB>
-                      <a:noFill/>
-                    </a:lnB>
-                    <a:noFill/>
-                  </a:tcPr>
-                </a:tc>
-                <a:tc>
-                  <a:txBody>
-                    <a:bodyPr/>
-                    <a:lstStyle/>
-                    <a:p>
-                      <a:pPr>
-                        <a:buNone/>
-                      </a:pPr>
-                      <a:r>
-                        <a:rPr lang="pt-BR" b="1"/>
-                        <a:t>Principais</a:t>
-                      </a:r>
-                    </a:p>
-                  </a:txBody>
-                  <a:tcPr anchor="ctr">
-                    <a:lnL>
-                      <a:noFill/>
-                    </a:lnL>
-                    <a:lnR>
-                      <a:noFill/>
-                    </a:lnR>
-                    <a:lnT>
-                      <a:noFill/>
-                    </a:lnT>
-                    <a:lnB>
-                      <a:noFill/>
-                    </a:lnB>
-                    <a:noFill/>
-                  </a:tcPr>
-                </a:tc>
-                <a:tc>
-                  <a:txBody>
-                    <a:bodyPr/>
-                    <a:lstStyle/>
-                    <a:p>
-                      <a:pPr>
-                        <a:buNone/>
-                      </a:pPr>
-                      <a:r>
-                        <a:rPr lang="pt-BR" b="1" dirty="0"/>
-                        <a:t>Secundárias</a:t>
-                      </a:r>
-                    </a:p>
-                  </a:txBody>
-                  <a:tcPr anchor="ctr">
-                    <a:lnL>
-                      <a:noFill/>
-                    </a:lnL>
-                    <a:lnR>
-                      <a:noFill/>
-                    </a:lnR>
-                    <a:lnT>
-                      <a:noFill/>
-                    </a:lnT>
-                    <a:lnB>
-                      <a:noFill/>
-                    </a:lnB>
-                    <a:noFill/>
-                  </a:tcPr>
-                </a:tc>
-                <a:extLst>
-                  <a:ext uri="{0D108BD9-81ED-4DB2-BD59-A6C34878D82A}">
-                    <a16:rowId xmlns:a16="http://schemas.microsoft.com/office/drawing/2014/main" val="4186958419"/>
-                  </a:ext>
-                </a:extLst>
-              </a:tr>
-              <a:tr h="0">
-                <a:tc>
-                  <a:txBody>
-                    <a:bodyPr/>
-                    <a:lstStyle/>
-                    <a:p>
-                      <a:pPr>
-                        <a:buNone/>
-                      </a:pPr>
-                      <a:r>
-                        <a:rPr lang="pt-BR"/>
-                        <a:t>ChatGPT</a:t>
-                      </a:r>
-                    </a:p>
-                  </a:txBody>
-                  <a:tcPr anchor="ctr">
-                    <a:lnL>
-                      <a:noFill/>
-                    </a:lnL>
-                    <a:lnR>
-                      <a:noFill/>
-                    </a:lnR>
-                    <a:lnT>
-                      <a:noFill/>
-                    </a:lnT>
-                    <a:lnB>
-                      <a:noFill/>
-                    </a:lnB>
-                    <a:noFill/>
-                  </a:tcPr>
-                </a:tc>
-                <a:tc>
-                  <a:txBody>
-                    <a:bodyPr/>
-                    <a:lstStyle/>
-                    <a:p>
-                      <a:pPr>
-                        <a:buNone/>
-                      </a:pPr>
-                      <a:r>
-                        <a:rPr lang="pt-BR"/>
-                        <a:t>22</a:t>
-                      </a:r>
-                    </a:p>
-                  </a:txBody>
-                  <a:tcPr anchor="ctr">
-                    <a:lnL>
-                      <a:noFill/>
-                    </a:lnL>
-                    <a:lnR>
-                      <a:noFill/>
-                    </a:lnR>
-                    <a:lnT>
-                      <a:noFill/>
-                    </a:lnT>
-                    <a:lnB>
-                      <a:noFill/>
-                    </a:lnB>
-                    <a:noFill/>
-                  </a:tcPr>
-                </a:tc>
-                <a:tc>
-                  <a:txBody>
-                    <a:bodyPr/>
-                    <a:lstStyle/>
-                    <a:p>
-                      <a:pPr>
-                        <a:buNone/>
-                      </a:pPr>
-                      <a:r>
-                        <a:rPr lang="pt-BR"/>
-                        <a:t>1</a:t>
-                      </a:r>
-                    </a:p>
-                  </a:txBody>
-                  <a:tcPr anchor="ctr">
-                    <a:lnL>
-                      <a:noFill/>
-                    </a:lnL>
-                    <a:lnR>
-                      <a:noFill/>
-                    </a:lnR>
-                    <a:lnT>
-                      <a:noFill/>
-                    </a:lnT>
-                    <a:lnB>
-                      <a:noFill/>
-                    </a:lnB>
-                    <a:noFill/>
-                  </a:tcPr>
-                </a:tc>
-                <a:tc>
-                  <a:txBody>
-                    <a:bodyPr/>
-                    <a:lstStyle/>
-                    <a:p>
-                      <a:pPr>
-                        <a:buNone/>
-                      </a:pPr>
-                      <a:r>
-                        <a:rPr lang="pt-BR"/>
-                        <a:t>0</a:t>
-                      </a:r>
-                    </a:p>
-                  </a:txBody>
-                  <a:tcPr anchor="ctr">
-                    <a:lnL>
-                      <a:noFill/>
-                    </a:lnL>
-                    <a:lnR>
-                      <a:noFill/>
-                    </a:lnR>
-                    <a:lnT>
-                      <a:noFill/>
-                    </a:lnT>
-                    <a:lnB>
-                      <a:noFill/>
-                    </a:lnB>
-                    <a:noFill/>
-                  </a:tcPr>
-                </a:tc>
-                <a:tc>
-                  <a:txBody>
-                    <a:bodyPr/>
-                    <a:lstStyle/>
-                    <a:p>
-                      <a:pPr>
-                        <a:buNone/>
-                      </a:pPr>
-                      <a:r>
-                        <a:rPr lang="pt-BR"/>
-                        <a:t>9</a:t>
-                      </a:r>
-                    </a:p>
-                  </a:txBody>
-                  <a:tcPr anchor="ctr">
-                    <a:lnL>
-                      <a:noFill/>
-                    </a:lnL>
-                    <a:lnR>
-                      <a:noFill/>
-                    </a:lnR>
-                    <a:lnT>
-                      <a:noFill/>
-                    </a:lnT>
-                    <a:lnB>
-                      <a:noFill/>
-                    </a:lnB>
-                    <a:noFill/>
-                  </a:tcPr>
-                </a:tc>
-                <a:tc>
-                  <a:txBody>
-                    <a:bodyPr/>
-                    <a:lstStyle/>
-                    <a:p>
-                      <a:pPr>
-                        <a:buNone/>
-                      </a:pPr>
-                      <a:r>
-                        <a:rPr lang="pt-BR"/>
-                        <a:t>12</a:t>
-                      </a:r>
-                    </a:p>
-                  </a:txBody>
-                  <a:tcPr anchor="ctr">
-                    <a:lnL>
-                      <a:noFill/>
-                    </a:lnL>
-                    <a:lnR>
-                      <a:noFill/>
-                    </a:lnR>
-                    <a:lnT>
-                      <a:noFill/>
-                    </a:lnT>
-                    <a:lnB>
-                      <a:noFill/>
-                    </a:lnB>
-                    <a:noFill/>
-                  </a:tcPr>
-                </a:tc>
-                <a:extLst>
-                  <a:ext uri="{0D108BD9-81ED-4DB2-BD59-A6C34878D82A}">
-                    <a16:rowId xmlns:a16="http://schemas.microsoft.com/office/drawing/2014/main" val="2694464506"/>
-                  </a:ext>
-                </a:extLst>
-              </a:tr>
-              <a:tr h="0">
-                <a:tc>
-                  <a:txBody>
-                    <a:bodyPr/>
-                    <a:lstStyle/>
-                    <a:p>
-                      <a:pPr>
-                        <a:buNone/>
-                      </a:pPr>
-                      <a:r>
-                        <a:rPr lang="pt-BR"/>
-                        <a:t>Copilot</a:t>
-                      </a:r>
-                    </a:p>
-                  </a:txBody>
-                  <a:tcPr anchor="ctr">
-                    <a:lnL>
-                      <a:noFill/>
-                    </a:lnL>
-                    <a:lnR>
-                      <a:noFill/>
-                    </a:lnR>
-                    <a:lnT>
-                      <a:noFill/>
-                    </a:lnT>
-                    <a:lnB>
-                      <a:noFill/>
-                    </a:lnB>
-                    <a:noFill/>
-                  </a:tcPr>
-                </a:tc>
-                <a:tc>
-                  <a:txBody>
-                    <a:bodyPr/>
-                    <a:lstStyle/>
-                    <a:p>
-                      <a:pPr>
-                        <a:buNone/>
-                      </a:pPr>
-                      <a:r>
-                        <a:rPr lang="pt-BR"/>
-                        <a:t>9</a:t>
-                      </a:r>
-                    </a:p>
-                  </a:txBody>
-                  <a:tcPr anchor="ctr">
-                    <a:lnL>
-                      <a:noFill/>
-                    </a:lnL>
-                    <a:lnR>
-                      <a:noFill/>
-                    </a:lnR>
-                    <a:lnT>
-                      <a:noFill/>
-                    </a:lnT>
-                    <a:lnB>
-                      <a:noFill/>
-                    </a:lnB>
-                    <a:noFill/>
-                  </a:tcPr>
-                </a:tc>
-                <a:tc>
-                  <a:txBody>
-                    <a:bodyPr/>
-                    <a:lstStyle/>
-                    <a:p>
-                      <a:pPr>
-                        <a:buNone/>
-                      </a:pPr>
-                      <a:r>
-                        <a:rPr lang="pt-BR"/>
-                        <a:t>1</a:t>
-                      </a:r>
-                    </a:p>
-                  </a:txBody>
-                  <a:tcPr anchor="ctr">
-                    <a:lnL>
-                      <a:noFill/>
-                    </a:lnL>
-                    <a:lnR>
-                      <a:noFill/>
-                    </a:lnR>
-                    <a:lnT>
-                      <a:noFill/>
-                    </a:lnT>
-                    <a:lnB>
-                      <a:noFill/>
-                    </a:lnB>
-                    <a:noFill/>
-                  </a:tcPr>
-                </a:tc>
-                <a:tc>
-                  <a:txBody>
-                    <a:bodyPr/>
-                    <a:lstStyle/>
-                    <a:p>
-                      <a:pPr>
-                        <a:buNone/>
-                      </a:pPr>
-                      <a:r>
-                        <a:rPr lang="pt-BR"/>
-                        <a:t>3</a:t>
-                      </a:r>
-                    </a:p>
-                  </a:txBody>
-                  <a:tcPr anchor="ctr">
-                    <a:lnL>
-                      <a:noFill/>
-                    </a:lnL>
-                    <a:lnR>
-                      <a:noFill/>
-                    </a:lnR>
-                    <a:lnT>
-                      <a:noFill/>
-                    </a:lnT>
-                    <a:lnB>
-                      <a:noFill/>
-                    </a:lnB>
-                    <a:noFill/>
-                  </a:tcPr>
-                </a:tc>
-                <a:tc>
-                  <a:txBody>
-                    <a:bodyPr/>
-                    <a:lstStyle/>
-                    <a:p>
-                      <a:pPr>
-                        <a:buNone/>
-                      </a:pPr>
-                      <a:r>
-                        <a:rPr lang="pt-BR"/>
-                        <a:t>3</a:t>
-                      </a:r>
-                    </a:p>
-                  </a:txBody>
-                  <a:tcPr anchor="ctr">
-                    <a:lnL>
-                      <a:noFill/>
-                    </a:lnL>
-                    <a:lnR>
-                      <a:noFill/>
-                    </a:lnR>
-                    <a:lnT>
-                      <a:noFill/>
-                    </a:lnT>
-                    <a:lnB>
-                      <a:noFill/>
-                    </a:lnB>
-                    <a:noFill/>
-                  </a:tcPr>
-                </a:tc>
-                <a:tc>
-                  <a:txBody>
-                    <a:bodyPr/>
-                    <a:lstStyle/>
-                    <a:p>
-                      <a:pPr>
-                        <a:buNone/>
-                      </a:pPr>
-                      <a:r>
-                        <a:rPr lang="pt-BR"/>
-                        <a:t>2</a:t>
-                      </a:r>
-                    </a:p>
-                  </a:txBody>
-                  <a:tcPr anchor="ctr">
-                    <a:lnL>
-                      <a:noFill/>
-                    </a:lnL>
-                    <a:lnR>
-                      <a:noFill/>
-                    </a:lnR>
-                    <a:lnT>
-                      <a:noFill/>
-                    </a:lnT>
-                    <a:lnB>
-                      <a:noFill/>
-                    </a:lnB>
-                    <a:noFill/>
-                  </a:tcPr>
-                </a:tc>
-                <a:extLst>
-                  <a:ext uri="{0D108BD9-81ED-4DB2-BD59-A6C34878D82A}">
-                    <a16:rowId xmlns:a16="http://schemas.microsoft.com/office/drawing/2014/main" val="533392937"/>
-                  </a:ext>
-                </a:extLst>
-              </a:tr>
-              <a:tr h="0">
-                <a:tc>
-                  <a:txBody>
-                    <a:bodyPr/>
-                    <a:lstStyle/>
-                    <a:p>
-                      <a:pPr>
-                        <a:buNone/>
-                      </a:pPr>
-                      <a:r>
-                        <a:rPr lang="pt-BR"/>
-                        <a:t>DeepSeek</a:t>
-                      </a:r>
-                    </a:p>
-                  </a:txBody>
-                  <a:tcPr anchor="ctr">
-                    <a:lnL>
-                      <a:noFill/>
-                    </a:lnL>
-                    <a:lnR>
-                      <a:noFill/>
-                    </a:lnR>
-                    <a:lnT>
-                      <a:noFill/>
-                    </a:lnT>
-                    <a:lnB>
-                      <a:noFill/>
-                    </a:lnB>
-                    <a:noFill/>
-                  </a:tcPr>
-                </a:tc>
-                <a:tc>
-                  <a:txBody>
-                    <a:bodyPr/>
-                    <a:lstStyle/>
-                    <a:p>
-                      <a:pPr>
-                        <a:buNone/>
-                      </a:pPr>
-                      <a:r>
-                        <a:rPr lang="pt-BR"/>
-                        <a:t>30</a:t>
-                      </a:r>
-                    </a:p>
-                  </a:txBody>
-                  <a:tcPr anchor="ctr">
-                    <a:lnL>
-                      <a:noFill/>
-                    </a:lnL>
-                    <a:lnR>
-                      <a:noFill/>
-                    </a:lnR>
-                    <a:lnT>
-                      <a:noFill/>
-                    </a:lnT>
-                    <a:lnB>
-                      <a:noFill/>
-                    </a:lnB>
-                    <a:noFill/>
-                  </a:tcPr>
-                </a:tc>
-                <a:tc>
-                  <a:txBody>
-                    <a:bodyPr/>
-                    <a:lstStyle/>
-                    <a:p>
-                      <a:pPr>
-                        <a:buNone/>
-                      </a:pPr>
-                      <a:r>
-                        <a:rPr lang="pt-BR"/>
-                        <a:t>1</a:t>
-                      </a:r>
-                    </a:p>
-                  </a:txBody>
-                  <a:tcPr anchor="ctr">
-                    <a:lnL>
-                      <a:noFill/>
-                    </a:lnL>
-                    <a:lnR>
-                      <a:noFill/>
-                    </a:lnR>
-                    <a:lnT>
-                      <a:noFill/>
-                    </a:lnT>
-                    <a:lnB>
-                      <a:noFill/>
-                    </a:lnB>
-                    <a:noFill/>
-                  </a:tcPr>
-                </a:tc>
-                <a:tc>
-                  <a:txBody>
-                    <a:bodyPr/>
-                    <a:lstStyle/>
-                    <a:p>
-                      <a:pPr>
-                        <a:buNone/>
-                      </a:pPr>
-                      <a:r>
-                        <a:rPr lang="pt-BR"/>
-                        <a:t>9</a:t>
-                      </a:r>
-                    </a:p>
-                  </a:txBody>
-                  <a:tcPr anchor="ctr">
-                    <a:lnL>
-                      <a:noFill/>
-                    </a:lnL>
-                    <a:lnR>
-                      <a:noFill/>
-                    </a:lnR>
-                    <a:lnT>
-                      <a:noFill/>
-                    </a:lnT>
-                    <a:lnB>
-                      <a:noFill/>
-                    </a:lnB>
-                    <a:noFill/>
-                  </a:tcPr>
-                </a:tc>
-                <a:tc>
-                  <a:txBody>
-                    <a:bodyPr/>
-                    <a:lstStyle/>
-                    <a:p>
-                      <a:pPr>
-                        <a:buNone/>
-                      </a:pPr>
-                      <a:r>
-                        <a:rPr lang="pt-BR"/>
-                        <a:t>13</a:t>
-                      </a:r>
-                    </a:p>
-                  </a:txBody>
-                  <a:tcPr anchor="ctr">
-                    <a:lnL>
-                      <a:noFill/>
-                    </a:lnL>
-                    <a:lnR>
-                      <a:noFill/>
-                    </a:lnR>
-                    <a:lnT>
-                      <a:noFill/>
-                    </a:lnT>
-                    <a:lnB>
-                      <a:noFill/>
-                    </a:lnB>
-                    <a:noFill/>
-                  </a:tcPr>
-                </a:tc>
-                <a:tc>
-                  <a:txBody>
-                    <a:bodyPr/>
-                    <a:lstStyle/>
-                    <a:p>
-                      <a:pPr>
-                        <a:buNone/>
-                      </a:pPr>
-                      <a:r>
-                        <a:rPr lang="pt-BR"/>
-                        <a:t>7</a:t>
-                      </a:r>
-                    </a:p>
-                  </a:txBody>
-                  <a:tcPr anchor="ctr">
-                    <a:lnL>
-                      <a:noFill/>
-                    </a:lnL>
-                    <a:lnR>
-                      <a:noFill/>
-                    </a:lnR>
-                    <a:lnT>
-                      <a:noFill/>
-                    </a:lnT>
-                    <a:lnB>
-                      <a:noFill/>
-                    </a:lnB>
-                    <a:noFill/>
-                  </a:tcPr>
-                </a:tc>
-                <a:extLst>
-                  <a:ext uri="{0D108BD9-81ED-4DB2-BD59-A6C34878D82A}">
-                    <a16:rowId xmlns:a16="http://schemas.microsoft.com/office/drawing/2014/main" val="1684842970"/>
-                  </a:ext>
-                </a:extLst>
-              </a:tr>
-              <a:tr h="0">
-                <a:tc>
-                  <a:txBody>
-                    <a:bodyPr/>
-                    <a:lstStyle/>
-                    <a:p>
-                      <a:pPr>
-                        <a:buNone/>
-                      </a:pPr>
-                      <a:r>
-                        <a:rPr lang="pt-BR"/>
-                        <a:t>Gemini</a:t>
-                      </a:r>
-                    </a:p>
-                  </a:txBody>
-                  <a:tcPr anchor="ctr">
-                    <a:lnL>
-                      <a:noFill/>
-                    </a:lnL>
-                    <a:lnR>
-                      <a:noFill/>
-                    </a:lnR>
-                    <a:lnT>
-                      <a:noFill/>
-                    </a:lnT>
-                    <a:lnB>
-                      <a:noFill/>
-                    </a:lnB>
-                    <a:noFill/>
-                  </a:tcPr>
-                </a:tc>
-                <a:tc>
-                  <a:txBody>
-                    <a:bodyPr/>
-                    <a:lstStyle/>
-                    <a:p>
-                      <a:pPr>
-                        <a:buNone/>
-                      </a:pPr>
-                      <a:r>
-                        <a:rPr lang="pt-BR"/>
-                        <a:t>15</a:t>
-                      </a:r>
-                    </a:p>
-                  </a:txBody>
-                  <a:tcPr anchor="ctr">
-                    <a:lnL>
-                      <a:noFill/>
-                    </a:lnL>
-                    <a:lnR>
-                      <a:noFill/>
-                    </a:lnR>
-                    <a:lnT>
-                      <a:noFill/>
-                    </a:lnT>
-                    <a:lnB>
-                      <a:noFill/>
-                    </a:lnB>
-                    <a:noFill/>
-                  </a:tcPr>
-                </a:tc>
-                <a:tc>
-                  <a:txBody>
-                    <a:bodyPr/>
-                    <a:lstStyle/>
-                    <a:p>
-                      <a:pPr>
-                        <a:buNone/>
-                      </a:pPr>
-                      <a:r>
-                        <a:rPr lang="pt-BR"/>
-                        <a:t>2</a:t>
-                      </a:r>
-                    </a:p>
-                  </a:txBody>
-                  <a:tcPr anchor="ctr">
-                    <a:lnL>
-                      <a:noFill/>
-                    </a:lnL>
-                    <a:lnR>
-                      <a:noFill/>
-                    </a:lnR>
-                    <a:lnT>
-                      <a:noFill/>
-                    </a:lnT>
-                    <a:lnB>
-                      <a:noFill/>
-                    </a:lnB>
-                    <a:noFill/>
-                  </a:tcPr>
-                </a:tc>
-                <a:tc>
-                  <a:txBody>
-                    <a:bodyPr/>
-                    <a:lstStyle/>
-                    <a:p>
-                      <a:pPr>
-                        <a:buNone/>
-                      </a:pPr>
-                      <a:r>
-                        <a:rPr lang="pt-BR"/>
-                        <a:t>1</a:t>
-                      </a:r>
-                    </a:p>
-                  </a:txBody>
-                  <a:tcPr anchor="ctr">
-                    <a:lnL>
-                      <a:noFill/>
-                    </a:lnL>
-                    <a:lnR>
-                      <a:noFill/>
-                    </a:lnR>
-                    <a:lnT>
-                      <a:noFill/>
-                    </a:lnT>
-                    <a:lnB>
-                      <a:noFill/>
-                    </a:lnB>
-                    <a:noFill/>
-                  </a:tcPr>
-                </a:tc>
-                <a:tc>
-                  <a:txBody>
-                    <a:bodyPr/>
-                    <a:lstStyle/>
-                    <a:p>
-                      <a:pPr>
-                        <a:buNone/>
-                      </a:pPr>
-                      <a:r>
-                        <a:rPr lang="pt-BR"/>
-                        <a:t>9</a:t>
-                      </a:r>
-                    </a:p>
-                  </a:txBody>
-                  <a:tcPr anchor="ctr">
-                    <a:lnL>
-                      <a:noFill/>
-                    </a:lnL>
-                    <a:lnR>
-                      <a:noFill/>
-                    </a:lnR>
-                    <a:lnT>
-                      <a:noFill/>
-                    </a:lnT>
-                    <a:lnB>
-                      <a:noFill/>
-                    </a:lnB>
-                    <a:noFill/>
-                  </a:tcPr>
-                </a:tc>
-                <a:tc>
-                  <a:txBody>
-                    <a:bodyPr/>
-                    <a:lstStyle/>
-                    <a:p>
-                      <a:pPr>
-                        <a:buNone/>
-                      </a:pPr>
-                      <a:r>
-                        <a:rPr lang="pt-BR"/>
-                        <a:t>3</a:t>
-                      </a:r>
-                    </a:p>
-                  </a:txBody>
-                  <a:tcPr anchor="ctr">
-                    <a:lnL>
-                      <a:noFill/>
-                    </a:lnL>
-                    <a:lnR>
-                      <a:noFill/>
-                    </a:lnR>
-                    <a:lnT>
-                      <a:noFill/>
-                    </a:lnT>
-                    <a:lnB>
-                      <a:noFill/>
-                    </a:lnB>
-                    <a:noFill/>
-                  </a:tcPr>
-                </a:tc>
-                <a:extLst>
-                  <a:ext uri="{0D108BD9-81ED-4DB2-BD59-A6C34878D82A}">
-                    <a16:rowId xmlns:a16="http://schemas.microsoft.com/office/drawing/2014/main" val="1901901883"/>
-                  </a:ext>
-                </a:extLst>
-              </a:tr>
-              <a:tr h="0">
-                <a:tc>
-                  <a:txBody>
-                    <a:bodyPr/>
-                    <a:lstStyle/>
-                    <a:p>
-                      <a:pPr>
-                        <a:buNone/>
-                      </a:pPr>
-                      <a:r>
-                        <a:rPr lang="pt-BR"/>
-                        <a:t>MetaAI</a:t>
-                      </a:r>
-                    </a:p>
-                  </a:txBody>
-                  <a:tcPr anchor="ctr">
-                    <a:lnL>
-                      <a:noFill/>
-                    </a:lnL>
-                    <a:lnR>
-                      <a:noFill/>
-                    </a:lnR>
-                    <a:lnT>
-                      <a:noFill/>
-                    </a:lnT>
-                    <a:lnB>
-                      <a:noFill/>
-                    </a:lnB>
-                    <a:noFill/>
-                  </a:tcPr>
-                </a:tc>
-                <a:tc>
-                  <a:txBody>
-                    <a:bodyPr/>
-                    <a:lstStyle/>
-                    <a:p>
-                      <a:pPr>
-                        <a:buNone/>
-                      </a:pPr>
-                      <a:r>
-                        <a:rPr lang="pt-BR"/>
-                        <a:t>7</a:t>
-                      </a:r>
-                    </a:p>
-                  </a:txBody>
-                  <a:tcPr anchor="ctr">
-                    <a:lnL>
-                      <a:noFill/>
-                    </a:lnL>
-                    <a:lnR>
-                      <a:noFill/>
-                    </a:lnR>
-                    <a:lnT>
-                      <a:noFill/>
-                    </a:lnT>
-                    <a:lnB>
-                      <a:noFill/>
-                    </a:lnB>
-                    <a:noFill/>
-                  </a:tcPr>
-                </a:tc>
-                <a:tc>
-                  <a:txBody>
-                    <a:bodyPr/>
-                    <a:lstStyle/>
-                    <a:p>
-                      <a:pPr>
-                        <a:buNone/>
-                      </a:pPr>
-                      <a:r>
-                        <a:rPr lang="pt-BR"/>
-                        <a:t>2</a:t>
-                      </a:r>
-                    </a:p>
-                  </a:txBody>
-                  <a:tcPr anchor="ctr">
-                    <a:lnL>
-                      <a:noFill/>
-                    </a:lnL>
-                    <a:lnR>
-                      <a:noFill/>
-                    </a:lnR>
-                    <a:lnT>
-                      <a:noFill/>
-                    </a:lnT>
-                    <a:lnB>
-                      <a:noFill/>
-                    </a:lnB>
-                    <a:noFill/>
-                  </a:tcPr>
-                </a:tc>
-                <a:tc>
-                  <a:txBody>
-                    <a:bodyPr/>
-                    <a:lstStyle/>
-                    <a:p>
-                      <a:pPr>
-                        <a:buNone/>
-                      </a:pPr>
-                      <a:r>
-                        <a:rPr lang="pt-BR"/>
-                        <a:t>0</a:t>
-                      </a:r>
-                    </a:p>
-                  </a:txBody>
-                  <a:tcPr anchor="ctr">
-                    <a:lnL>
-                      <a:noFill/>
-                    </a:lnL>
-                    <a:lnR>
-                      <a:noFill/>
-                    </a:lnR>
-                    <a:lnT>
-                      <a:noFill/>
-                    </a:lnT>
-                    <a:lnB>
-                      <a:noFill/>
-                    </a:lnB>
-                    <a:noFill/>
-                  </a:tcPr>
-                </a:tc>
-                <a:tc>
-                  <a:txBody>
-                    <a:bodyPr/>
-                    <a:lstStyle/>
-                    <a:p>
-                      <a:pPr>
-                        <a:buNone/>
-                      </a:pPr>
-                      <a:r>
-                        <a:rPr lang="pt-BR"/>
-                        <a:t>4</a:t>
-                      </a:r>
-                    </a:p>
-                  </a:txBody>
-                  <a:tcPr anchor="ctr">
-                    <a:lnL>
-                      <a:noFill/>
-                    </a:lnL>
-                    <a:lnR>
-                      <a:noFill/>
-                    </a:lnR>
-                    <a:lnT>
-                      <a:noFill/>
-                    </a:lnT>
-                    <a:lnB>
-                      <a:noFill/>
-                    </a:lnB>
-                    <a:noFill/>
-                  </a:tcPr>
-                </a:tc>
-                <a:tc>
-                  <a:txBody>
-                    <a:bodyPr/>
-                    <a:lstStyle/>
-                    <a:p>
-                      <a:pPr>
-                        <a:buNone/>
-                      </a:pPr>
-                      <a:r>
-                        <a:rPr lang="pt-BR" dirty="0"/>
-                        <a:t>1</a:t>
-                      </a:r>
-                    </a:p>
-                  </a:txBody>
-                  <a:tcPr anchor="ctr">
-                    <a:lnL>
-                      <a:noFill/>
-                    </a:lnL>
-                    <a:lnR>
-                      <a:noFill/>
-                    </a:lnR>
-                    <a:lnT>
-                      <a:noFill/>
-                    </a:lnT>
-                    <a:lnB>
-                      <a:noFill/>
-                    </a:lnB>
-                    <a:noFill/>
-                  </a:tcPr>
-                </a:tc>
-                <a:extLst>
-                  <a:ext uri="{0D108BD9-81ED-4DB2-BD59-A6C34878D82A}">
-                    <a16:rowId xmlns:a16="http://schemas.microsoft.com/office/drawing/2014/main" val="821868334"/>
-                  </a:ext>
-                </a:extLst>
-              </a:tr>
-            </a:tbl>
-          </a:graphicData>
-        </a:graphic>
-      </p:graphicFrame>
     </p:spTree>
     <p:extLst>
       <p:ext uri="{BB962C8B-B14F-4D97-AF65-F5344CB8AC3E}">
-        <p14:creationId xmlns:p14="http://schemas.microsoft.com/office/powerpoint/2010/main" val="3466748080"/>
+        <p14:creationId xmlns:p14="http://schemas.microsoft.com/office/powerpoint/2010/main" val="1543651654"/>
       </p:ext>
     </p:extLst>
   </p:cSld>
@@ -15552,7 +17573,7 @@
         <p:cNvPr id="1" name="">
           <a:extLst>
             <a:ext uri="{FF2B5EF4-FFF2-40B4-BE49-F238E27FC236}">
-              <a16:creationId xmlns:a16="http://schemas.microsoft.com/office/drawing/2014/main" id="{C6E57636-55AB-D76D-CD2B-1794B59C8EAE}"/>
+              <a16:creationId xmlns:a16="http://schemas.microsoft.com/office/drawing/2014/main" id="{8990AECB-6930-5D9A-D2F9-F562AB11A91F}"/>
             </a:ext>
           </a:extLst>
         </p:cNvPr>
@@ -15569,10 +17590,10 @@
       </p:grpSpPr>
       <p:sp>
         <p:nvSpPr>
-          <p:cNvPr id="2" name="Title 1">
+          <p:cNvPr id="4" name="Title 1">
             <a:extLst>
               <a:ext uri="{FF2B5EF4-FFF2-40B4-BE49-F238E27FC236}">
-                <a16:creationId xmlns:a16="http://schemas.microsoft.com/office/drawing/2014/main" id="{F1BF83CA-501D-60D2-759A-AB0FDC3814B5}"/>
+                <a16:creationId xmlns:a16="http://schemas.microsoft.com/office/drawing/2014/main" id="{79F45AE0-9438-0A21-89C1-9401EE1E4091}"/>
               </a:ext>
             </a:extLst>
           </p:cNvPr>
@@ -15612,8 +17633,12 @@
           </a:lstStyle>
           <a:p>
             <a:r>
-              <a:rPr lang="pt-BR" b="1" dirty="0"/>
-              <a:t>Resultados – Tempo de Correção</a:t>
+              <a:rPr b="1" dirty="0"/>
+              <a:t>Material e </a:t>
+            </a:r>
+            <a:r>
+              <a:rPr b="1" dirty="0" err="1"/>
+              <a:t>Métodos</a:t>
             </a:r>
             <a:endParaRPr b="1" dirty="0"/>
           </a:p>
@@ -15621,10 +17646,10 @@
       </p:sp>
       <p:sp>
         <p:nvSpPr>
-          <p:cNvPr id="3" name="Content Placeholder 2">
+          <p:cNvPr id="2" name="Content Placeholder 2">
             <a:extLst>
               <a:ext uri="{FF2B5EF4-FFF2-40B4-BE49-F238E27FC236}">
-                <a16:creationId xmlns:a16="http://schemas.microsoft.com/office/drawing/2014/main" id="{9F6A9758-7FAC-B834-A3FB-BC4F78430819}"/>
+                <a16:creationId xmlns:a16="http://schemas.microsoft.com/office/drawing/2014/main" id="{0CF92404-D24E-866C-CEFF-31338B7C745C}"/>
               </a:ext>
             </a:extLst>
           </p:cNvPr>
@@ -15635,8 +17660,8 @@
         </p:nvSpPr>
         <p:spPr>
           <a:xfrm>
-            <a:off x="1981200" y="1828799"/>
-            <a:ext cx="8229600" cy="4525963"/>
+            <a:off x="704851" y="1828799"/>
+            <a:ext cx="10772774" cy="4525963"/>
           </a:xfrm>
           <a:prstGeom prst="rect">
             <a:avLst/>
@@ -15787,1025 +17812,80 @@
             <a:pPr marL="0" indent="0">
               <a:buNone/>
             </a:pPr>
-            <a:endParaRPr dirty="0"/>
+            <a:r>
+              <a:rPr lang="pt-BR" dirty="0"/>
+              <a:t>Resultado esperado:</a:t>
+            </a:r>
+          </a:p>
+          <a:p>
+            <a:pPr marL="0" indent="0">
+              <a:buNone/>
+            </a:pPr>
+            <a:r>
+              <a:rPr lang="pt-BR" dirty="0"/>
+              <a:t>1. Consumir a API externa do Banco Central</a:t>
+            </a:r>
+          </a:p>
+          <a:p>
+            <a:pPr marL="0" indent="0">
+              <a:buNone/>
+            </a:pPr>
+            <a:r>
+              <a:rPr lang="pt-BR" dirty="0"/>
+              <a:t>2. Converter o retorno JSON usando o padrão </a:t>
+            </a:r>
+            <a:r>
+              <a:rPr lang="pt-BR" dirty="0" err="1"/>
+              <a:t>Adapter</a:t>
+            </a:r>
+            <a:endParaRPr lang="pt-BR" dirty="0"/>
+          </a:p>
+          <a:p>
+            <a:pPr marL="0" indent="0">
+              <a:buNone/>
+            </a:pPr>
+            <a:r>
+              <a:rPr lang="pt-BR" dirty="0"/>
+              <a:t>3. Salvar os dados no SQL Server</a:t>
+            </a:r>
+          </a:p>
+          <a:p>
+            <a:pPr marL="0" indent="0">
+              <a:buNone/>
+            </a:pPr>
+            <a:r>
+              <a:rPr lang="pt-BR" dirty="0"/>
+              <a:t>4. Expor um </a:t>
+            </a:r>
+            <a:r>
+              <a:rPr lang="pt-BR" dirty="0" err="1"/>
+              <a:t>endpoint</a:t>
+            </a:r>
+            <a:r>
+              <a:rPr lang="pt-BR" dirty="0"/>
+              <a:t> </a:t>
+            </a:r>
+            <a:r>
+              <a:rPr lang="pt-BR" dirty="0" err="1"/>
+              <a:t>FastAPI</a:t>
+            </a:r>
+            <a:r>
+              <a:rPr lang="pt-BR" dirty="0"/>
+              <a:t> para consulta filtrando por data</a:t>
+            </a:r>
+          </a:p>
+          <a:p>
+            <a:pPr marL="0" indent="0">
+              <a:buNone/>
+            </a:pPr>
+            <a:endParaRPr lang="pt-BR" dirty="0"/>
           </a:p>
         </p:txBody>
       </p:sp>
-      <p:graphicFrame>
-        <p:nvGraphicFramePr>
-          <p:cNvPr id="4" name="Tabela 3">
-            <a:extLst>
-              <a:ext uri="{FF2B5EF4-FFF2-40B4-BE49-F238E27FC236}">
-                <a16:creationId xmlns:a16="http://schemas.microsoft.com/office/drawing/2014/main" id="{07D232C9-81B2-7517-440A-67F483960A67}"/>
-              </a:ext>
-            </a:extLst>
-          </p:cNvPr>
-          <p:cNvGraphicFramePr>
-            <a:graphicFrameLocks noGrp="1"/>
-          </p:cNvGraphicFramePr>
-          <p:nvPr>
-            <p:extLst>
-              <p:ext uri="{D42A27DB-BD31-4B8C-83A1-F6EECF244321}">
-                <p14:modId xmlns:p14="http://schemas.microsoft.com/office/powerpoint/2010/main" val="690555408"/>
-              </p:ext>
-            </p:extLst>
-          </p:nvPr>
-        </p:nvGraphicFramePr>
-        <p:xfrm>
-          <a:off x="838200" y="2331720"/>
-          <a:ext cx="10515600" cy="2194560"/>
-        </p:xfrm>
-        <a:graphic>
-          <a:graphicData uri="http://schemas.openxmlformats.org/drawingml/2006/table">
-            <a:tbl>
-              <a:tblPr/>
-              <a:tblGrid>
-                <a:gridCol w="2103120">
-                  <a:extLst>
-                    <a:ext uri="{9D8B030D-6E8A-4147-A177-3AD203B41FA5}">
-                      <a16:colId xmlns:a16="http://schemas.microsoft.com/office/drawing/2014/main" val="2203664745"/>
-                    </a:ext>
-                  </a:extLst>
-                </a:gridCol>
-                <a:gridCol w="2103120">
-                  <a:extLst>
-                    <a:ext uri="{9D8B030D-6E8A-4147-A177-3AD203B41FA5}">
-                      <a16:colId xmlns:a16="http://schemas.microsoft.com/office/drawing/2014/main" val="3155353838"/>
-                    </a:ext>
-                  </a:extLst>
-                </a:gridCol>
-                <a:gridCol w="2103120">
-                  <a:extLst>
-                    <a:ext uri="{9D8B030D-6E8A-4147-A177-3AD203B41FA5}">
-                      <a16:colId xmlns:a16="http://schemas.microsoft.com/office/drawing/2014/main" val="1809273086"/>
-                    </a:ext>
-                  </a:extLst>
-                </a:gridCol>
-                <a:gridCol w="2103120">
-                  <a:extLst>
-                    <a:ext uri="{9D8B030D-6E8A-4147-A177-3AD203B41FA5}">
-                      <a16:colId xmlns:a16="http://schemas.microsoft.com/office/drawing/2014/main" val="1254040919"/>
-                    </a:ext>
-                  </a:extLst>
-                </a:gridCol>
-                <a:gridCol w="2103120">
-                  <a:extLst>
-                    <a:ext uri="{9D8B030D-6E8A-4147-A177-3AD203B41FA5}">
-                      <a16:colId xmlns:a16="http://schemas.microsoft.com/office/drawing/2014/main" val="3269808807"/>
-                    </a:ext>
-                  </a:extLst>
-                </a:gridCol>
-              </a:tblGrid>
-              <a:tr h="0">
-                <a:tc>
-                  <a:txBody>
-                    <a:bodyPr/>
-                    <a:lstStyle/>
-                    <a:p>
-                      <a:pPr>
-                        <a:buNone/>
-                      </a:pPr>
-                      <a:r>
-                        <a:rPr lang="pt-BR" b="1"/>
-                        <a:t>IA</a:t>
-                      </a:r>
-                    </a:p>
-                  </a:txBody>
-                  <a:tcPr anchor="ctr">
-                    <a:lnL>
-                      <a:noFill/>
-                    </a:lnL>
-                    <a:lnR>
-                      <a:noFill/>
-                    </a:lnR>
-                    <a:lnT>
-                      <a:noFill/>
-                    </a:lnT>
-                    <a:lnB>
-                      <a:noFill/>
-                    </a:lnB>
-                    <a:noFill/>
-                  </a:tcPr>
-                </a:tc>
-                <a:tc>
-                  <a:txBody>
-                    <a:bodyPr/>
-                    <a:lstStyle/>
-                    <a:p>
-                      <a:pPr>
-                        <a:buNone/>
-                      </a:pPr>
-                      <a:r>
-                        <a:rPr lang="pt-BR" b="1"/>
-                        <a:t>Total</a:t>
-                      </a:r>
-                    </a:p>
-                  </a:txBody>
-                  <a:tcPr anchor="ctr">
-                    <a:lnL>
-                      <a:noFill/>
-                    </a:lnL>
-                    <a:lnR>
-                      <a:noFill/>
-                    </a:lnR>
-                    <a:lnT>
-                      <a:noFill/>
-                    </a:lnT>
-                    <a:lnB>
-                      <a:noFill/>
-                    </a:lnB>
-                    <a:noFill/>
-                  </a:tcPr>
-                </a:tc>
-                <a:tc>
-                  <a:txBody>
-                    <a:bodyPr/>
-                    <a:lstStyle/>
-                    <a:p>
-                      <a:pPr>
-                        <a:buNone/>
-                      </a:pPr>
-                      <a:r>
-                        <a:rPr lang="pt-BR" b="1"/>
-                        <a:t>Segurança</a:t>
-                      </a:r>
-                    </a:p>
-                  </a:txBody>
-                  <a:tcPr anchor="ctr">
-                    <a:lnL>
-                      <a:noFill/>
-                    </a:lnL>
-                    <a:lnR>
-                      <a:noFill/>
-                    </a:lnR>
-                    <a:lnT>
-                      <a:noFill/>
-                    </a:lnT>
-                    <a:lnB>
-                      <a:noFill/>
-                    </a:lnB>
-                    <a:noFill/>
-                  </a:tcPr>
-                </a:tc>
-                <a:tc>
-                  <a:txBody>
-                    <a:bodyPr/>
-                    <a:lstStyle/>
-                    <a:p>
-                      <a:pPr>
-                        <a:buNone/>
-                      </a:pPr>
-                      <a:r>
-                        <a:rPr lang="pt-BR" b="1"/>
-                        <a:t>Confiabilidade</a:t>
-                      </a:r>
-                    </a:p>
-                  </a:txBody>
-                  <a:tcPr anchor="ctr">
-                    <a:lnL>
-                      <a:noFill/>
-                    </a:lnL>
-                    <a:lnR>
-                      <a:noFill/>
-                    </a:lnR>
-                    <a:lnT>
-                      <a:noFill/>
-                    </a:lnT>
-                    <a:lnB>
-                      <a:noFill/>
-                    </a:lnB>
-                    <a:noFill/>
-                  </a:tcPr>
-                </a:tc>
-                <a:tc>
-                  <a:txBody>
-                    <a:bodyPr/>
-                    <a:lstStyle/>
-                    <a:p>
-                      <a:pPr>
-                        <a:buNone/>
-                      </a:pPr>
-                      <a:r>
-                        <a:rPr lang="pt-BR" b="1" dirty="0"/>
-                        <a:t>Manutenção</a:t>
-                      </a:r>
-                    </a:p>
-                  </a:txBody>
-                  <a:tcPr anchor="ctr">
-                    <a:lnL>
-                      <a:noFill/>
-                    </a:lnL>
-                    <a:lnR>
-                      <a:noFill/>
-                    </a:lnR>
-                    <a:lnT>
-                      <a:noFill/>
-                    </a:lnT>
-                    <a:lnB>
-                      <a:noFill/>
-                    </a:lnB>
-                    <a:noFill/>
-                  </a:tcPr>
-                </a:tc>
-                <a:extLst>
-                  <a:ext uri="{0D108BD9-81ED-4DB2-BD59-A6C34878D82A}">
-                    <a16:rowId xmlns:a16="http://schemas.microsoft.com/office/drawing/2014/main" val="2633630947"/>
-                  </a:ext>
-                </a:extLst>
-              </a:tr>
-              <a:tr h="0">
-                <a:tc>
-                  <a:txBody>
-                    <a:bodyPr/>
-                    <a:lstStyle/>
-                    <a:p>
-                      <a:pPr>
-                        <a:buNone/>
-                      </a:pPr>
-                      <a:r>
-                        <a:rPr lang="pt-BR"/>
-                        <a:t>ChatGPT</a:t>
-                      </a:r>
-                    </a:p>
-                  </a:txBody>
-                  <a:tcPr anchor="ctr">
-                    <a:lnL>
-                      <a:noFill/>
-                    </a:lnL>
-                    <a:lnR>
-                      <a:noFill/>
-                    </a:lnR>
-                    <a:lnT>
-                      <a:noFill/>
-                    </a:lnT>
-                    <a:lnB>
-                      <a:noFill/>
-                    </a:lnB>
-                    <a:noFill/>
-                  </a:tcPr>
-                </a:tc>
-                <a:tc>
-                  <a:txBody>
-                    <a:bodyPr/>
-                    <a:lstStyle/>
-                    <a:p>
-                      <a:pPr>
-                        <a:buNone/>
-                      </a:pPr>
-                      <a:r>
-                        <a:rPr lang="pt-BR"/>
-                        <a:t>02h27</a:t>
-                      </a:r>
-                    </a:p>
-                  </a:txBody>
-                  <a:tcPr anchor="ctr">
-                    <a:lnL>
-                      <a:noFill/>
-                    </a:lnL>
-                    <a:lnR>
-                      <a:noFill/>
-                    </a:lnR>
-                    <a:lnT>
-                      <a:noFill/>
-                    </a:lnT>
-                    <a:lnB>
-                      <a:noFill/>
-                    </a:lnB>
-                    <a:noFill/>
-                  </a:tcPr>
-                </a:tc>
-                <a:tc>
-                  <a:txBody>
-                    <a:bodyPr/>
-                    <a:lstStyle/>
-                    <a:p>
-                      <a:pPr>
-                        <a:buNone/>
-                      </a:pPr>
-                      <a:r>
-                        <a:rPr lang="pt-BR"/>
-                        <a:t>00h30</a:t>
-                      </a:r>
-                    </a:p>
-                  </a:txBody>
-                  <a:tcPr anchor="ctr">
-                    <a:lnL>
-                      <a:noFill/>
-                    </a:lnL>
-                    <a:lnR>
-                      <a:noFill/>
-                    </a:lnR>
-                    <a:lnT>
-                      <a:noFill/>
-                    </a:lnT>
-                    <a:lnB>
-                      <a:noFill/>
-                    </a:lnB>
-                    <a:noFill/>
-                  </a:tcPr>
-                </a:tc>
-                <a:tc>
-                  <a:txBody>
-                    <a:bodyPr/>
-                    <a:lstStyle/>
-                    <a:p>
-                      <a:pPr>
-                        <a:buNone/>
-                      </a:pPr>
-                      <a:r>
-                        <a:rPr lang="pt-BR"/>
-                        <a:t>00h10</a:t>
-                      </a:r>
-                    </a:p>
-                  </a:txBody>
-                  <a:tcPr anchor="ctr">
-                    <a:lnL>
-                      <a:noFill/>
-                    </a:lnL>
-                    <a:lnR>
-                      <a:noFill/>
-                    </a:lnR>
-                    <a:lnT>
-                      <a:noFill/>
-                    </a:lnT>
-                    <a:lnB>
-                      <a:noFill/>
-                    </a:lnB>
-                    <a:noFill/>
-                  </a:tcPr>
-                </a:tc>
-                <a:tc>
-                  <a:txBody>
-                    <a:bodyPr/>
-                    <a:lstStyle/>
-                    <a:p>
-                      <a:pPr>
-                        <a:buNone/>
-                      </a:pPr>
-                      <a:r>
-                        <a:rPr lang="pt-BR"/>
-                        <a:t>01h47</a:t>
-                      </a:r>
-                    </a:p>
-                  </a:txBody>
-                  <a:tcPr anchor="ctr">
-                    <a:lnL>
-                      <a:noFill/>
-                    </a:lnL>
-                    <a:lnR>
-                      <a:noFill/>
-                    </a:lnR>
-                    <a:lnT>
-                      <a:noFill/>
-                    </a:lnT>
-                    <a:lnB>
-                      <a:noFill/>
-                    </a:lnB>
-                    <a:noFill/>
-                  </a:tcPr>
-                </a:tc>
-                <a:extLst>
-                  <a:ext uri="{0D108BD9-81ED-4DB2-BD59-A6C34878D82A}">
-                    <a16:rowId xmlns:a16="http://schemas.microsoft.com/office/drawing/2014/main" val="2237220283"/>
-                  </a:ext>
-                </a:extLst>
-              </a:tr>
-              <a:tr h="0">
-                <a:tc>
-                  <a:txBody>
-                    <a:bodyPr/>
-                    <a:lstStyle/>
-                    <a:p>
-                      <a:pPr>
-                        <a:buNone/>
-                      </a:pPr>
-                      <a:r>
-                        <a:rPr lang="pt-BR"/>
-                        <a:t>Copilot</a:t>
-                      </a:r>
-                    </a:p>
-                  </a:txBody>
-                  <a:tcPr anchor="ctr">
-                    <a:lnL>
-                      <a:noFill/>
-                    </a:lnL>
-                    <a:lnR>
-                      <a:noFill/>
-                    </a:lnR>
-                    <a:lnT>
-                      <a:noFill/>
-                    </a:lnT>
-                    <a:lnB>
-                      <a:noFill/>
-                    </a:lnB>
-                    <a:noFill/>
-                  </a:tcPr>
-                </a:tc>
-                <a:tc>
-                  <a:txBody>
-                    <a:bodyPr/>
-                    <a:lstStyle/>
-                    <a:p>
-                      <a:pPr>
-                        <a:buNone/>
-                      </a:pPr>
-                      <a:r>
-                        <a:rPr lang="pt-BR"/>
-                        <a:t>01h14</a:t>
-                      </a:r>
-                    </a:p>
-                  </a:txBody>
-                  <a:tcPr anchor="ctr">
-                    <a:lnL>
-                      <a:noFill/>
-                    </a:lnL>
-                    <a:lnR>
-                      <a:noFill/>
-                    </a:lnR>
-                    <a:lnT>
-                      <a:noFill/>
-                    </a:lnT>
-                    <a:lnB>
-                      <a:noFill/>
-                    </a:lnB>
-                    <a:noFill/>
-                  </a:tcPr>
-                </a:tc>
-                <a:tc>
-                  <a:txBody>
-                    <a:bodyPr/>
-                    <a:lstStyle/>
-                    <a:p>
-                      <a:pPr>
-                        <a:buNone/>
-                      </a:pPr>
-                      <a:r>
-                        <a:rPr lang="pt-BR"/>
-                        <a:t>00h30</a:t>
-                      </a:r>
-                    </a:p>
-                  </a:txBody>
-                  <a:tcPr anchor="ctr">
-                    <a:lnL>
-                      <a:noFill/>
-                    </a:lnL>
-                    <a:lnR>
-                      <a:noFill/>
-                    </a:lnR>
-                    <a:lnT>
-                      <a:noFill/>
-                    </a:lnT>
-                    <a:lnB>
-                      <a:noFill/>
-                    </a:lnB>
-                    <a:noFill/>
-                  </a:tcPr>
-                </a:tc>
-                <a:tc>
-                  <a:txBody>
-                    <a:bodyPr/>
-                    <a:lstStyle/>
-                    <a:p>
-                      <a:pPr>
-                        <a:buNone/>
-                      </a:pPr>
-                      <a:r>
-                        <a:rPr lang="pt-BR"/>
-                        <a:t>00h00</a:t>
-                      </a:r>
-                    </a:p>
-                  </a:txBody>
-                  <a:tcPr anchor="ctr">
-                    <a:lnL>
-                      <a:noFill/>
-                    </a:lnL>
-                    <a:lnR>
-                      <a:noFill/>
-                    </a:lnR>
-                    <a:lnT>
-                      <a:noFill/>
-                    </a:lnT>
-                    <a:lnB>
-                      <a:noFill/>
-                    </a:lnB>
-                    <a:noFill/>
-                  </a:tcPr>
-                </a:tc>
-                <a:tc>
-                  <a:txBody>
-                    <a:bodyPr/>
-                    <a:lstStyle/>
-                    <a:p>
-                      <a:pPr>
-                        <a:buNone/>
-                      </a:pPr>
-                      <a:r>
-                        <a:rPr lang="pt-BR"/>
-                        <a:t>00h44</a:t>
-                      </a:r>
-                    </a:p>
-                  </a:txBody>
-                  <a:tcPr anchor="ctr">
-                    <a:lnL>
-                      <a:noFill/>
-                    </a:lnL>
-                    <a:lnR>
-                      <a:noFill/>
-                    </a:lnR>
-                    <a:lnT>
-                      <a:noFill/>
-                    </a:lnT>
-                    <a:lnB>
-                      <a:noFill/>
-                    </a:lnB>
-                    <a:noFill/>
-                  </a:tcPr>
-                </a:tc>
-                <a:extLst>
-                  <a:ext uri="{0D108BD9-81ED-4DB2-BD59-A6C34878D82A}">
-                    <a16:rowId xmlns:a16="http://schemas.microsoft.com/office/drawing/2014/main" val="1175662075"/>
-                  </a:ext>
-                </a:extLst>
-              </a:tr>
-              <a:tr h="0">
-                <a:tc>
-                  <a:txBody>
-                    <a:bodyPr/>
-                    <a:lstStyle/>
-                    <a:p>
-                      <a:pPr>
-                        <a:buNone/>
-                      </a:pPr>
-                      <a:r>
-                        <a:rPr lang="pt-BR"/>
-                        <a:t>DeepSeek</a:t>
-                      </a:r>
-                    </a:p>
-                  </a:txBody>
-                  <a:tcPr anchor="ctr">
-                    <a:lnL>
-                      <a:noFill/>
-                    </a:lnL>
-                    <a:lnR>
-                      <a:noFill/>
-                    </a:lnR>
-                    <a:lnT>
-                      <a:noFill/>
-                    </a:lnT>
-                    <a:lnB>
-                      <a:noFill/>
-                    </a:lnB>
-                    <a:noFill/>
-                  </a:tcPr>
-                </a:tc>
-                <a:tc>
-                  <a:txBody>
-                    <a:bodyPr/>
-                    <a:lstStyle/>
-                    <a:p>
-                      <a:pPr>
-                        <a:buNone/>
-                      </a:pPr>
-                      <a:r>
-                        <a:rPr lang="pt-BR"/>
-                        <a:t>04h30</a:t>
-                      </a:r>
-                    </a:p>
-                  </a:txBody>
-                  <a:tcPr anchor="ctr">
-                    <a:lnL>
-                      <a:noFill/>
-                    </a:lnL>
-                    <a:lnR>
-                      <a:noFill/>
-                    </a:lnR>
-                    <a:lnT>
-                      <a:noFill/>
-                    </a:lnT>
-                    <a:lnB>
-                      <a:noFill/>
-                    </a:lnB>
-                    <a:noFill/>
-                  </a:tcPr>
-                </a:tc>
-                <a:tc>
-                  <a:txBody>
-                    <a:bodyPr/>
-                    <a:lstStyle/>
-                    <a:p>
-                      <a:pPr>
-                        <a:buNone/>
-                      </a:pPr>
-                      <a:r>
-                        <a:rPr lang="pt-BR"/>
-                        <a:t>00h30</a:t>
-                      </a:r>
-                    </a:p>
-                  </a:txBody>
-                  <a:tcPr anchor="ctr">
-                    <a:lnL>
-                      <a:noFill/>
-                    </a:lnL>
-                    <a:lnR>
-                      <a:noFill/>
-                    </a:lnR>
-                    <a:lnT>
-                      <a:noFill/>
-                    </a:lnT>
-                    <a:lnB>
-                      <a:noFill/>
-                    </a:lnB>
-                    <a:noFill/>
-                  </a:tcPr>
-                </a:tc>
-                <a:tc>
-                  <a:txBody>
-                    <a:bodyPr/>
-                    <a:lstStyle/>
-                    <a:p>
-                      <a:pPr>
-                        <a:buNone/>
-                      </a:pPr>
-                      <a:r>
-                        <a:rPr lang="pt-BR"/>
-                        <a:t>00h00</a:t>
-                      </a:r>
-                    </a:p>
-                  </a:txBody>
-                  <a:tcPr anchor="ctr">
-                    <a:lnL>
-                      <a:noFill/>
-                    </a:lnL>
-                    <a:lnR>
-                      <a:noFill/>
-                    </a:lnR>
-                    <a:lnT>
-                      <a:noFill/>
-                    </a:lnT>
-                    <a:lnB>
-                      <a:noFill/>
-                    </a:lnB>
-                    <a:noFill/>
-                  </a:tcPr>
-                </a:tc>
-                <a:tc>
-                  <a:txBody>
-                    <a:bodyPr/>
-                    <a:lstStyle/>
-                    <a:p>
-                      <a:pPr>
-                        <a:buNone/>
-                      </a:pPr>
-                      <a:r>
-                        <a:rPr lang="pt-BR"/>
-                        <a:t>04h00</a:t>
-                      </a:r>
-                    </a:p>
-                  </a:txBody>
-                  <a:tcPr anchor="ctr">
-                    <a:lnL>
-                      <a:noFill/>
-                    </a:lnL>
-                    <a:lnR>
-                      <a:noFill/>
-                    </a:lnR>
-                    <a:lnT>
-                      <a:noFill/>
-                    </a:lnT>
-                    <a:lnB>
-                      <a:noFill/>
-                    </a:lnB>
-                    <a:noFill/>
-                  </a:tcPr>
-                </a:tc>
-                <a:extLst>
-                  <a:ext uri="{0D108BD9-81ED-4DB2-BD59-A6C34878D82A}">
-                    <a16:rowId xmlns:a16="http://schemas.microsoft.com/office/drawing/2014/main" val="635531852"/>
-                  </a:ext>
-                </a:extLst>
-              </a:tr>
-              <a:tr h="0">
-                <a:tc>
-                  <a:txBody>
-                    <a:bodyPr/>
-                    <a:lstStyle/>
-                    <a:p>
-                      <a:pPr>
-                        <a:buNone/>
-                      </a:pPr>
-                      <a:r>
-                        <a:rPr lang="pt-BR"/>
-                        <a:t>Gemini</a:t>
-                      </a:r>
-                    </a:p>
-                  </a:txBody>
-                  <a:tcPr anchor="ctr">
-                    <a:lnL>
-                      <a:noFill/>
-                    </a:lnL>
-                    <a:lnR>
-                      <a:noFill/>
-                    </a:lnR>
-                    <a:lnT>
-                      <a:noFill/>
-                    </a:lnT>
-                    <a:lnB>
-                      <a:noFill/>
-                    </a:lnB>
-                    <a:noFill/>
-                  </a:tcPr>
-                </a:tc>
-                <a:tc>
-                  <a:txBody>
-                    <a:bodyPr/>
-                    <a:lstStyle/>
-                    <a:p>
-                      <a:pPr>
-                        <a:buNone/>
-                      </a:pPr>
-                      <a:r>
-                        <a:rPr lang="pt-BR"/>
-                        <a:t>03h45</a:t>
-                      </a:r>
-                    </a:p>
-                  </a:txBody>
-                  <a:tcPr anchor="ctr">
-                    <a:lnL>
-                      <a:noFill/>
-                    </a:lnL>
-                    <a:lnR>
-                      <a:noFill/>
-                    </a:lnR>
-                    <a:lnT>
-                      <a:noFill/>
-                    </a:lnT>
-                    <a:lnB>
-                      <a:noFill/>
-                    </a:lnB>
-                    <a:noFill/>
-                  </a:tcPr>
-                </a:tc>
-                <a:tc>
-                  <a:txBody>
-                    <a:bodyPr/>
-                    <a:lstStyle/>
-                    <a:p>
-                      <a:pPr>
-                        <a:buNone/>
-                      </a:pPr>
-                      <a:r>
-                        <a:rPr lang="pt-BR"/>
-                        <a:t>01h00</a:t>
-                      </a:r>
-                    </a:p>
-                  </a:txBody>
-                  <a:tcPr anchor="ctr">
-                    <a:lnL>
-                      <a:noFill/>
-                    </a:lnL>
-                    <a:lnR>
-                      <a:noFill/>
-                    </a:lnR>
-                    <a:lnT>
-                      <a:noFill/>
-                    </a:lnT>
-                    <a:lnB>
-                      <a:noFill/>
-                    </a:lnB>
-                    <a:noFill/>
-                  </a:tcPr>
-                </a:tc>
-                <a:tc>
-                  <a:txBody>
-                    <a:bodyPr/>
-                    <a:lstStyle/>
-                    <a:p>
-                      <a:pPr>
-                        <a:buNone/>
-                      </a:pPr>
-                      <a:r>
-                        <a:rPr lang="pt-BR"/>
-                        <a:t>00h00</a:t>
-                      </a:r>
-                    </a:p>
-                  </a:txBody>
-                  <a:tcPr anchor="ctr">
-                    <a:lnL>
-                      <a:noFill/>
-                    </a:lnL>
-                    <a:lnR>
-                      <a:noFill/>
-                    </a:lnR>
-                    <a:lnT>
-                      <a:noFill/>
-                    </a:lnT>
-                    <a:lnB>
-                      <a:noFill/>
-                    </a:lnB>
-                    <a:noFill/>
-                  </a:tcPr>
-                </a:tc>
-                <a:tc>
-                  <a:txBody>
-                    <a:bodyPr/>
-                    <a:lstStyle/>
-                    <a:p>
-                      <a:pPr>
-                        <a:buNone/>
-                      </a:pPr>
-                      <a:r>
-                        <a:rPr lang="pt-BR"/>
-                        <a:t>02h45</a:t>
-                      </a:r>
-                    </a:p>
-                  </a:txBody>
-                  <a:tcPr anchor="ctr">
-                    <a:lnL>
-                      <a:noFill/>
-                    </a:lnL>
-                    <a:lnR>
-                      <a:noFill/>
-                    </a:lnR>
-                    <a:lnT>
-                      <a:noFill/>
-                    </a:lnT>
-                    <a:lnB>
-                      <a:noFill/>
-                    </a:lnB>
-                    <a:noFill/>
-                  </a:tcPr>
-                </a:tc>
-                <a:extLst>
-                  <a:ext uri="{0D108BD9-81ED-4DB2-BD59-A6C34878D82A}">
-                    <a16:rowId xmlns:a16="http://schemas.microsoft.com/office/drawing/2014/main" val="2156528909"/>
-                  </a:ext>
-                </a:extLst>
-              </a:tr>
-              <a:tr h="0">
-                <a:tc>
-                  <a:txBody>
-                    <a:bodyPr/>
-                    <a:lstStyle/>
-                    <a:p>
-                      <a:pPr>
-                        <a:buNone/>
-                      </a:pPr>
-                      <a:r>
-                        <a:rPr lang="pt-BR"/>
-                        <a:t>MetaAI</a:t>
-                      </a:r>
-                    </a:p>
-                  </a:txBody>
-                  <a:tcPr anchor="ctr">
-                    <a:lnL>
-                      <a:noFill/>
-                    </a:lnL>
-                    <a:lnR>
-                      <a:noFill/>
-                    </a:lnR>
-                    <a:lnT>
-                      <a:noFill/>
-                    </a:lnT>
-                    <a:lnB>
-                      <a:noFill/>
-                    </a:lnB>
-                    <a:noFill/>
-                  </a:tcPr>
-                </a:tc>
-                <a:tc>
-                  <a:txBody>
-                    <a:bodyPr/>
-                    <a:lstStyle/>
-                    <a:p>
-                      <a:pPr>
-                        <a:buNone/>
-                      </a:pPr>
-                      <a:r>
-                        <a:rPr lang="pt-BR"/>
-                        <a:t>02h07</a:t>
-                      </a:r>
-                    </a:p>
-                  </a:txBody>
-                  <a:tcPr anchor="ctr">
-                    <a:lnL>
-                      <a:noFill/>
-                    </a:lnL>
-                    <a:lnR>
-                      <a:noFill/>
-                    </a:lnR>
-                    <a:lnT>
-                      <a:noFill/>
-                    </a:lnT>
-                    <a:lnB>
-                      <a:noFill/>
-                    </a:lnB>
-                    <a:noFill/>
-                  </a:tcPr>
-                </a:tc>
-                <a:tc>
-                  <a:txBody>
-                    <a:bodyPr/>
-                    <a:lstStyle/>
-                    <a:p>
-                      <a:pPr>
-                        <a:buNone/>
-                      </a:pPr>
-                      <a:r>
-                        <a:rPr lang="pt-BR"/>
-                        <a:t>01h00</a:t>
-                      </a:r>
-                    </a:p>
-                  </a:txBody>
-                  <a:tcPr anchor="ctr">
-                    <a:lnL>
-                      <a:noFill/>
-                    </a:lnL>
-                    <a:lnR>
-                      <a:noFill/>
-                    </a:lnR>
-                    <a:lnT>
-                      <a:noFill/>
-                    </a:lnT>
-                    <a:lnB>
-                      <a:noFill/>
-                    </a:lnB>
-                    <a:noFill/>
-                  </a:tcPr>
-                </a:tc>
-                <a:tc>
-                  <a:txBody>
-                    <a:bodyPr/>
-                    <a:lstStyle/>
-                    <a:p>
-                      <a:pPr>
-                        <a:buNone/>
-                      </a:pPr>
-                      <a:r>
-                        <a:rPr lang="pt-BR"/>
-                        <a:t>00h00</a:t>
-                      </a:r>
-                    </a:p>
-                  </a:txBody>
-                  <a:tcPr anchor="ctr">
-                    <a:lnL>
-                      <a:noFill/>
-                    </a:lnL>
-                    <a:lnR>
-                      <a:noFill/>
-                    </a:lnR>
-                    <a:lnT>
-                      <a:noFill/>
-                    </a:lnT>
-                    <a:lnB>
-                      <a:noFill/>
-                    </a:lnB>
-                    <a:noFill/>
-                  </a:tcPr>
-                </a:tc>
-                <a:tc>
-                  <a:txBody>
-                    <a:bodyPr/>
-                    <a:lstStyle/>
-                    <a:p>
-                      <a:pPr>
-                        <a:buNone/>
-                      </a:pPr>
-                      <a:r>
-                        <a:rPr lang="pt-BR" dirty="0"/>
-                        <a:t>01h07</a:t>
-                      </a:r>
-                    </a:p>
-                  </a:txBody>
-                  <a:tcPr anchor="ctr">
-                    <a:lnL>
-                      <a:noFill/>
-                    </a:lnL>
-                    <a:lnR>
-                      <a:noFill/>
-                    </a:lnR>
-                    <a:lnT>
-                      <a:noFill/>
-                    </a:lnT>
-                    <a:lnB>
-                      <a:noFill/>
-                    </a:lnB>
-                    <a:noFill/>
-                  </a:tcPr>
-                </a:tc>
-                <a:extLst>
-                  <a:ext uri="{0D108BD9-81ED-4DB2-BD59-A6C34878D82A}">
-                    <a16:rowId xmlns:a16="http://schemas.microsoft.com/office/drawing/2014/main" val="2188846798"/>
-                  </a:ext>
-                </a:extLst>
-              </a:tr>
-            </a:tbl>
-          </a:graphicData>
-        </a:graphic>
-      </p:graphicFrame>
     </p:spTree>
     <p:extLst>
       <p:ext uri="{BB962C8B-B14F-4D97-AF65-F5344CB8AC3E}">
-        <p14:creationId xmlns:p14="http://schemas.microsoft.com/office/powerpoint/2010/main" val="3348309468"/>
+        <p14:creationId xmlns:p14="http://schemas.microsoft.com/office/powerpoint/2010/main" val="1137564472"/>
       </p:ext>
     </p:extLst>
   </p:cSld>

--- a/_DOC/Apresentação Igor Ayello Borges.pptx
+++ b/_DOC/Apresentação Igor Ayello Borges.pptx
@@ -528,7 +528,7 @@
               <a:pPr>
                 <a:defRPr/>
               </a:pPr>
-              <a:t>07/10/2025</a:t>
+              <a:t>08/10/2025</a:t>
             </a:fld>
             <a:endParaRPr lang="pt-BR"/>
           </a:p>
@@ -741,7 +741,7 @@
               <a:pPr>
                 <a:defRPr/>
               </a:pPr>
-              <a:t>07/10/2025</a:t>
+              <a:t>08/10/2025</a:t>
             </a:fld>
             <a:endParaRPr lang="pt-BR"/>
           </a:p>
@@ -964,7 +964,7 @@
               <a:pPr>
                 <a:defRPr/>
               </a:pPr>
-              <a:t>07/10/2025</a:t>
+              <a:t>08/10/2025</a:t>
             </a:fld>
             <a:endParaRPr lang="pt-BR"/>
           </a:p>
@@ -1201,7 +1201,7 @@
           <a:p>
             <a:fld id="{B0724664-DFBB-4E94-A029-90BF542E375A}" type="datetimeFigureOut">
               <a:rPr lang="pt-BR" smtClean="0"/>
-              <a:t>07/10/2025</a:t>
+              <a:t>08/10/2025</a:t>
             </a:fld>
             <a:endParaRPr lang="pt-BR"/>
           </a:p>
@@ -1399,7 +1399,7 @@
           <a:p>
             <a:fld id="{B0724664-DFBB-4E94-A029-90BF542E375A}" type="datetimeFigureOut">
               <a:rPr lang="pt-BR" smtClean="0"/>
-              <a:t>07/10/2025</a:t>
+              <a:t>08/10/2025</a:t>
             </a:fld>
             <a:endParaRPr lang="pt-BR"/>
           </a:p>
@@ -1674,7 +1674,7 @@
           <a:p>
             <a:fld id="{B0724664-DFBB-4E94-A029-90BF542E375A}" type="datetimeFigureOut">
               <a:rPr lang="pt-BR" smtClean="0"/>
-              <a:t>07/10/2025</a:t>
+              <a:t>08/10/2025</a:t>
             </a:fld>
             <a:endParaRPr lang="pt-BR"/>
           </a:p>
@@ -1939,7 +1939,7 @@
           <a:p>
             <a:fld id="{B0724664-DFBB-4E94-A029-90BF542E375A}" type="datetimeFigureOut">
               <a:rPr lang="pt-BR" smtClean="0"/>
-              <a:t>07/10/2025</a:t>
+              <a:t>08/10/2025</a:t>
             </a:fld>
             <a:endParaRPr lang="pt-BR"/>
           </a:p>
@@ -2351,7 +2351,7 @@
           <a:p>
             <a:fld id="{B0724664-DFBB-4E94-A029-90BF542E375A}" type="datetimeFigureOut">
               <a:rPr lang="pt-BR" smtClean="0"/>
-              <a:t>07/10/2025</a:t>
+              <a:t>08/10/2025</a:t>
             </a:fld>
             <a:endParaRPr lang="pt-BR"/>
           </a:p>
@@ -2492,7 +2492,7 @@
           <a:p>
             <a:fld id="{B0724664-DFBB-4E94-A029-90BF542E375A}" type="datetimeFigureOut">
               <a:rPr lang="pt-BR" smtClean="0"/>
-              <a:t>07/10/2025</a:t>
+              <a:t>08/10/2025</a:t>
             </a:fld>
             <a:endParaRPr lang="pt-BR"/>
           </a:p>
@@ -2605,7 +2605,7 @@
           <a:p>
             <a:fld id="{B0724664-DFBB-4E94-A029-90BF542E375A}" type="datetimeFigureOut">
               <a:rPr lang="pt-BR" smtClean="0"/>
-              <a:t>07/10/2025</a:t>
+              <a:t>08/10/2025</a:t>
             </a:fld>
             <a:endParaRPr lang="pt-BR"/>
           </a:p>
@@ -2916,7 +2916,7 @@
           <a:p>
             <a:fld id="{B0724664-DFBB-4E94-A029-90BF542E375A}" type="datetimeFigureOut">
               <a:rPr lang="pt-BR" smtClean="0"/>
-              <a:t>07/10/2025</a:t>
+              <a:t>08/10/2025</a:t>
             </a:fld>
             <a:endParaRPr lang="pt-BR"/>
           </a:p>
@@ -3112,7 +3112,7 @@
               <a:pPr>
                 <a:defRPr/>
               </a:pPr>
-              <a:t>07/10/2025</a:t>
+              <a:t>08/10/2025</a:t>
             </a:fld>
             <a:endParaRPr lang="pt-BR"/>
           </a:p>
@@ -3477,7 +3477,7 @@
           <a:p>
             <a:fld id="{B0724664-DFBB-4E94-A029-90BF542E375A}" type="datetimeFigureOut">
               <a:rPr lang="pt-BR" smtClean="0"/>
-              <a:t>07/10/2025</a:t>
+              <a:t>08/10/2025</a:t>
             </a:fld>
             <a:endParaRPr lang="pt-BR"/>
           </a:p>
@@ -3675,7 +3675,7 @@
           <a:p>
             <a:fld id="{B0724664-DFBB-4E94-A029-90BF542E375A}" type="datetimeFigureOut">
               <a:rPr lang="pt-BR" smtClean="0"/>
-              <a:t>07/10/2025</a:t>
+              <a:t>08/10/2025</a:t>
             </a:fld>
             <a:endParaRPr lang="pt-BR"/>
           </a:p>
@@ -3883,7 +3883,7 @@
           <a:p>
             <a:fld id="{B0724664-DFBB-4E94-A029-90BF542E375A}" type="datetimeFigureOut">
               <a:rPr lang="pt-BR" smtClean="0"/>
-              <a:t>07/10/2025</a:t>
+              <a:t>08/10/2025</a:t>
             </a:fld>
             <a:endParaRPr lang="pt-BR"/>
           </a:p>
@@ -4156,7 +4156,7 @@
               <a:pPr>
                 <a:defRPr/>
               </a:pPr>
-              <a:t>07/10/2025</a:t>
+              <a:t>08/10/2025</a:t>
             </a:fld>
             <a:endParaRPr lang="pt-BR"/>
           </a:p>
@@ -4430,7 +4430,7 @@
               <a:pPr>
                 <a:defRPr/>
               </a:pPr>
-              <a:t>07/10/2025</a:t>
+              <a:t>08/10/2025</a:t>
             </a:fld>
             <a:endParaRPr lang="pt-BR"/>
           </a:p>
@@ -4839,7 +4839,7 @@
               <a:pPr>
                 <a:defRPr/>
               </a:pPr>
-              <a:t>07/10/2025</a:t>
+              <a:t>08/10/2025</a:t>
             </a:fld>
             <a:endParaRPr lang="pt-BR"/>
           </a:p>
@@ -5001,7 +5001,7 @@
               <a:pPr>
                 <a:defRPr/>
               </a:pPr>
-              <a:t>07/10/2025</a:t>
+              <a:t>08/10/2025</a:t>
             </a:fld>
             <a:endParaRPr lang="pt-BR"/>
           </a:p>
@@ -5141,7 +5141,7 @@
               <a:pPr>
                 <a:defRPr/>
               </a:pPr>
-              <a:t>07/10/2025</a:t>
+              <a:t>08/10/2025</a:t>
             </a:fld>
             <a:endParaRPr lang="pt-BR"/>
           </a:p>
@@ -5461,7 +5461,7 @@
               <a:pPr>
                 <a:defRPr/>
               </a:pPr>
-              <a:t>07/10/2025</a:t>
+              <a:t>08/10/2025</a:t>
             </a:fld>
             <a:endParaRPr lang="pt-BR"/>
           </a:p>
@@ -5761,7 +5761,7 @@
               <a:pPr>
                 <a:defRPr/>
               </a:pPr>
-              <a:t>07/10/2025</a:t>
+              <a:t>08/10/2025</a:t>
             </a:fld>
             <a:endParaRPr lang="pt-BR"/>
           </a:p>
@@ -6086,7 +6086,7 @@
               <a:pPr>
                 <a:defRPr/>
               </a:pPr>
-              <a:t>07/10/2025</a:t>
+              <a:t>08/10/2025</a:t>
             </a:fld>
             <a:endParaRPr lang="pt-BR"/>
           </a:p>
@@ -6825,7 +6825,7 @@
           <a:p>
             <a:fld id="{B0724664-DFBB-4E94-A029-90BF542E375A}" type="datetimeFigureOut">
               <a:rPr lang="pt-BR" smtClean="0"/>
-              <a:t>07/10/2025</a:t>
+              <a:t>08/10/2025</a:t>
             </a:fld>
             <a:endParaRPr lang="pt-BR"/>
           </a:p>
@@ -16922,7 +16922,7 @@
         </p:spPr>
         <p:txBody>
           <a:bodyPr vert="horz" lIns="91440" tIns="45720" rIns="91440" bIns="45720" rtlCol="0">
-            <a:normAutofit fontScale="92500" lnSpcReduction="20000"/>
+            <a:normAutofit fontScale="92500"/>
           </a:bodyPr>
           <a:lstStyle>
             <a:lvl1pPr marL="342900" indent="-342900" algn="l" defTabSz="457200" rtl="0" eaLnBrk="1" latinLnBrk="0" hangingPunct="1">
@@ -17061,39 +17061,6 @@
               </a:defRPr>
             </a:lvl9pPr>
           </a:lstStyle>
-          <a:p>
-            <a:pPr marL="0" indent="0">
-              <a:buNone/>
-            </a:pPr>
-            <a:r>
-              <a:rPr lang="pt-BR" dirty="0"/>
-              <a:t>Cada modelo de IA (ChatGPT, </a:t>
-            </a:r>
-            <a:r>
-              <a:rPr lang="pt-BR" dirty="0" err="1"/>
-              <a:t>Copilot</a:t>
-            </a:r>
-            <a:r>
-              <a:rPr lang="pt-BR" dirty="0"/>
-              <a:t>, </a:t>
-            </a:r>
-            <a:r>
-              <a:rPr lang="pt-BR" dirty="0" err="1"/>
-              <a:t>DeepSeek</a:t>
-            </a:r>
-            <a:r>
-              <a:rPr lang="pt-BR" dirty="0"/>
-              <a:t>, Gemini e Meta AI) recebeu os mesmos prompts para gerar o </a:t>
-            </a:r>
-            <a:r>
-              <a:rPr lang="pt-BR" dirty="0" err="1"/>
-              <a:t>backend</a:t>
-            </a:r>
-            <a:r>
-              <a:rPr lang="pt-BR" dirty="0"/>
-              <a:t> de uma API voltada à simulação de investimentos, utilizando:</a:t>
-            </a:r>
-          </a:p>
           <a:p>
             <a:pPr marL="0" indent="0">
               <a:buNone/>
@@ -18506,6 +18473,17 @@
 </file>
 
 <file path=customXml/item1.xml><?xml version="1.0" encoding="utf-8"?>
+<p:properties xmlns:p="http://schemas.microsoft.com/office/2006/metadata/properties" xmlns:xsi="http://www.w3.org/2001/XMLSchema-instance" xmlns:pc="http://schemas.microsoft.com/office/infopath/2007/PartnerControls">
+  <documentManagement>
+    <lcf76f155ced4ddcb4097134ff3c332f xmlns="1e7d8aaf-77fb-4419-819f-502bcc31ffe3">
+      <Terms xmlns="http://schemas.microsoft.com/office/infopath/2007/PartnerControls"/>
+    </lcf76f155ced4ddcb4097134ff3c332f>
+    <TaxCatchAll xmlns="2c89dc19-a755-4b1f-8ccb-ddc282e02978" xsi:nil="true"/>
+  </documentManagement>
+</p:properties>
+</file>
+
+<file path=customXml/item2.xml><?xml version="1.0" encoding="utf-8"?>
 <ct:contentTypeSchema xmlns:ct="http://schemas.microsoft.com/office/2006/metadata/contentType" xmlns:ma="http://schemas.microsoft.com/office/2006/metadata/properties/metaAttributes" ct:_="" ma:_="" ma:contentTypeName="Documento" ma:contentTypeID="0x01010008CFA7B293EDBE4DB98FBC161D82B39F" ma:contentTypeVersion="15" ma:contentTypeDescription="Crie um novo documento." ma:contentTypeScope="" ma:versionID="ed78836dbbd60ef5b47f46abba0ddc66">
   <xsd:schema xmlns:xsd="http://www.w3.org/2001/XMLSchema" xmlns:xs="http://www.w3.org/2001/XMLSchema" xmlns:p="http://schemas.microsoft.com/office/2006/metadata/properties" xmlns:ns2="2c89dc19-a755-4b1f-8ccb-ddc282e02978" xmlns:ns3="1e7d8aaf-77fb-4419-819f-502bcc31ffe3" targetNamespace="http://schemas.microsoft.com/office/2006/metadata/properties" ma:root="true" ma:fieldsID="f28b1225859e7fd7734d1009df438026" ns2:_="" ns3:_="">
     <xsd:import namespace="2c89dc19-a755-4b1f-8ccb-ddc282e02978"/>
@@ -18740,17 +18718,6 @@
 </ct:contentTypeSchema>
 </file>
 
-<file path=customXml/item2.xml><?xml version="1.0" encoding="utf-8"?>
-<p:properties xmlns:p="http://schemas.microsoft.com/office/2006/metadata/properties" xmlns:xsi="http://www.w3.org/2001/XMLSchema-instance" xmlns:pc="http://schemas.microsoft.com/office/infopath/2007/PartnerControls">
-  <documentManagement>
-    <lcf76f155ced4ddcb4097134ff3c332f xmlns="1e7d8aaf-77fb-4419-819f-502bcc31ffe3">
-      <Terms xmlns="http://schemas.microsoft.com/office/infopath/2007/PartnerControls"/>
-    </lcf76f155ced4ddcb4097134ff3c332f>
-    <TaxCatchAll xmlns="2c89dc19-a755-4b1f-8ccb-ddc282e02978" xsi:nil="true"/>
-  </documentManagement>
-</p:properties>
-</file>
-
 <file path=customXml/item3.xml><?xml version="1.0" encoding="utf-8"?>
 <?mso-contentType ?>
 <FormTemplates xmlns="http://schemas.microsoft.com/sharepoint/v3/contenttype/forms">
@@ -18761,6 +18728,17 @@
 </file>
 
 <file path=customXml/itemProps1.xml><?xml version="1.0" encoding="utf-8"?>
+<ds:datastoreItem xmlns:ds="http://schemas.openxmlformats.org/officeDocument/2006/customXml" ds:itemID="{01A62DB6-902C-42C2-8D0F-84FB049FEE65}">
+  <ds:schemaRefs>
+    <ds:schemaRef ds:uri="http://schemas.microsoft.com/office/2006/metadata/properties"/>
+    <ds:schemaRef ds:uri="http://schemas.microsoft.com/office/infopath/2007/PartnerControls"/>
+    <ds:schemaRef ds:uri="1e7d8aaf-77fb-4419-819f-502bcc31ffe3"/>
+    <ds:schemaRef ds:uri="2c89dc19-a755-4b1f-8ccb-ddc282e02978"/>
+  </ds:schemaRefs>
+</ds:datastoreItem>
+</file>
+
+<file path=customXml/itemProps2.xml><?xml version="1.0" encoding="utf-8"?>
 <ds:datastoreItem xmlns:ds="http://schemas.openxmlformats.org/officeDocument/2006/customXml" ds:itemID="{35E43D43-768B-4037-BB07-231DDA2772F0}">
   <ds:schemaRefs>
     <ds:schemaRef ds:uri="http://schemas.microsoft.com/office/2006/metadata/contentType"/>
@@ -18779,17 +18757,6 @@
 </ds:datastoreItem>
 </file>
 
-<file path=customXml/itemProps2.xml><?xml version="1.0" encoding="utf-8"?>
-<ds:datastoreItem xmlns:ds="http://schemas.openxmlformats.org/officeDocument/2006/customXml" ds:itemID="{01A62DB6-902C-42C2-8D0F-84FB049FEE65}">
-  <ds:schemaRefs>
-    <ds:schemaRef ds:uri="http://schemas.microsoft.com/office/2006/metadata/properties"/>
-    <ds:schemaRef ds:uri="http://schemas.microsoft.com/office/infopath/2007/PartnerControls"/>
-    <ds:schemaRef ds:uri="1e7d8aaf-77fb-4419-819f-502bcc31ffe3"/>
-    <ds:schemaRef ds:uri="2c89dc19-a755-4b1f-8ccb-ddc282e02978"/>
-  </ds:schemaRefs>
-</ds:datastoreItem>
-</file>
-
 <file path=customXml/itemProps3.xml><?xml version="1.0" encoding="utf-8"?>
 <ds:datastoreItem xmlns:ds="http://schemas.openxmlformats.org/officeDocument/2006/customXml" ds:itemID="{555DBCE5-0FAE-4B8C-8A8A-6EE5B61A622F}">
   <ds:schemaRefs>
